--- a/Podcast-Studio-Presentation.pptx
+++ b/Podcast-Studio-Presentation.pptx
@@ -507,7 +507,7 @@
           <a:p>
             <a:r>
               <a:rPr lang="en-US" dirty="0"/>
-              <a:t>Title. SPEAKER 1 opens: name the team and what we built in one line.</a:t>
+              <a:t>Title. Adam opens: name the team and what we built in one line.</a:t>
             </a:r>
             <a:endParaRPr lang="en-US" dirty="0"/>
           </a:p>
@@ -595,7 +595,7 @@
           <a:p>
             <a:r>
               <a:rPr lang="en-US" dirty="0"/>
-              <a:t>SPEAKER 1 — Problem. Anchor it in a real audience; hand off to SPEAKER 2 for the live demo.</a:t>
+              <a:t>Adam — Problem. Anchor it in a real audience; hand off to Ugo for the live demo.</a:t>
             </a:r>
             <a:endParaRPr lang="en-US" dirty="0"/>
           </a:p>
@@ -683,7 +683,7 @@
           <a:p>
             <a:r>
               <a:rPr lang="en-US" dirty="0"/>
-              <a:t>Shown while SPEAKER 2 demos / SPEAKER 3 explains. Call out 2-3 technical choices — data structures answers a graded criterion.</a:t>
+              <a:t>Shown while Ugo demos / Anand explains. Call out 2-3 technical choices — data structures answers a graded criterion.</a:t>
             </a:r>
             <a:endParaRPr lang="en-US" dirty="0"/>
           </a:p>
@@ -771,7 +771,7 @@
           <a:p>
             <a:r>
               <a:rPr lang="en-US" dirty="0"/>
-              <a:t>SPEAKER 2 — Live demo (~3.5 min). Keep to pick-a-saved-lesson. If Wi-Fi/API stalls, play a pre-generated mp3 from output/ and keep talking.</a:t>
+              <a:t>Ugo — Live demo (~3.5 min). Keep to pick-a-saved-lesson. If Wi-Fi/API stalls, play a pre-generated mp3 from output/ and keep talking.</a:t>
             </a:r>
             <a:endParaRPr lang="en-US" dirty="0"/>
           </a:p>
@@ -859,7 +859,7 @@
           <a:p>
             <a:r>
               <a:rPr lang="en-US" dirty="0"/>
-              <a:t>SPEAKER 3 — Takeaways + technical choices + what's next (~1.5 min), then hand to Q&amp;A.</a:t>
+              <a:t>Anand — Takeaways + technical choices + what's next (~1.5 min), then hand to Q&amp;A.</a:t>
             </a:r>
             <a:endParaRPr lang="en-US" dirty="0"/>
           </a:p>
@@ -947,7 +947,7 @@
           <a:p>
             <a:r>
               <a:rPr lang="en-US" dirty="0"/>
-              <a:t>All three field Q&amp;A. SPEAKER 1: audience/use. SPEAKER 2: demo/product/cost. SPEAKER 3: technical.</a:t>
+              <a:t>All three field Q&amp;A. Adam: audience/use. Ugo: demo/product/cost. Anand: technical.</a:t>
             </a:r>
             <a:endParaRPr lang="en-US" dirty="0"/>
           </a:p>
@@ -1671,7 +1671,7 @@
                 <a:ea typeface="Cambria" pitchFamily="34" charset="-122"/>
                 <a:cs typeface="Cambria" pitchFamily="34" charset="-120"/>
               </a:rPr>
-              <a:t>Daily Lesson Recapper</a:t>
+              <a:t>Content Recapper</a:t>
             </a:r>
             <a:endParaRPr lang="en-US" sz="2800" dirty="0"/>
           </a:p>
@@ -1710,7 +1710,7 @@
                 <a:ea typeface="Calibri" pitchFamily="34" charset="-122"/>
                 <a:cs typeface="Calibri" pitchFamily="34" charset="-120"/>
               </a:rPr>
-              <a:t>Turn any lesson into a one-minute spoken recap.</a:t>
+              <a:t>Turn any lesson, article, or report into a short spoken recap.</a:t>
             </a:r>
             <a:endParaRPr lang="en-US" sz="1800" dirty="0"/>
           </a:p>
@@ -1749,7 +1749,7 @@
                 <a:ea typeface="Calibri" pitchFamily="34" charset="-122"/>
                 <a:cs typeface="Calibri" pitchFamily="34" charset="-120"/>
               </a:rPr>
-              <a:t>SPEAKER 1   ·   SPEAKER 2   ·   SPEAKER 3</a:t>
+              <a:t>ADAM   ·   UGO   ·   ANAND</a:t>
             </a:r>
             <a:endParaRPr lang="en-US" sz="1400" dirty="0"/>
           </a:p>
@@ -2538,7 +2538,7 @@
                 <a:ea typeface="Calibri" pitchFamily="34" charset="-122"/>
                 <a:cs typeface="Calibri" pitchFamily="34" charset="-120"/>
               </a:rPr>
-              <a:t>URL, or paste</a:t>
+              <a:t>URL, or file</a:t>
             </a:r>
             <a:endParaRPr lang="en-US" sz="1250" dirty="0"/>
           </a:p>
@@ -4395,7 +4395,7 @@
                 <a:ea typeface="Calibri" pitchFamily="34" charset="-122"/>
                 <a:cs typeface="Calibri" pitchFamily="34" charset="-120"/>
               </a:rPr>
-              <a:t>Flexible inputs: pick a lesson, fetch a URL, or paste text.</a:t>
+              <a:t>Flexible inputs: pick a lesson, fetch a URL, or upload a file.</a:t>
             </a:r>
             <a:endParaRPr lang="en-US" sz="1550" dirty="0"/>
           </a:p>

--- a/Podcast-Studio-Presentation.pptx
+++ b/Podcast-Studio-Presentation.pptx
@@ -4,17 +4,17 @@
   <p:sldMasterIdLst>
     <p:sldMasterId id="2147483648" r:id="rId1"/>
   </p:sldMasterIdLst>
+  <p:notesMasterIdLst>
+    <p:notesMasterId r:id="rId8"/>
+  </p:notesMasterIdLst>
   <p:sldIdLst>
     <p:sldId id="256" r:id="rId2"/>
     <p:sldId id="257" r:id="rId3"/>
-    <p:sldId id="258" r:id="rId4"/>
-    <p:sldId id="259" r:id="rId5"/>
+    <p:sldId id="259" r:id="rId4"/>
+    <p:sldId id="258" r:id="rId5"/>
     <p:sldId id="260" r:id="rId6"/>
     <p:sldId id="261" r:id="rId7"/>
   </p:sldIdLst>
-  <p:notesMasterIdLst>
-    <p:notesMasterId r:id="rId8"/>
-  </p:notesMasterIdLst>
   <p:sldSz cx="12192000" cy="6858000"/>
   <p:notesSz cx="6858000" cy="12192000"/>
   <p:defaultTextStyle>
@@ -109,6 +109,11 @@
       </a:defRPr>
     </a:lvl9pPr>
   </p:defaultTextStyle>
+  <p:extLst>
+    <p:ext uri="{EFAFB233-063F-42B5-8137-9DF3F51BA10A}">
+      <p15:sldGuideLst xmlns:p15="http://schemas.microsoft.com/office/powerpoint/2012/main"/>
+    </p:ext>
+  </p:extLst>
 </p:presentation>
 </file>
 
@@ -134,234 +139,10 @@
           <a:chExt cx="0" cy="0"/>
         </a:xfrm>
       </p:grpSpPr>
-      <p:sp>
-        <p:nvSpPr>
-          <p:cNvPr id="2" name="Header Placeholder 1"/>
-          <p:cNvSpPr>
-            <a:spLocks noGrp="1"/>
-          </p:cNvSpPr>
-          <p:nvPr>
-            <p:ph type="hdr" sz="quarter"/>
-          </p:nvPr>
-        </p:nvSpPr>
-        <p:spPr>
-          <a:xfrm>
-            <a:off x="0" y="0"/>
-            <a:ext cx="2971800" cy="458788"/>
-          </a:xfrm>
-          <a:prstGeom prst="rect">
-            <a:avLst/>
-          </a:prstGeom>
-        </p:spPr>
-        <p:txBody>
-          <a:bodyPr vert="horz" lIns="91440" tIns="45720" rIns="91440" bIns="45720" rtlCol="0"/>
-          <a:lstStyle>
-            <a:lvl1pPr algn="l">
-              <a:defRPr sz="1200"/>
-            </a:lvl1pPr>
-          </a:lstStyle>
-          <a:p>
-            <a:endParaRPr lang="en-US"/>
-          </a:p>
-        </p:txBody>
-      </p:sp>
-      <p:sp>
-        <p:nvSpPr>
-          <p:cNvPr id="3" name="Date Placeholder 2"/>
-          <p:cNvSpPr>
-            <a:spLocks noGrp="1"/>
-          </p:cNvSpPr>
-          <p:nvPr>
-            <p:ph type="dt" idx="1"/>
-          </p:nvPr>
-        </p:nvSpPr>
-        <p:spPr>
-          <a:xfrm>
-            <a:off x="3884613" y="0"/>
-            <a:ext cx="2971800" cy="458788"/>
-          </a:xfrm>
-          <a:prstGeom prst="rect">
-            <a:avLst/>
-          </a:prstGeom>
-        </p:spPr>
-        <p:txBody>
-          <a:bodyPr vert="horz" lIns="91440" tIns="45720" rIns="91440" bIns="45720" rtlCol="0"/>
-          <a:lstStyle>
-            <a:lvl1pPr algn="r">
-              <a:defRPr sz="1200"/>
-            </a:lvl1pPr>
-          </a:lstStyle>
-          <a:p>
-            <a:fld id="{5282F153-3F37-0F45-9E97-73ACFA13230C}" type="datetimeFigureOut">
-              <a:rPr lang="en-US"/>
-              <a:t>7/23/19</a:t>
-            </a:fld>
-            <a:endParaRPr lang="en-US"/>
-          </a:p>
-        </p:txBody>
-      </p:sp>
-      <p:sp>
-        <p:nvSpPr>
-          <p:cNvPr id="4" name="Slide Image Placeholder 3"/>
-          <p:cNvSpPr>
-            <a:spLocks noGrp="1" noRot="1" noChangeAspect="1"/>
-          </p:cNvSpPr>
-          <p:nvPr>
-            <p:ph type="sldImg" idx="2"/>
-          </p:nvPr>
-        </p:nvSpPr>
-        <p:spPr>
-          <a:xfrm>
-            <a:off x="685800" y="1143000"/>
-            <a:ext cx="5486400" cy="3086100"/>
-          </a:xfrm>
-          <a:prstGeom prst="rect">
-            <a:avLst/>
-          </a:prstGeom>
-          <a:noFill/>
-          <a:ln w="12700">
-            <a:solidFill>
-              <a:prstClr val="black"/>
-            </a:solidFill>
-          </a:ln>
-        </p:spPr>
-        <p:txBody>
-          <a:bodyPr vert="horz" lIns="91440" tIns="45720" rIns="91440" bIns="45720" rtlCol="0" anchor="ctr"/>
-          <a:lstStyle/>
-          <a:p>
-            <a:endParaRPr lang="en-US"/>
-          </a:p>
-        </p:txBody>
-      </p:sp>
-      <p:sp>
-        <p:nvSpPr>
-          <p:cNvPr id="5" name="Notes Placeholder 4"/>
-          <p:cNvSpPr>
-            <a:spLocks noGrp="1"/>
-          </p:cNvSpPr>
-          <p:nvPr>
-            <p:ph type="body" sz="quarter" idx="3"/>
-          </p:nvPr>
-        </p:nvSpPr>
-        <p:spPr>
-          <a:xfrm>
-            <a:off x="685800" y="4400550"/>
-            <a:ext cx="5486400" cy="3600450"/>
-          </a:xfrm>
-          <a:prstGeom prst="rect">
-            <a:avLst/>
-          </a:prstGeom>
-        </p:spPr>
-        <p:txBody>
-          <a:bodyPr vert="horz" lIns="91440" tIns="45720" rIns="91440" bIns="45720" rtlCol="0"/>
-          <a:lstStyle/>
-          <a:p>
-            <a:pPr lvl="0"/>
-            <a:r>
-              <a:rPr lang="en-US"/>
-              <a:t>Click to edit Master text styles</a:t>
-            </a:r>
-          </a:p>
-          <a:p>
-            <a:pPr lvl="1"/>
-            <a:r>
-              <a:rPr lang="en-US"/>
-              <a:t>Second level</a:t>
-            </a:r>
-          </a:p>
-          <a:p>
-            <a:pPr lvl="2"/>
-            <a:r>
-              <a:rPr lang="en-US"/>
-              <a:t>Third level</a:t>
-            </a:r>
-          </a:p>
-          <a:p>
-            <a:pPr lvl="3"/>
-            <a:r>
-              <a:rPr lang="en-US"/>
-              <a:t>Fourth level</a:t>
-            </a:r>
-          </a:p>
-          <a:p>
-            <a:pPr lvl="4"/>
-            <a:r>
-              <a:rPr lang="en-US"/>
-              <a:t>Fifth level</a:t>
-            </a:r>
-          </a:p>
-        </p:txBody>
-      </p:sp>
-      <p:sp>
-        <p:nvSpPr>
-          <p:cNvPr id="6" name="Footer Placeholder 5"/>
-          <p:cNvSpPr>
-            <a:spLocks noGrp="1"/>
-          </p:cNvSpPr>
-          <p:nvPr>
-            <p:ph type="ftr" sz="quarter" idx="4"/>
-          </p:nvPr>
-        </p:nvSpPr>
-        <p:spPr>
-          <a:xfrm>
-            <a:off x="0" y="8685213"/>
-            <a:ext cx="2971800" cy="458787"/>
-          </a:xfrm>
-          <a:prstGeom prst="rect">
-            <a:avLst/>
-          </a:prstGeom>
-        </p:spPr>
-        <p:txBody>
-          <a:bodyPr vert="horz" lIns="91440" tIns="45720" rIns="91440" bIns="45720" rtlCol="0" anchor="b"/>
-          <a:lstStyle>
-            <a:lvl1pPr algn="l">
-              <a:defRPr sz="1200"/>
-            </a:lvl1pPr>
-          </a:lstStyle>
-          <a:p>
-            <a:endParaRPr lang="en-US"/>
-          </a:p>
-        </p:txBody>
-      </p:sp>
-      <p:sp>
-        <p:nvSpPr>
-          <p:cNvPr id="7" name="Slide Number Placeholder 6"/>
-          <p:cNvSpPr>
-            <a:spLocks noGrp="1"/>
-          </p:cNvSpPr>
-          <p:nvPr>
-            <p:ph type="sldNum" sz="quarter" idx="5"/>
-          </p:nvPr>
-        </p:nvSpPr>
-        <p:spPr>
-          <a:xfrm>
-            <a:off x="3884613" y="8685213"/>
-            <a:ext cx="2971800" cy="458787"/>
-          </a:xfrm>
-          <a:prstGeom prst="rect">
-            <a:avLst/>
-          </a:prstGeom>
-        </p:spPr>
-        <p:txBody>
-          <a:bodyPr vert="horz" lIns="91440" tIns="45720" rIns="91440" bIns="45720" rtlCol="0" anchor="b"/>
-          <a:lstStyle>
-            <a:lvl1pPr algn="r">
-              <a:defRPr sz="1200"/>
-            </a:lvl1pPr>
-          </a:lstStyle>
-          <a:p>
-            <a:fld id="{CE5E9CC1-C706-0F49-92D6-E571CC5EEA8F}" type="slidenum">
-              <a:rPr lang="en-US"/>
-              <a:t>‹#›</a:t>
-            </a:fld>
-            <a:endParaRPr lang="en-US"/>
-          </a:p>
-        </p:txBody>
-      </p:sp>
     </p:spTree>
     <p:extLst>
       <p:ext uri="{BB962C8B-B14F-4D97-AF65-F5344CB8AC3E}">
-        <p14:creationId xmlns:p14="http://schemas.microsoft.com/office/powerpoint/2010/main" val="1024086991"/>
+        <p14:creationId xmlns:p14="http://schemas.microsoft.com/office/powerpoint/2010/main" val="3045516667"/>
       </p:ext>
     </p:extLst>
   </p:cSld>
@@ -507,9 +288,8 @@
           <a:p>
             <a:r>
               <a:rPr lang="en-US" dirty="0"/>
-              <a:t>Title. Adam opens: name the team and what we built in one line.</a:t>
-            </a:r>
-            <a:endParaRPr lang="en-US" dirty="0"/>
+              <a:t>Title. SPEAKER 1 opens: name the team and what we built in one line.</a:t>
+            </a:r>
           </a:p>
         </p:txBody>
       </p:sp>
@@ -595,9 +375,8 @@
           <a:p>
             <a:r>
               <a:rPr lang="en-US" dirty="0"/>
-              <a:t>Adam — Problem. Anchor it in a real audience; hand off to Ugo for the live demo.</a:t>
-            </a:r>
-            <a:endParaRPr lang="en-US" dirty="0"/>
+              <a:t>SPEAKER 1 — Problem. Anchor it in a real audience; hand off to SPEAKER 2 for the live demo.</a:t>
+            </a:r>
           </a:p>
         </p:txBody>
       </p:sp>
@@ -683,9 +462,8 @@
           <a:p>
             <a:r>
               <a:rPr lang="en-US" dirty="0"/>
-              <a:t>Shown while Ugo demos / Anand explains. Call out 2-3 technical choices — data structures answers a graded criterion.</a:t>
-            </a:r>
-            <a:endParaRPr lang="en-US" dirty="0"/>
+              <a:t>SPEAKER 2 — Live demo (~3.5 min). Keep to pick-a-saved-lesson. If Wi-Fi/API stalls, play a pre-generated mp3 from output/ and keep talking.</a:t>
+            </a:r>
           </a:p>
         </p:txBody>
       </p:sp>
@@ -770,10 +548,274 @@
           <a:lstStyle/>
           <a:p>
             <a:r>
-              <a:rPr lang="en-US" dirty="0"/>
-              <a:t>Ugo — Live demo (~3.5 min). Keep to pick-a-saved-lesson. If Wi-Fi/API stalls, play a pre-generated mp3 from output/ and keep talking.</a:t>
-            </a:r>
-            <a:endParaRPr lang="en-US" dirty="0"/>
+              <a:rPr lang="en-GB" sz="1200" b="0" i="0" kern="1200" dirty="0">
+                <a:solidFill>
+                  <a:schemeClr val="tx1"/>
+                </a:solidFill>
+                <a:effectLst/>
+                <a:latin typeface="+mn-lt"/>
+                <a:ea typeface="+mn-ea"/>
+                <a:cs typeface="+mn-cs"/>
+              </a:rPr>
+              <a:t>"Thanks Ugo. So while that recap was generating, here's what was actually happening under the hood — and what we'd build next."</a:t>
+            </a:r>
+          </a:p>
+          <a:p>
+            <a:r>
+              <a:rPr lang="en-GB" sz="1200" b="1" i="0" kern="1200" dirty="0">
+                <a:solidFill>
+                  <a:schemeClr val="tx1"/>
+                </a:solidFill>
+                <a:effectLst/>
+                <a:latin typeface="+mn-lt"/>
+                <a:ea typeface="+mn-ea"/>
+                <a:cs typeface="+mn-cs"/>
+              </a:rPr>
+              <a:t>Technical choices</a:t>
+            </a:r>
+            <a:endParaRPr lang="en-GB" sz="1200" b="0" i="0" kern="1200" dirty="0">
+              <a:solidFill>
+                <a:schemeClr val="tx1"/>
+              </a:solidFill>
+              <a:effectLst/>
+              <a:latin typeface="+mn-lt"/>
+              <a:ea typeface="+mn-ea"/>
+              <a:cs typeface="+mn-cs"/>
+            </a:endParaRPr>
+          </a:p>
+          <a:p>
+            <a:r>
+              <a:rPr lang="en-GB" sz="1200" b="0" i="0" kern="1200" dirty="0">
+                <a:solidFill>
+                  <a:schemeClr val="tx1"/>
+                </a:solidFill>
+                <a:effectLst/>
+                <a:latin typeface="+mn-lt"/>
+                <a:ea typeface="+mn-ea"/>
+                <a:cs typeface="+mn-cs"/>
+              </a:rPr>
+              <a:t>"We don't just ask the LLM for text back — we force it through a </a:t>
+            </a:r>
+            <a:r>
+              <a:rPr lang="en-GB" sz="1200" b="1" i="0" kern="1200" dirty="0" err="1">
+                <a:solidFill>
+                  <a:schemeClr val="tx1"/>
+                </a:solidFill>
+                <a:effectLst/>
+                <a:latin typeface="+mn-lt"/>
+                <a:ea typeface="+mn-ea"/>
+                <a:cs typeface="+mn-cs"/>
+              </a:rPr>
+              <a:t>Pydantic</a:t>
+            </a:r>
+            <a:r>
+              <a:rPr lang="en-GB" sz="1200" b="1" i="0" kern="1200" dirty="0">
+                <a:solidFill>
+                  <a:schemeClr val="tx1"/>
+                </a:solidFill>
+                <a:effectLst/>
+                <a:latin typeface="+mn-lt"/>
+                <a:ea typeface="+mn-ea"/>
+                <a:cs typeface="+mn-cs"/>
+              </a:rPr>
+              <a:t> schema</a:t>
+            </a:r>
+            <a:r>
+              <a:rPr lang="en-GB" sz="1200" b="0" i="0" kern="1200" dirty="0">
+                <a:solidFill>
+                  <a:schemeClr val="tx1"/>
+                </a:solidFill>
+                <a:effectLst/>
+                <a:latin typeface="+mn-lt"/>
+                <a:ea typeface="+mn-ea"/>
+                <a:cs typeface="+mn-cs"/>
+              </a:rPr>
+              <a:t>, so it always returns a title, key points, and script in the exact same shape. That's what stops broken formatting or half-finished output from ever reaching the user."</a:t>
+            </a:r>
+          </a:p>
+          <a:p>
+            <a:r>
+              <a:rPr lang="en-GB" sz="1200" b="0" i="0" kern="1200" dirty="0">
+                <a:solidFill>
+                  <a:schemeClr val="tx1"/>
+                </a:solidFill>
+                <a:effectLst/>
+                <a:latin typeface="+mn-lt"/>
+                <a:ea typeface="+mn-ea"/>
+                <a:cs typeface="+mn-cs"/>
+              </a:rPr>
+              <a:t>"We picked </a:t>
+            </a:r>
+            <a:r>
+              <a:rPr lang="en-GB" sz="1200" b="1" i="0" kern="1200" dirty="0">
+                <a:solidFill>
+                  <a:schemeClr val="tx1"/>
+                </a:solidFill>
+                <a:effectLst/>
+                <a:latin typeface="+mn-lt"/>
+                <a:ea typeface="+mn-ea"/>
+                <a:cs typeface="+mn-cs"/>
+              </a:rPr>
+              <a:t>gpt-4o-mini</a:t>
+            </a:r>
+            <a:r>
+              <a:rPr lang="en-GB" sz="1200" b="0" i="0" kern="1200" dirty="0">
+                <a:solidFill>
+                  <a:schemeClr val="tx1"/>
+                </a:solidFill>
+                <a:effectLst/>
+                <a:latin typeface="+mn-lt"/>
+                <a:ea typeface="+mn-ea"/>
+                <a:cs typeface="+mn-cs"/>
+              </a:rPr>
+              <a:t> for the summarizing and </a:t>
+            </a:r>
+            <a:r>
+              <a:rPr lang="en-GB" sz="1200" b="1" i="0" kern="1200" dirty="0">
+                <a:solidFill>
+                  <a:schemeClr val="tx1"/>
+                </a:solidFill>
+                <a:effectLst/>
+                <a:latin typeface="+mn-lt"/>
+                <a:ea typeface="+mn-ea"/>
+                <a:cs typeface="+mn-cs"/>
+              </a:rPr>
+              <a:t>tts-1</a:t>
+            </a:r>
+            <a:r>
+              <a:rPr lang="en-GB" sz="1200" b="0" i="0" kern="1200" dirty="0">
+                <a:solidFill>
+                  <a:schemeClr val="tx1"/>
+                </a:solidFill>
+                <a:effectLst/>
+                <a:latin typeface="+mn-lt"/>
+                <a:ea typeface="+mn-ea"/>
+                <a:cs typeface="+mn-cs"/>
+              </a:rPr>
+              <a:t> for the voice — both cheap and fast, so a full recap costs about </a:t>
+            </a:r>
+            <a:r>
+              <a:rPr lang="en-GB" sz="1200" b="1" i="0" kern="1200" dirty="0">
+                <a:solidFill>
+                  <a:schemeClr val="tx1"/>
+                </a:solidFill>
+                <a:effectLst/>
+                <a:latin typeface="+mn-lt"/>
+                <a:ea typeface="+mn-ea"/>
+                <a:cs typeface="+mn-cs"/>
+              </a:rPr>
+              <a:t>a cent</a:t>
+            </a:r>
+            <a:r>
+              <a:rPr lang="en-GB" sz="1200" b="0" i="0" kern="1200" dirty="0">
+                <a:solidFill>
+                  <a:schemeClr val="tx1"/>
+                </a:solidFill>
+                <a:effectLst/>
+                <a:latin typeface="+mn-lt"/>
+                <a:ea typeface="+mn-ea"/>
+                <a:cs typeface="+mn-cs"/>
+              </a:rPr>
+              <a:t>. That mattered because we wanted this to be something </a:t>
+            </a:r>
+            <a:r>
+              <a:rPr lang="en-GB" sz="1200" b="0" i="0" kern="1200" dirty="0" err="1">
+                <a:solidFill>
+                  <a:schemeClr val="tx1"/>
+                </a:solidFill>
+                <a:effectLst/>
+                <a:latin typeface="+mn-lt"/>
+                <a:ea typeface="+mn-ea"/>
+                <a:cs typeface="+mn-cs"/>
+              </a:rPr>
+              <a:t>people'd</a:t>
+            </a:r>
+            <a:r>
+              <a:rPr lang="en-GB" sz="1200" b="0" i="0" kern="1200" dirty="0">
+                <a:solidFill>
+                  <a:schemeClr val="tx1"/>
+                </a:solidFill>
+                <a:effectLst/>
+                <a:latin typeface="+mn-lt"/>
+                <a:ea typeface="+mn-ea"/>
+                <a:cs typeface="+mn-cs"/>
+              </a:rPr>
+              <a:t> actually use daily, not something they ration."</a:t>
+            </a:r>
+          </a:p>
+          <a:p>
+            <a:r>
+              <a:rPr lang="en-GB" sz="1200" b="0" i="0" kern="1200" dirty="0">
+                <a:solidFill>
+                  <a:schemeClr val="tx1"/>
+                </a:solidFill>
+                <a:effectLst/>
+                <a:latin typeface="+mn-lt"/>
+                <a:ea typeface="+mn-ea"/>
+                <a:cs typeface="+mn-cs"/>
+              </a:rPr>
+              <a:t>"Under the hood, a </a:t>
+            </a:r>
+            <a:r>
+              <a:rPr lang="en-GB" sz="1200" b="1" i="0" kern="1200" dirty="0" err="1">
+                <a:solidFill>
+                  <a:schemeClr val="tx1"/>
+                </a:solidFill>
+                <a:effectLst/>
+                <a:latin typeface="+mn-lt"/>
+                <a:ea typeface="+mn-ea"/>
+                <a:cs typeface="+mn-cs"/>
+              </a:rPr>
+              <a:t>dataclass</a:t>
+            </a:r>
+            <a:r>
+              <a:rPr lang="en-GB" sz="1200" b="0" i="0" kern="1200" dirty="0">
+                <a:solidFill>
+                  <a:schemeClr val="tx1"/>
+                </a:solidFill>
+                <a:effectLst/>
+                <a:latin typeface="+mn-lt"/>
+                <a:ea typeface="+mn-ea"/>
+                <a:cs typeface="+mn-cs"/>
+              </a:rPr>
+              <a:t> carries the raw lesson text, and a </a:t>
+            </a:r>
+            <a:r>
+              <a:rPr lang="en-GB" sz="1200" b="1" i="0" kern="1200" dirty="0" err="1">
+                <a:solidFill>
+                  <a:schemeClr val="tx1"/>
+                </a:solidFill>
+                <a:effectLst/>
+                <a:latin typeface="+mn-lt"/>
+                <a:ea typeface="+mn-ea"/>
+                <a:cs typeface="+mn-cs"/>
+              </a:rPr>
+              <a:t>Pydantic</a:t>
+            </a:r>
+            <a:r>
+              <a:rPr lang="en-GB" sz="1200" b="1" i="0" kern="1200" dirty="0">
+                <a:solidFill>
+                  <a:schemeClr val="tx1"/>
+                </a:solidFill>
+                <a:effectLst/>
+                <a:latin typeface="+mn-lt"/>
+                <a:ea typeface="+mn-ea"/>
+                <a:cs typeface="+mn-cs"/>
+              </a:rPr>
+              <a:t> model</a:t>
+            </a:r>
+            <a:r>
+              <a:rPr lang="en-GB" sz="1200" b="0" i="0" kern="1200" dirty="0">
+                <a:solidFill>
+                  <a:schemeClr val="tx1"/>
+                </a:solidFill>
+                <a:effectLst/>
+                <a:latin typeface="+mn-lt"/>
+                <a:ea typeface="+mn-ea"/>
+                <a:cs typeface="+mn-cs"/>
+              </a:rPr>
+              <a:t> carries the structured recap — so every module, data, LLM, speech, UI, is passing typed, predictable data to the next one instead of raw strings."</a:t>
+            </a:r>
           </a:p>
         </p:txBody>
       </p:sp>
@@ -858,10 +900,234 @@
           <a:lstStyle/>
           <a:p>
             <a:r>
-              <a:rPr lang="en-US" dirty="0"/>
-              <a:t>Anand — Takeaways + technical choices + what's next (~1.5 min), then hand to Q&amp;A.</a:t>
-            </a:r>
-            <a:endParaRPr lang="en-US" dirty="0"/>
+              <a:rPr lang="en-GB" sz="1200" b="1" i="0" kern="1200" dirty="0">
+                <a:solidFill>
+                  <a:schemeClr val="tx1"/>
+                </a:solidFill>
+                <a:effectLst/>
+                <a:latin typeface="+mn-lt"/>
+                <a:ea typeface="+mn-ea"/>
+                <a:cs typeface="+mn-cs"/>
+              </a:rPr>
+              <a:t>What we learned</a:t>
+            </a:r>
+            <a:endParaRPr lang="en-GB" sz="1200" b="0" i="0" kern="1200" dirty="0">
+              <a:solidFill>
+                <a:schemeClr val="tx1"/>
+              </a:solidFill>
+              <a:effectLst/>
+              <a:latin typeface="+mn-lt"/>
+              <a:ea typeface="+mn-ea"/>
+              <a:cs typeface="+mn-cs"/>
+            </a:endParaRPr>
+          </a:p>
+          <a:p>
+            <a:r>
+              <a:rPr lang="en-GB" sz="1200" b="0" i="0" kern="1200" dirty="0">
+                <a:solidFill>
+                  <a:schemeClr val="tx1"/>
+                </a:solidFill>
+                <a:effectLst/>
+                <a:latin typeface="+mn-lt"/>
+                <a:ea typeface="+mn-ea"/>
+                <a:cs typeface="+mn-cs"/>
+              </a:rPr>
+              <a:t>"Two things stood out. One: </a:t>
+            </a:r>
+            <a:r>
+              <a:rPr lang="en-GB" sz="1200" b="1" i="0" kern="1200" dirty="0">
+                <a:solidFill>
+                  <a:schemeClr val="tx1"/>
+                </a:solidFill>
+                <a:effectLst/>
+                <a:latin typeface="+mn-lt"/>
+                <a:ea typeface="+mn-ea"/>
+                <a:cs typeface="+mn-cs"/>
+              </a:rPr>
+              <a:t>prompt design mattered more than model choice</a:t>
+            </a:r>
+            <a:r>
+              <a:rPr lang="en-GB" sz="1200" b="0" i="0" kern="1200" dirty="0">
+                <a:solidFill>
+                  <a:schemeClr val="tx1"/>
+                </a:solidFill>
+                <a:effectLst/>
+                <a:latin typeface="+mn-lt"/>
+                <a:ea typeface="+mn-ea"/>
+                <a:cs typeface="+mn-cs"/>
+              </a:rPr>
+              <a:t> — telling it to write a </a:t>
+            </a:r>
+            <a:r>
+              <a:rPr lang="en-GB" sz="1200" b="0" i="1" kern="1200" dirty="0">
+                <a:solidFill>
+                  <a:schemeClr val="tx1"/>
+                </a:solidFill>
+                <a:effectLst/>
+                <a:latin typeface="+mn-lt"/>
+                <a:ea typeface="+mn-ea"/>
+                <a:cs typeface="+mn-cs"/>
+              </a:rPr>
+              <a:t>spoken</a:t>
+            </a:r>
+            <a:r>
+              <a:rPr lang="en-GB" sz="1200" b="0" i="0" kern="1200" dirty="0">
+                <a:solidFill>
+                  <a:schemeClr val="tx1"/>
+                </a:solidFill>
+                <a:effectLst/>
+                <a:latin typeface="+mn-lt"/>
+                <a:ea typeface="+mn-ea"/>
+                <a:cs typeface="+mn-cs"/>
+              </a:rPr>
+              <a:t> script, not a bullet summary, made the audio actually sound natural. Two: keeping the pipeline </a:t>
+            </a:r>
+            <a:r>
+              <a:rPr lang="en-GB" sz="1200" b="1" i="0" kern="1200" dirty="0">
+                <a:solidFill>
+                  <a:schemeClr val="tx1"/>
+                </a:solidFill>
+                <a:effectLst/>
+                <a:latin typeface="+mn-lt"/>
+                <a:ea typeface="+mn-ea"/>
+                <a:cs typeface="+mn-cs"/>
+              </a:rPr>
+              <a:t>modular</a:t>
+            </a:r>
+            <a:r>
+              <a:rPr lang="en-GB" sz="1200" b="0" i="0" kern="1200" dirty="0">
+                <a:solidFill>
+                  <a:schemeClr val="tx1"/>
+                </a:solidFill>
+                <a:effectLst/>
+                <a:latin typeface="+mn-lt"/>
+                <a:ea typeface="+mn-ea"/>
+                <a:cs typeface="+mn-cs"/>
+              </a:rPr>
+              <a:t> meant we could swap or fix one piece, say the TTS voice, without touching anything else."</a:t>
+            </a:r>
+          </a:p>
+          <a:p>
+            <a:r>
+              <a:rPr lang="en-GB" sz="1200" b="1" i="0" kern="1200" dirty="0">
+                <a:solidFill>
+                  <a:schemeClr val="tx1"/>
+                </a:solidFill>
+                <a:effectLst/>
+                <a:latin typeface="+mn-lt"/>
+                <a:ea typeface="+mn-ea"/>
+                <a:cs typeface="+mn-cs"/>
+              </a:rPr>
+              <a:t>What's next</a:t>
+            </a:r>
+            <a:endParaRPr lang="en-GB" sz="1200" b="0" i="0" kern="1200" dirty="0">
+              <a:solidFill>
+                <a:schemeClr val="tx1"/>
+              </a:solidFill>
+              <a:effectLst/>
+              <a:latin typeface="+mn-lt"/>
+              <a:ea typeface="+mn-ea"/>
+              <a:cs typeface="+mn-cs"/>
+            </a:endParaRPr>
+          </a:p>
+          <a:p>
+            <a:r>
+              <a:rPr lang="en-GB" sz="1200" b="0" i="0" kern="1200" dirty="0">
+                <a:solidFill>
+                  <a:schemeClr val="tx1"/>
+                </a:solidFill>
+                <a:effectLst/>
+                <a:latin typeface="+mn-lt"/>
+                <a:ea typeface="+mn-ea"/>
+                <a:cs typeface="+mn-cs"/>
+              </a:rPr>
+              <a:t>"Next up: a </a:t>
+            </a:r>
+            <a:r>
+              <a:rPr lang="en-GB" sz="1200" b="1" i="0" kern="1200" dirty="0">
+                <a:solidFill>
+                  <a:schemeClr val="tx1"/>
+                </a:solidFill>
+                <a:effectLst/>
+                <a:latin typeface="+mn-lt"/>
+                <a:ea typeface="+mn-ea"/>
+                <a:cs typeface="+mn-cs"/>
+              </a:rPr>
+              <a:t>download button</a:t>
+            </a:r>
+            <a:r>
+              <a:rPr lang="en-GB" sz="1200" b="0" i="0" kern="1200" dirty="0">
+                <a:solidFill>
+                  <a:schemeClr val="tx1"/>
+                </a:solidFill>
+                <a:effectLst/>
+                <a:latin typeface="+mn-lt"/>
+                <a:ea typeface="+mn-ea"/>
+                <a:cs typeface="+mn-cs"/>
+              </a:rPr>
+              <a:t>, intro/outro music, adjustable length — and eventually </a:t>
+            </a:r>
+            <a:r>
+              <a:rPr lang="en-GB" sz="1200" b="1" i="0" kern="1200" dirty="0">
+                <a:solidFill>
+                  <a:schemeClr val="tx1"/>
+                </a:solidFill>
+                <a:effectLst/>
+                <a:latin typeface="+mn-lt"/>
+                <a:ea typeface="+mn-ea"/>
+                <a:cs typeface="+mn-cs"/>
+              </a:rPr>
+              <a:t>deploying it online</a:t>
+            </a:r>
+            <a:r>
+              <a:rPr lang="en-GB" sz="1200" b="0" i="0" kern="1200" dirty="0">
+                <a:solidFill>
+                  <a:schemeClr val="tx1"/>
+                </a:solidFill>
+                <a:effectLst/>
+                <a:latin typeface="+mn-lt"/>
+                <a:ea typeface="+mn-ea"/>
+                <a:cs typeface="+mn-cs"/>
+              </a:rPr>
+              <a:t>, so it's not just the three of us using it."</a:t>
+            </a:r>
+          </a:p>
+          <a:p>
+            <a:r>
+              <a:rPr lang="en-GB" sz="1200" b="1" i="0" kern="1200" dirty="0">
+                <a:solidFill>
+                  <a:schemeClr val="tx1"/>
+                </a:solidFill>
+                <a:effectLst/>
+                <a:latin typeface="+mn-lt"/>
+                <a:ea typeface="+mn-ea"/>
+                <a:cs typeface="+mn-cs"/>
+              </a:rPr>
+              <a:t>Close / handoff</a:t>
+            </a:r>
+            <a:endParaRPr lang="en-GB" sz="1200" b="0" i="0" kern="1200" dirty="0">
+              <a:solidFill>
+                <a:schemeClr val="tx1"/>
+              </a:solidFill>
+              <a:effectLst/>
+              <a:latin typeface="+mn-lt"/>
+              <a:ea typeface="+mn-ea"/>
+              <a:cs typeface="+mn-cs"/>
+            </a:endParaRPr>
+          </a:p>
+          <a:p>
+            <a:r>
+              <a:rPr lang="en-GB" sz="1200" b="0" i="0" kern="1200" dirty="0">
+                <a:solidFill>
+                  <a:schemeClr val="tx1"/>
+                </a:solidFill>
+                <a:effectLst/>
+                <a:latin typeface="+mn-lt"/>
+                <a:ea typeface="+mn-ea"/>
+                <a:cs typeface="+mn-cs"/>
+              </a:rPr>
+              <a:t>"That's the build — happy to take questions."</a:t>
+            </a:r>
           </a:p>
         </p:txBody>
       </p:sp>
@@ -947,9 +1213,8 @@
           <a:p>
             <a:r>
               <a:rPr lang="en-US" dirty="0"/>
-              <a:t>All three field Q&amp;A. Adam: audience/use. Ugo: demo/product/cost. Anand: technical.</a:t>
-            </a:r>
-            <a:endParaRPr lang="en-US" dirty="0"/>
+              <a:t>All three field Q&amp;A. SPEAKER 1: audience/use. SPEAKER 2: demo/product/cost. SPEAKER 3: technical.</a:t>
+            </a:r>
           </a:p>
         </p:txBody>
       </p:sp>
@@ -1022,6 +1287,11 @@
 <file path=ppt/slideMasters/slideMaster1.xml><?xml version="1.0" encoding="utf-8"?>
 <p:sldMaster xmlns:a="http://schemas.openxmlformats.org/drawingml/2006/main" xmlns:r="http://schemas.openxmlformats.org/officeDocument/2006/relationships" xmlns:p="http://schemas.openxmlformats.org/presentationml/2006/main">
   <p:cSld>
+    <p:bg>
+      <p:bgRef idx="1001">
+        <a:schemeClr val="bg1"/>
+      </p:bgRef>
+    </p:bg>
     <p:spTree>
       <p:nvGrpSpPr>
         <p:cNvPr id="1" name=""/>
@@ -1304,6 +1574,7 @@
         <a:solidFill>
           <a:srgbClr val="1B2230"/>
         </a:solidFill>
+        <a:effectLst/>
       </p:bgPr>
     </p:bg>
     <p:spTree>
@@ -1343,6 +1614,13 @@
           </a:solidFill>
           <a:ln/>
         </p:spPr>
+        <p:txBody>
+          <a:bodyPr/>
+          <a:lstStyle/>
+          <a:p>
+            <a:endParaRPr lang="en-GB"/>
+          </a:p>
+        </p:txBody>
       </p:sp>
       <p:sp>
         <p:nvSpPr>
@@ -1367,6 +1645,13 @@
           </a:solidFill>
           <a:ln/>
         </p:spPr>
+        <p:txBody>
+          <a:bodyPr/>
+          <a:lstStyle/>
+          <a:p>
+            <a:endParaRPr lang="en-GB"/>
+          </a:p>
+        </p:txBody>
       </p:sp>
       <p:sp>
         <p:nvSpPr>
@@ -1391,6 +1676,13 @@
           </a:solidFill>
           <a:ln/>
         </p:spPr>
+        <p:txBody>
+          <a:bodyPr/>
+          <a:lstStyle/>
+          <a:p>
+            <a:endParaRPr lang="en-GB"/>
+          </a:p>
+        </p:txBody>
       </p:sp>
       <p:sp>
         <p:nvSpPr>
@@ -1415,6 +1707,13 @@
           </a:solidFill>
           <a:ln/>
         </p:spPr>
+        <p:txBody>
+          <a:bodyPr/>
+          <a:lstStyle/>
+          <a:p>
+            <a:endParaRPr lang="en-GB"/>
+          </a:p>
+        </p:txBody>
       </p:sp>
       <p:sp>
         <p:nvSpPr>
@@ -1439,6 +1738,13 @@
           </a:solidFill>
           <a:ln/>
         </p:spPr>
+        <p:txBody>
+          <a:bodyPr/>
+          <a:lstStyle/>
+          <a:p>
+            <a:endParaRPr lang="en-GB"/>
+          </a:p>
+        </p:txBody>
       </p:sp>
       <p:sp>
         <p:nvSpPr>
@@ -1463,6 +1769,13 @@
           </a:solidFill>
           <a:ln/>
         </p:spPr>
+        <p:txBody>
+          <a:bodyPr/>
+          <a:lstStyle/>
+          <a:p>
+            <a:endParaRPr lang="en-GB"/>
+          </a:p>
+        </p:txBody>
       </p:sp>
       <p:sp>
         <p:nvSpPr>
@@ -1487,6 +1800,13 @@
           </a:solidFill>
           <a:ln/>
         </p:spPr>
+        <p:txBody>
+          <a:bodyPr/>
+          <a:lstStyle/>
+          <a:p>
+            <a:endParaRPr lang="en-GB"/>
+          </a:p>
+        </p:txBody>
       </p:sp>
       <p:sp>
         <p:nvSpPr>
@@ -1511,6 +1831,13 @@
           </a:solidFill>
           <a:ln/>
         </p:spPr>
+        <p:txBody>
+          <a:bodyPr/>
+          <a:lstStyle/>
+          <a:p>
+            <a:endParaRPr lang="en-GB"/>
+          </a:p>
+        </p:txBody>
       </p:sp>
       <p:sp>
         <p:nvSpPr>
@@ -1535,6 +1862,13 @@
           </a:solidFill>
           <a:ln/>
         </p:spPr>
+        <p:txBody>
+          <a:bodyPr/>
+          <a:lstStyle/>
+          <a:p>
+            <a:endParaRPr lang="en-GB"/>
+          </a:p>
+        </p:txBody>
       </p:sp>
       <p:sp>
         <p:nvSpPr>
@@ -1559,6 +1893,13 @@
           </a:solidFill>
           <a:ln/>
         </p:spPr>
+        <p:txBody>
+          <a:bodyPr/>
+          <a:lstStyle/>
+          <a:p>
+            <a:endParaRPr lang="en-GB"/>
+          </a:p>
+        </p:txBody>
       </p:sp>
       <p:sp>
         <p:nvSpPr>
@@ -1581,11 +1922,11 @@
           <a:bodyPr wrap="square" lIns="0" tIns="0" rIns="0" bIns="0" rtlCol="0" anchor="ctr"/>
           <a:lstStyle/>
           <a:p>
-            <a:pPr indent="0" marL="0">
+            <a:pPr marL="0" indent="0">
               <a:buNone/>
             </a:pPr>
             <a:r>
-              <a:rPr lang="en-US" sz="1300" b="1" spc="300" kern="0" dirty="0">
+              <a:rPr lang="en-US" sz="1300" b="1" kern="0" spc="300" dirty="0">
                 <a:solidFill>
                   <a:srgbClr val="C0741A"/>
                 </a:solidFill>
@@ -1620,7 +1961,7 @@
           <a:bodyPr wrap="square" lIns="0" tIns="0" rIns="0" bIns="0" rtlCol="0" anchor="ctr"/>
           <a:lstStyle/>
           <a:p>
-            <a:pPr indent="0" marL="0">
+            <a:pPr marL="0" indent="0">
               <a:buNone/>
             </a:pPr>
             <a:r>
@@ -1659,7 +2000,7 @@
           <a:bodyPr wrap="square" lIns="0" tIns="0" rIns="0" bIns="0" rtlCol="0" anchor="ctr"/>
           <a:lstStyle/>
           <a:p>
-            <a:pPr indent="0" marL="0">
+            <a:pPr marL="0" indent="0">
               <a:buNone/>
             </a:pPr>
             <a:r>
@@ -1671,7 +2012,7 @@
                 <a:ea typeface="Cambria" pitchFamily="34" charset="-122"/>
                 <a:cs typeface="Cambria" pitchFamily="34" charset="-120"/>
               </a:rPr>
-              <a:t>Content Recapper</a:t>
+              <a:t>Daily Lesson Recapper</a:t>
             </a:r>
             <a:endParaRPr lang="en-US" sz="2800" dirty="0"/>
           </a:p>
@@ -1698,7 +2039,7 @@
           <a:bodyPr wrap="square" lIns="0" tIns="0" rIns="0" bIns="0" rtlCol="0" anchor="ctr"/>
           <a:lstStyle/>
           <a:p>
-            <a:pPr indent="0" marL="0">
+            <a:pPr marL="0" indent="0">
               <a:buNone/>
             </a:pPr>
             <a:r>
@@ -1710,7 +2051,7 @@
                 <a:ea typeface="Calibri" pitchFamily="34" charset="-122"/>
                 <a:cs typeface="Calibri" pitchFamily="34" charset="-120"/>
               </a:rPr>
-              <a:t>Turn any lesson, article, or report into a short spoken recap.</a:t>
+              <a:t>Turn any lesson into a one-minute spoken recap.</a:t>
             </a:r>
             <a:endParaRPr lang="en-US" sz="1800" dirty="0"/>
           </a:p>
@@ -1737,11 +2078,11 @@
           <a:bodyPr wrap="square" lIns="0" tIns="0" rIns="0" bIns="0" rtlCol="0" anchor="ctr"/>
           <a:lstStyle/>
           <a:p>
-            <a:pPr indent="0" marL="0">
+            <a:pPr marL="0" indent="0">
               <a:buNone/>
             </a:pPr>
             <a:r>
-              <a:rPr lang="en-US" sz="1400" spc="100" kern="0" dirty="0">
+              <a:rPr lang="en-US" sz="1400" kern="0" spc="100" dirty="0">
                 <a:solidFill>
                   <a:srgbClr val="8A93A1"/>
                 </a:solidFill>
@@ -1749,7 +2090,7 @@
                 <a:ea typeface="Calibri" pitchFamily="34" charset="-122"/>
                 <a:cs typeface="Calibri" pitchFamily="34" charset="-120"/>
               </a:rPr>
-              <a:t>ADAM   ·   UGO   ·   ANAND</a:t>
+              <a:t>Adam   ·   Ugo   ·   Anand</a:t>
             </a:r>
             <a:endParaRPr lang="en-US" sz="1400" dirty="0"/>
           </a:p>
@@ -1778,6 +2119,13 @@
           </a:solidFill>
           <a:ln/>
         </p:spPr>
+        <p:txBody>
+          <a:bodyPr/>
+          <a:lstStyle/>
+          <a:p>
+            <a:endParaRPr lang="en-GB"/>
+          </a:p>
+        </p:txBody>
       </p:sp>
       <p:sp>
         <p:nvSpPr>
@@ -1802,6 +2150,13 @@
           </a:solidFill>
           <a:ln/>
         </p:spPr>
+        <p:txBody>
+          <a:bodyPr/>
+          <a:lstStyle/>
+          <a:p>
+            <a:endParaRPr lang="en-GB"/>
+          </a:p>
+        </p:txBody>
       </p:sp>
       <p:sp>
         <p:nvSpPr>
@@ -1826,6 +2181,13 @@
           </a:solidFill>
           <a:ln/>
         </p:spPr>
+        <p:txBody>
+          <a:bodyPr/>
+          <a:lstStyle/>
+          <a:p>
+            <a:endParaRPr lang="en-GB"/>
+          </a:p>
+        </p:txBody>
       </p:sp>
       <p:sp>
         <p:nvSpPr>
@@ -1850,6 +2212,13 @@
           </a:solidFill>
           <a:ln/>
         </p:spPr>
+        <p:txBody>
+          <a:bodyPr/>
+          <a:lstStyle/>
+          <a:p>
+            <a:endParaRPr lang="en-GB"/>
+          </a:p>
+        </p:txBody>
       </p:sp>
       <p:sp>
         <p:nvSpPr>
@@ -1874,6 +2243,13 @@
           </a:solidFill>
           <a:ln/>
         </p:spPr>
+        <p:txBody>
+          <a:bodyPr/>
+          <a:lstStyle/>
+          <a:p>
+            <a:endParaRPr lang="en-GB"/>
+          </a:p>
+        </p:txBody>
       </p:sp>
       <p:sp>
         <p:nvSpPr>
@@ -1898,6 +2274,13 @@
           </a:solidFill>
           <a:ln/>
         </p:spPr>
+        <p:txBody>
+          <a:bodyPr/>
+          <a:lstStyle/>
+          <a:p>
+            <a:endParaRPr lang="en-GB"/>
+          </a:p>
+        </p:txBody>
       </p:sp>
       <p:sp>
         <p:nvSpPr>
@@ -1922,6 +2305,13 @@
           </a:solidFill>
           <a:ln/>
         </p:spPr>
+        <p:txBody>
+          <a:bodyPr/>
+          <a:lstStyle/>
+          <a:p>
+            <a:endParaRPr lang="en-GB"/>
+          </a:p>
+        </p:txBody>
       </p:sp>
       <p:sp>
         <p:nvSpPr>
@@ -1946,6 +2336,13 @@
           </a:solidFill>
           <a:ln/>
         </p:spPr>
+        <p:txBody>
+          <a:bodyPr/>
+          <a:lstStyle/>
+          <a:p>
+            <a:endParaRPr lang="en-GB"/>
+          </a:p>
+        </p:txBody>
       </p:sp>
       <p:sp>
         <p:nvSpPr>
@@ -1970,6 +2367,13 @@
           </a:solidFill>
           <a:ln/>
         </p:spPr>
+        <p:txBody>
+          <a:bodyPr/>
+          <a:lstStyle/>
+          <a:p>
+            <a:endParaRPr lang="en-GB"/>
+          </a:p>
+        </p:txBody>
       </p:sp>
       <p:sp>
         <p:nvSpPr>
@@ -1994,6 +2398,13 @@
           </a:solidFill>
           <a:ln/>
         </p:spPr>
+        <p:txBody>
+          <a:bodyPr/>
+          <a:lstStyle/>
+          <a:p>
+            <a:endParaRPr lang="en-GB"/>
+          </a:p>
+        </p:txBody>
       </p:sp>
     </p:spTree>
   </p:cSld>
@@ -2011,6 +2422,7 @@
         <a:solidFill>
           <a:srgbClr val="F7F8FA"/>
         </a:solidFill>
+        <a:effectLst/>
       </p:bgPr>
     </p:bg>
     <p:spTree>
@@ -2048,7 +2460,7 @@
           <a:bodyPr wrap="square" lIns="0" tIns="0" rIns="0" bIns="0" rtlCol="0" anchor="ctr"/>
           <a:lstStyle/>
           <a:p>
-            <a:pPr indent="0" marL="0">
+            <a:pPr marL="0" indent="0">
               <a:buNone/>
             </a:pPr>
             <a:r>
@@ -2087,7 +2499,7 @@
           <a:bodyPr wrap="square" lIns="0" tIns="0" rIns="0" bIns="0" rtlCol="0" anchor="t"/>
           <a:lstStyle/>
           <a:p>
-            <a:pPr indent="0" marL="0">
+            <a:pPr marL="0" indent="0">
               <a:lnSpc>
                 <a:spcPct val="110000"/>
               </a:lnSpc>
@@ -2110,7 +2522,7 @@
             <a:endParaRPr lang="en-US" sz="1800" dirty="0"/>
           </a:p>
           <a:p>
-            <a:pPr indent="0" marL="0">
+            <a:pPr marL="0" indent="0">
               <a:lnSpc>
                 <a:spcPct val="110000"/>
               </a:lnSpc>
@@ -2133,7 +2545,7 @@
             <a:endParaRPr lang="en-US" sz="1800" dirty="0"/>
           </a:p>
           <a:p>
-            <a:pPr indent="0" marL="0">
+            <a:pPr marL="0" indent="0">
               <a:lnSpc>
                 <a:spcPct val="110000"/>
               </a:lnSpc>
@@ -2180,13 +2592,20 @@
             <a:prstDash val="solid"/>
           </a:ln>
           <a:effectLst>
-            <a:outerShdw sx="100000" sy="100000" kx="0" ky="0" algn="bl" rotWithShape="0" blurRad="127000" dist="38100" dir="5400000">
+            <a:outerShdw blurRad="127000" dist="38100" dir="5400000" algn="bl" rotWithShape="0">
               <a:srgbClr val="9AA4B2">
                 <a:alpha val="35000"/>
               </a:srgbClr>
             </a:outerShdw>
           </a:effectLst>
         </p:spPr>
+        <p:txBody>
+          <a:bodyPr/>
+          <a:lstStyle/>
+          <a:p>
+            <a:endParaRPr lang="en-GB"/>
+          </a:p>
+        </p:txBody>
       </p:sp>
       <p:sp>
         <p:nvSpPr>
@@ -2209,7 +2628,7 @@
           <a:bodyPr wrap="square" lIns="0" tIns="0" rIns="0" bIns="0" rtlCol="0" anchor="ctr"/>
           <a:lstStyle/>
           <a:p>
-            <a:pPr algn="ctr" indent="0" marL="0">
+            <a:pPr marL="0" indent="0" algn="ctr">
               <a:buNone/>
             </a:pPr>
             <a:r>
@@ -2248,7 +2667,7 @@
           <a:bodyPr wrap="square" lIns="0" tIns="0" rIns="0" bIns="0" rtlCol="0" anchor="ctr"/>
           <a:lstStyle/>
           <a:p>
-            <a:pPr algn="ctr" indent="0" marL="0">
+            <a:pPr marL="0" indent="0" algn="ctr">
               <a:buNone/>
             </a:pPr>
             <a:r>
@@ -2287,7 +2706,7 @@
           <a:bodyPr wrap="square" lIns="0" tIns="0" rIns="0" bIns="0" rtlCol="0" anchor="ctr"/>
           <a:lstStyle/>
           <a:p>
-            <a:pPr algn="ctr" indent="0" marL="0">
+            <a:pPr marL="0" indent="0" algn="ctr">
               <a:buNone/>
             </a:pPr>
             <a:r>
@@ -2315,12 +2734,13 @@
 
 <file path=ppt/slides/slide3.xml><?xml version="1.0" encoding="utf-8"?>
 <p:sld xmlns:a="http://schemas.openxmlformats.org/drawingml/2006/main" xmlns:r="http://schemas.openxmlformats.org/officeDocument/2006/relationships" xmlns:p="http://schemas.openxmlformats.org/presentationml/2006/main">
-  <p:cSld name="Slide 3">
+  <p:cSld name="Slide 4">
     <p:bg>
       <p:bgPr>
         <a:solidFill>
-          <a:srgbClr val="F7F8FA"/>
+          <a:srgbClr val="1B2230"/>
         </a:solidFill>
+        <a:effectLst/>
       </p:bgPr>
     </p:bg>
     <p:spTree>
@@ -2345,8 +2765,8 @@
         </p:nvSpPr>
         <p:spPr>
           <a:xfrm>
-            <a:off x="548640" y="502920"/>
-            <a:ext cx="8229600" cy="731520"/>
+            <a:off x="548640" y="1463040"/>
+            <a:ext cx="10972800" cy="1097280"/>
           </a:xfrm>
           <a:prstGeom prst="rect">
             <a:avLst/>
@@ -2358,34 +2778,61 @@
           <a:bodyPr wrap="square" lIns="0" tIns="0" rIns="0" bIns="0" rtlCol="0" anchor="ctr"/>
           <a:lstStyle/>
           <a:p>
-            <a:pPr indent="0" marL="0">
+            <a:pPr marL="0" indent="0">
               <a:buNone/>
             </a:pPr>
             <a:r>
-              <a:rPr lang="en-US" sz="3800" b="1" dirty="0">
-                <a:solidFill>
-                  <a:srgbClr val="1B2230"/>
+              <a:rPr lang="en-US" sz="6000" b="1" dirty="0">
+                <a:solidFill>
+                  <a:srgbClr val="C0741A"/>
                 </a:solidFill>
                 <a:latin typeface="Cambria" pitchFamily="34" charset="0"/>
                 <a:ea typeface="Cambria" pitchFamily="34" charset="-122"/>
                 <a:cs typeface="Cambria" pitchFamily="34" charset="-120"/>
               </a:rPr>
-              <a:t>How it works</a:t>
-            </a:r>
-            <a:endParaRPr lang="en-US" sz="3800" dirty="0"/>
-          </a:p>
-        </p:txBody>
-      </p:sp>
-      <p:sp>
-        <p:nvSpPr>
-          <p:cNvPr id="3" name="Text 1"/>
-          <p:cNvSpPr/>
-          <p:nvPr/>
-        </p:nvSpPr>
-        <p:spPr>
-          <a:xfrm>
-            <a:off x="548640" y="1234440"/>
-            <a:ext cx="9144000" cy="365760"/>
+              <a:t>LIVE DEMO</a:t>
+            </a:r>
+            <a:endParaRPr lang="en-US" sz="6000" dirty="0"/>
+          </a:p>
+        </p:txBody>
+      </p:sp>
+      <p:sp>
+        <p:nvSpPr>
+          <p:cNvPr id="3" name="Shape 1"/>
+          <p:cNvSpPr/>
+          <p:nvPr/>
+        </p:nvSpPr>
+        <p:spPr>
+          <a:xfrm>
+            <a:off x="548640" y="3200400"/>
+            <a:ext cx="548640" cy="548640"/>
+          </a:xfrm>
+          <a:prstGeom prst="ellipse">
+            <a:avLst/>
+          </a:prstGeom>
+          <a:solidFill>
+            <a:srgbClr val="C0741A"/>
+          </a:solidFill>
+          <a:ln/>
+        </p:spPr>
+        <p:txBody>
+          <a:bodyPr/>
+          <a:lstStyle/>
+          <a:p>
+            <a:endParaRPr lang="en-GB"/>
+          </a:p>
+        </p:txBody>
+      </p:sp>
+      <p:sp>
+        <p:nvSpPr>
+          <p:cNvPr id="4" name="Text 2"/>
+          <p:cNvSpPr/>
+          <p:nvPr/>
+        </p:nvSpPr>
+        <p:spPr>
+          <a:xfrm>
+            <a:off x="548640" y="3200400"/>
+            <a:ext cx="548640" cy="548640"/>
           </a:xfrm>
           <a:prstGeom prst="rect">
             <a:avLst/>
@@ -2397,57 +2844,23 @@
           <a:bodyPr wrap="square" lIns="0" tIns="0" rIns="0" bIns="0" rtlCol="0" anchor="ctr"/>
           <a:lstStyle/>
           <a:p>
-            <a:pPr indent="0" marL="0">
+            <a:pPr marL="0" indent="0" algn="ctr">
               <a:buNone/>
             </a:pPr>
             <a:r>
-              <a:rPr lang="en-US" sz="1600" dirty="0">
-                <a:solidFill>
-                  <a:srgbClr val="5A6473"/>
+              <a:rPr lang="en-US" sz="2200" b="1" dirty="0">
+                <a:solidFill>
+                  <a:srgbClr val="FFFFFF"/>
                 </a:solidFill>
                 <a:latin typeface="Calibri" pitchFamily="34" charset="0"/>
                 <a:ea typeface="Calibri" pitchFamily="34" charset="-122"/>
                 <a:cs typeface="Calibri" pitchFamily="34" charset="-120"/>
               </a:rPr>
-              <a:t>One clean pipeline, four swappable modules.</a:t>
-            </a:r>
-            <a:endParaRPr lang="en-US" sz="1600" dirty="0"/>
-          </a:p>
-        </p:txBody>
-      </p:sp>
-      <p:sp>
-        <p:nvSpPr>
-          <p:cNvPr id="4" name="Shape 2"/>
-          <p:cNvSpPr/>
-          <p:nvPr/>
-        </p:nvSpPr>
-        <p:spPr>
-          <a:xfrm>
-            <a:off x="630936" y="1965960"/>
-            <a:ext cx="2423160" cy="1691640"/>
-          </a:xfrm>
-          <a:prstGeom prst="roundRect">
-            <a:avLst>
-              <a:gd name="adj" fmla="val 5405"/>
-            </a:avLst>
-          </a:prstGeom>
-          <a:solidFill>
-            <a:srgbClr val="FFFFFF"/>
-          </a:solidFill>
-          <a:ln w="12700">
-            <a:solidFill>
-              <a:srgbClr val="EEF0F4"/>
-            </a:solidFill>
-            <a:prstDash val="solid"/>
-          </a:ln>
-          <a:effectLst>
-            <a:outerShdw sx="100000" sy="100000" kx="0" ky="0" algn="bl" rotWithShape="0" blurRad="101600" dist="25400" dir="5400000">
-              <a:srgbClr val="9AA4B2">
-                <a:alpha val="30000"/>
-              </a:srgbClr>
-            </a:outerShdw>
-          </a:effectLst>
-        </p:spPr>
+              <a:t>1</a:t>
+            </a:r>
+            <a:endParaRPr lang="en-US" sz="2200" dirty="0"/>
+          </a:p>
+        </p:txBody>
       </p:sp>
       <p:sp>
         <p:nvSpPr>
@@ -2457,8 +2870,8 @@
         </p:nvSpPr>
         <p:spPr>
           <a:xfrm>
-            <a:off x="630936" y="2130552"/>
-            <a:ext cx="2423160" cy="365760"/>
+            <a:off x="1234440" y="3200400"/>
+            <a:ext cx="2743200" cy="548640"/>
           </a:xfrm>
           <a:prstGeom prst="rect">
             <a:avLst/>
@@ -2470,34 +2883,61 @@
           <a:bodyPr wrap="square" lIns="0" tIns="0" rIns="0" bIns="0" rtlCol="0" anchor="ctr"/>
           <a:lstStyle/>
           <a:p>
-            <a:pPr algn="ctr" indent="0" marL="0">
+            <a:pPr marL="0" indent="0">
               <a:buNone/>
             </a:pPr>
             <a:r>
-              <a:rPr lang="en-US" sz="1500" b="1" dirty="0">
-                <a:solidFill>
-                  <a:srgbClr val="90540F"/>
+              <a:rPr lang="en-US" sz="1800" dirty="0">
+                <a:solidFill>
+                  <a:srgbClr val="FFFFFF"/>
                 </a:solidFill>
                 <a:latin typeface="Calibri" pitchFamily="34" charset="0"/>
                 <a:ea typeface="Calibri" pitchFamily="34" charset="-122"/>
                 <a:cs typeface="Calibri" pitchFamily="34" charset="-120"/>
               </a:rPr>
-              <a:t>INPUT</a:t>
-            </a:r>
-            <a:endParaRPr lang="en-US" sz="1500" dirty="0"/>
-          </a:p>
-        </p:txBody>
-      </p:sp>
-      <p:sp>
-        <p:nvSpPr>
-          <p:cNvPr id="6" name="Text 4"/>
-          <p:cNvSpPr/>
-          <p:nvPr/>
-        </p:nvSpPr>
-        <p:spPr>
-          <a:xfrm>
-            <a:off x="722376" y="2532888"/>
-            <a:ext cx="2240280" cy="640080"/>
+              <a:t>Pick a saved lesson</a:t>
+            </a:r>
+            <a:endParaRPr lang="en-US" sz="1800" dirty="0"/>
+          </a:p>
+        </p:txBody>
+      </p:sp>
+      <p:sp>
+        <p:nvSpPr>
+          <p:cNvPr id="6" name="Shape 4"/>
+          <p:cNvSpPr/>
+          <p:nvPr/>
+        </p:nvSpPr>
+        <p:spPr>
+          <a:xfrm>
+            <a:off x="4206240" y="3200400"/>
+            <a:ext cx="548640" cy="548640"/>
+          </a:xfrm>
+          <a:prstGeom prst="ellipse">
+            <a:avLst/>
+          </a:prstGeom>
+          <a:solidFill>
+            <a:srgbClr val="C0741A"/>
+          </a:solidFill>
+          <a:ln/>
+        </p:spPr>
+        <p:txBody>
+          <a:bodyPr/>
+          <a:lstStyle/>
+          <a:p>
+            <a:endParaRPr lang="en-GB"/>
+          </a:p>
+        </p:txBody>
+      </p:sp>
+      <p:sp>
+        <p:nvSpPr>
+          <p:cNvPr id="7" name="Text 5"/>
+          <p:cNvSpPr/>
+          <p:nvPr/>
+        </p:nvSpPr>
+        <p:spPr>
+          <a:xfrm>
+            <a:off x="4206240" y="3200400"/>
+            <a:ext cx="548640" cy="548640"/>
           </a:xfrm>
           <a:prstGeom prst="rect">
             <a:avLst/>
@@ -2509,51 +2949,100 @@
           <a:bodyPr wrap="square" lIns="0" tIns="0" rIns="0" bIns="0" rtlCol="0" anchor="ctr"/>
           <a:lstStyle/>
           <a:p>
-            <a:pPr algn="ctr" indent="0" marL="0">
+            <a:pPr marL="0" indent="0" algn="ctr">
               <a:buNone/>
             </a:pPr>
             <a:r>
-              <a:rPr lang="en-US" sz="1250" dirty="0">
-                <a:solidFill>
-                  <a:srgbClr val="5A6473"/>
+              <a:rPr lang="en-US" sz="2200" b="1" dirty="0">
+                <a:solidFill>
+                  <a:srgbClr val="FFFFFF"/>
                 </a:solidFill>
                 <a:latin typeface="Calibri" pitchFamily="34" charset="0"/>
                 <a:ea typeface="Calibri" pitchFamily="34" charset="-122"/>
                 <a:cs typeface="Calibri" pitchFamily="34" charset="-120"/>
               </a:rPr>
-              <a:t>saved lesson,</a:t>
-            </a:r>
-            <a:endParaRPr lang="en-US" sz="1250" dirty="0"/>
-          </a:p>
-          <a:p>
-            <a:pPr algn="ctr" indent="0" marL="0">
+              <a:t>2</a:t>
+            </a:r>
+            <a:endParaRPr lang="en-US" sz="2200" dirty="0"/>
+          </a:p>
+        </p:txBody>
+      </p:sp>
+      <p:sp>
+        <p:nvSpPr>
+          <p:cNvPr id="8" name="Text 6"/>
+          <p:cNvSpPr/>
+          <p:nvPr/>
+        </p:nvSpPr>
+        <p:spPr>
+          <a:xfrm>
+            <a:off x="4892040" y="3200400"/>
+            <a:ext cx="2743200" cy="548640"/>
+          </a:xfrm>
+          <a:prstGeom prst="rect">
+            <a:avLst/>
+          </a:prstGeom>
+          <a:noFill/>
+          <a:ln/>
+        </p:spPr>
+        <p:txBody>
+          <a:bodyPr wrap="square" lIns="0" tIns="0" rIns="0" bIns="0" rtlCol="0" anchor="ctr"/>
+          <a:lstStyle/>
+          <a:p>
+            <a:pPr marL="0" indent="0">
               <a:buNone/>
             </a:pPr>
             <a:r>
-              <a:rPr lang="en-US" sz="1250" dirty="0">
-                <a:solidFill>
-                  <a:srgbClr val="5A6473"/>
+              <a:rPr lang="en-US" sz="1800" dirty="0">
+                <a:solidFill>
+                  <a:srgbClr val="FFFFFF"/>
                 </a:solidFill>
                 <a:latin typeface="Calibri" pitchFamily="34" charset="0"/>
                 <a:ea typeface="Calibri" pitchFamily="34" charset="-122"/>
                 <a:cs typeface="Calibri" pitchFamily="34" charset="-120"/>
               </a:rPr>
-              <a:t>URL, or file</a:t>
-            </a:r>
-            <a:endParaRPr lang="en-US" sz="1250" dirty="0"/>
-          </a:p>
-        </p:txBody>
-      </p:sp>
-      <p:sp>
-        <p:nvSpPr>
-          <p:cNvPr id="7" name="Text 5"/>
-          <p:cNvSpPr/>
-          <p:nvPr/>
-        </p:nvSpPr>
-        <p:spPr>
-          <a:xfrm>
-            <a:off x="630936" y="3264408"/>
-            <a:ext cx="2423160" cy="292608"/>
+              <a:t>Hit Generate</a:t>
+            </a:r>
+            <a:endParaRPr lang="en-US" sz="1800" dirty="0"/>
+          </a:p>
+        </p:txBody>
+      </p:sp>
+      <p:sp>
+        <p:nvSpPr>
+          <p:cNvPr id="9" name="Shape 7"/>
+          <p:cNvSpPr/>
+          <p:nvPr/>
+        </p:nvSpPr>
+        <p:spPr>
+          <a:xfrm>
+            <a:off x="7863840" y="3200400"/>
+            <a:ext cx="548640" cy="548640"/>
+          </a:xfrm>
+          <a:prstGeom prst="ellipse">
+            <a:avLst/>
+          </a:prstGeom>
+          <a:solidFill>
+            <a:srgbClr val="C0741A"/>
+          </a:solidFill>
+          <a:ln/>
+        </p:spPr>
+        <p:txBody>
+          <a:bodyPr/>
+          <a:lstStyle/>
+          <a:p>
+            <a:endParaRPr lang="en-GB"/>
+          </a:p>
+        </p:txBody>
+      </p:sp>
+      <p:sp>
+        <p:nvSpPr>
+          <p:cNvPr id="10" name="Text 8"/>
+          <p:cNvSpPr/>
+          <p:nvPr/>
+        </p:nvSpPr>
+        <p:spPr>
+          <a:xfrm>
+            <a:off x="7863840" y="3200400"/>
+            <a:ext cx="548640" cy="548640"/>
           </a:xfrm>
           <a:prstGeom prst="rect">
             <a:avLst/>
@@ -2565,107 +3054,34 @@
           <a:bodyPr wrap="square" lIns="0" tIns="0" rIns="0" bIns="0" rtlCol="0" anchor="ctr"/>
           <a:lstStyle/>
           <a:p>
-            <a:pPr algn="ctr" indent="0" marL="0">
+            <a:pPr marL="0" indent="0" algn="ctr">
               <a:buNone/>
             </a:pPr>
             <a:r>
-              <a:rPr lang="en-US" sz="1050" dirty="0">
-                <a:solidFill>
-                  <a:srgbClr val="8A93A1"/>
-                </a:solidFill>
-                <a:latin typeface="Courier New" pitchFamily="34" charset="0"/>
-                <a:ea typeface="Courier New" pitchFamily="34" charset="-122"/>
-                <a:cs typeface="Courier New" pitchFamily="34" charset="-120"/>
-              </a:rPr>
-              <a:t>data_processor</a:t>
-            </a:r>
-            <a:endParaRPr lang="en-US" sz="1050" dirty="0"/>
-          </a:p>
-        </p:txBody>
-      </p:sp>
-      <p:sp>
-        <p:nvSpPr>
-          <p:cNvPr id="8" name="Text 6"/>
-          <p:cNvSpPr/>
-          <p:nvPr/>
-        </p:nvSpPr>
-        <p:spPr>
-          <a:xfrm>
-            <a:off x="3035808" y="2583180"/>
-            <a:ext cx="448056" cy="457200"/>
-          </a:xfrm>
-          <a:prstGeom prst="rect">
-            <a:avLst/>
-          </a:prstGeom>
-          <a:noFill/>
-          <a:ln/>
-        </p:spPr>
-        <p:txBody>
-          <a:bodyPr wrap="square" lIns="0" tIns="0" rIns="0" bIns="0" rtlCol="0" anchor="ctr"/>
-          <a:lstStyle/>
-          <a:p>
-            <a:pPr algn="ctr" indent="0" marL="0">
-              <a:buNone/>
-            </a:pPr>
-            <a:r>
-              <a:rPr lang="en-US" sz="1600" b="1" dirty="0">
-                <a:solidFill>
-                  <a:srgbClr val="C0741A"/>
+              <a:rPr lang="en-US" sz="2200" b="1" dirty="0">
+                <a:solidFill>
+                  <a:srgbClr val="FFFFFF"/>
                 </a:solidFill>
                 <a:latin typeface="Calibri" pitchFamily="34" charset="0"/>
                 <a:ea typeface="Calibri" pitchFamily="34" charset="-122"/>
                 <a:cs typeface="Calibri" pitchFamily="34" charset="-120"/>
               </a:rPr>
-              <a:t>▶</a:t>
-            </a:r>
-            <a:endParaRPr lang="en-US" sz="1600" dirty="0"/>
-          </a:p>
-        </p:txBody>
-      </p:sp>
-      <p:sp>
-        <p:nvSpPr>
-          <p:cNvPr id="9" name="Shape 7"/>
-          <p:cNvSpPr/>
-          <p:nvPr/>
-        </p:nvSpPr>
-        <p:spPr>
-          <a:xfrm>
-            <a:off x="3465576" y="1965960"/>
-            <a:ext cx="2423160" cy="1691640"/>
-          </a:xfrm>
-          <a:prstGeom prst="roundRect">
-            <a:avLst>
-              <a:gd name="adj" fmla="val 5405"/>
-            </a:avLst>
-          </a:prstGeom>
-          <a:solidFill>
-            <a:srgbClr val="FFFFFF"/>
-          </a:solidFill>
-          <a:ln w="12700">
-            <a:solidFill>
-              <a:srgbClr val="EEF0F4"/>
-            </a:solidFill>
-            <a:prstDash val="solid"/>
-          </a:ln>
-          <a:effectLst>
-            <a:outerShdw sx="100000" sy="100000" kx="0" ky="0" algn="bl" rotWithShape="0" blurRad="101600" dist="25400" dir="5400000">
-              <a:srgbClr val="9AA4B2">
-                <a:alpha val="30000"/>
-              </a:srgbClr>
-            </a:outerShdw>
-          </a:effectLst>
-        </p:spPr>
-      </p:sp>
-      <p:sp>
-        <p:nvSpPr>
-          <p:cNvPr id="10" name="Text 8"/>
-          <p:cNvSpPr/>
-          <p:nvPr/>
-        </p:nvSpPr>
-        <p:spPr>
-          <a:xfrm>
-            <a:off x="3465576" y="2130552"/>
-            <a:ext cx="2423160" cy="365760"/>
+              <a:t>3</a:t>
+            </a:r>
+            <a:endParaRPr lang="en-US" sz="2200" dirty="0"/>
+          </a:p>
+        </p:txBody>
+      </p:sp>
+      <p:sp>
+        <p:nvSpPr>
+          <p:cNvPr id="11" name="Text 9"/>
+          <p:cNvSpPr/>
+          <p:nvPr/>
+        </p:nvSpPr>
+        <p:spPr>
+          <a:xfrm>
+            <a:off x="8549640" y="3200400"/>
+            <a:ext cx="2743200" cy="548640"/>
           </a:xfrm>
           <a:prstGeom prst="rect">
             <a:avLst/>
@@ -2677,34 +3093,34 @@
           <a:bodyPr wrap="square" lIns="0" tIns="0" rIns="0" bIns="0" rtlCol="0" anchor="ctr"/>
           <a:lstStyle/>
           <a:p>
-            <a:pPr algn="ctr" indent="0" marL="0">
+            <a:pPr marL="0" indent="0">
               <a:buNone/>
             </a:pPr>
             <a:r>
-              <a:rPr lang="en-US" sz="1500" b="1" dirty="0">
-                <a:solidFill>
-                  <a:srgbClr val="90540F"/>
+              <a:rPr lang="en-US" sz="1800" dirty="0">
+                <a:solidFill>
+                  <a:srgbClr val="FFFFFF"/>
                 </a:solidFill>
                 <a:latin typeface="Calibri" pitchFamily="34" charset="0"/>
                 <a:ea typeface="Calibri" pitchFamily="34" charset="-122"/>
                 <a:cs typeface="Calibri" pitchFamily="34" charset="-120"/>
               </a:rPr>
-              <a:t>LLM</a:t>
-            </a:r>
-            <a:endParaRPr lang="en-US" sz="1500" dirty="0"/>
-          </a:p>
-        </p:txBody>
-      </p:sp>
-      <p:sp>
-        <p:nvSpPr>
-          <p:cNvPr id="11" name="Text 9"/>
-          <p:cNvSpPr/>
-          <p:nvPr/>
-        </p:nvSpPr>
-        <p:spPr>
-          <a:xfrm>
-            <a:off x="3557016" y="2532888"/>
-            <a:ext cx="2240280" cy="640080"/>
+              <a:t>Play the recap</a:t>
+            </a:r>
+            <a:endParaRPr lang="en-US" sz="1800" dirty="0"/>
+          </a:p>
+        </p:txBody>
+      </p:sp>
+      <p:sp>
+        <p:nvSpPr>
+          <p:cNvPr id="12" name="Text 10"/>
+          <p:cNvSpPr/>
+          <p:nvPr/>
+        </p:nvSpPr>
+        <p:spPr>
+          <a:xfrm>
+            <a:off x="548640" y="4297680"/>
+            <a:ext cx="10058400" cy="457200"/>
           </a:xfrm>
           <a:prstGeom prst="rect">
             <a:avLst/>
@@ -2716,114 +3132,19 @@
           <a:bodyPr wrap="square" lIns="0" tIns="0" rIns="0" bIns="0" rtlCol="0" anchor="ctr"/>
           <a:lstStyle/>
           <a:p>
-            <a:pPr algn="ctr" indent="0" marL="0">
+            <a:pPr marL="0" indent="0">
               <a:buNone/>
             </a:pPr>
             <a:r>
-              <a:rPr lang="en-US" sz="1250" dirty="0">
-                <a:solidFill>
-                  <a:srgbClr val="5A6473"/>
+              <a:rPr lang="en-US" sz="1600" i="1" dirty="0">
+                <a:solidFill>
+                  <a:srgbClr val="CADCFC"/>
                 </a:solidFill>
                 <a:latin typeface="Calibri" pitchFamily="34" charset="0"/>
                 <a:ea typeface="Calibri" pitchFamily="34" charset="-122"/>
                 <a:cs typeface="Calibri" pitchFamily="34" charset="-120"/>
               </a:rPr>
-              <a:t>structured recap:</a:t>
-            </a:r>
-            <a:endParaRPr lang="en-US" sz="1250" dirty="0"/>
-          </a:p>
-          <a:p>
-            <a:pPr algn="ctr" indent="0" marL="0">
-              <a:buNone/>
-            </a:pPr>
-            <a:r>
-              <a:rPr lang="en-US" sz="1250" dirty="0">
-                <a:solidFill>
-                  <a:srgbClr val="5A6473"/>
-                </a:solidFill>
-                <a:latin typeface="Calibri" pitchFamily="34" charset="0"/>
-                <a:ea typeface="Calibri" pitchFamily="34" charset="-122"/>
-                <a:cs typeface="Calibri" pitchFamily="34" charset="-120"/>
-              </a:rPr>
-              <a:t>title · points · script</a:t>
-            </a:r>
-            <a:endParaRPr lang="en-US" sz="1250" dirty="0"/>
-          </a:p>
-        </p:txBody>
-      </p:sp>
-      <p:sp>
-        <p:nvSpPr>
-          <p:cNvPr id="12" name="Text 10"/>
-          <p:cNvSpPr/>
-          <p:nvPr/>
-        </p:nvSpPr>
-        <p:spPr>
-          <a:xfrm>
-            <a:off x="3465576" y="3264408"/>
-            <a:ext cx="2423160" cy="292608"/>
-          </a:xfrm>
-          <a:prstGeom prst="rect">
-            <a:avLst/>
-          </a:prstGeom>
-          <a:noFill/>
-          <a:ln/>
-        </p:spPr>
-        <p:txBody>
-          <a:bodyPr wrap="square" lIns="0" tIns="0" rIns="0" bIns="0" rtlCol="0" anchor="ctr"/>
-          <a:lstStyle/>
-          <a:p>
-            <a:pPr algn="ctr" indent="0" marL="0">
-              <a:buNone/>
-            </a:pPr>
-            <a:r>
-              <a:rPr lang="en-US" sz="1050" dirty="0">
-                <a:solidFill>
-                  <a:srgbClr val="8A93A1"/>
-                </a:solidFill>
-                <a:latin typeface="Courier New" pitchFamily="34" charset="0"/>
-                <a:ea typeface="Courier New" pitchFamily="34" charset="-122"/>
-                <a:cs typeface="Courier New" pitchFamily="34" charset="-120"/>
-              </a:rPr>
-              <a:t>llm_processor</a:t>
-            </a:r>
-            <a:endParaRPr lang="en-US" sz="1050" dirty="0"/>
-          </a:p>
-        </p:txBody>
-      </p:sp>
-      <p:sp>
-        <p:nvSpPr>
-          <p:cNvPr id="13" name="Text 11"/>
-          <p:cNvSpPr/>
-          <p:nvPr/>
-        </p:nvSpPr>
-        <p:spPr>
-          <a:xfrm>
-            <a:off x="5870448" y="2583180"/>
-            <a:ext cx="448056" cy="457200"/>
-          </a:xfrm>
-          <a:prstGeom prst="rect">
-            <a:avLst/>
-          </a:prstGeom>
-          <a:noFill/>
-          <a:ln/>
-        </p:spPr>
-        <p:txBody>
-          <a:bodyPr wrap="square" lIns="0" tIns="0" rIns="0" bIns="0" rtlCol="0" anchor="ctr"/>
-          <a:lstStyle/>
-          <a:p>
-            <a:pPr algn="ctr" indent="0" marL="0">
-              <a:buNone/>
-            </a:pPr>
-            <a:r>
-              <a:rPr lang="en-US" sz="1600" b="1" dirty="0">
-                <a:solidFill>
-                  <a:srgbClr val="C0741A"/>
-                </a:solidFill>
-                <a:latin typeface="Calibri" pitchFamily="34" charset="0"/>
-                <a:ea typeface="Calibri" pitchFamily="34" charset="-122"/>
-                <a:cs typeface="Calibri" pitchFamily="34" charset="-120"/>
-              </a:rPr>
-              <a:t>▶</a:t>
+              <a:t>Watch the episode title, key points, and audio appear — then it plays.</a:t>
             </a:r>
             <a:endParaRPr lang="en-US" sz="1600" dirty="0"/>
           </a:p>
@@ -2831,715 +3152,311 @@
       </p:sp>
       <p:sp>
         <p:nvSpPr>
-          <p:cNvPr id="14" name="Shape 12"/>
-          <p:cNvSpPr/>
-          <p:nvPr/>
-        </p:nvSpPr>
-        <p:spPr>
-          <a:xfrm>
-            <a:off x="6300216" y="1965960"/>
-            <a:ext cx="2423160" cy="1691640"/>
+          <p:cNvPr id="13" name="Shape 11"/>
+          <p:cNvSpPr/>
+          <p:nvPr/>
+        </p:nvSpPr>
+        <p:spPr>
+          <a:xfrm>
+            <a:off x="548640" y="5769864"/>
+            <a:ext cx="64008" cy="164592"/>
           </a:xfrm>
           <a:prstGeom prst="roundRect">
             <a:avLst>
-              <a:gd name="adj" fmla="val 5405"/>
+              <a:gd name="adj" fmla="val 42857"/>
             </a:avLst>
           </a:prstGeom>
           <a:solidFill>
-            <a:srgbClr val="FFFFFF"/>
-          </a:solidFill>
-          <a:ln w="12700">
-            <a:solidFill>
-              <a:srgbClr val="EEF0F4"/>
-            </a:solidFill>
-            <a:prstDash val="solid"/>
-          </a:ln>
-          <a:effectLst>
-            <a:outerShdw sx="100000" sy="100000" kx="0" ky="0" algn="bl" rotWithShape="0" blurRad="101600" dist="25400" dir="5400000">
-              <a:srgbClr val="9AA4B2">
-                <a:alpha val="30000"/>
-              </a:srgbClr>
-            </a:outerShdw>
-          </a:effectLst>
-        </p:spPr>
-      </p:sp>
-      <p:sp>
-        <p:nvSpPr>
-          <p:cNvPr id="15" name="Text 13"/>
-          <p:cNvSpPr/>
-          <p:nvPr/>
-        </p:nvSpPr>
-        <p:spPr>
-          <a:xfrm>
-            <a:off x="6300216" y="2130552"/>
-            <a:ext cx="2423160" cy="365760"/>
-          </a:xfrm>
-          <a:prstGeom prst="rect">
-            <a:avLst/>
-          </a:prstGeom>
-          <a:noFill/>
-          <a:ln/>
-        </p:spPr>
-        <p:txBody>
-          <a:bodyPr wrap="square" lIns="0" tIns="0" rIns="0" bIns="0" rtlCol="0" anchor="ctr"/>
-          <a:lstStyle/>
-          <a:p>
-            <a:pPr algn="ctr" indent="0" marL="0">
-              <a:buNone/>
-            </a:pPr>
-            <a:r>
-              <a:rPr lang="en-US" sz="1500" b="1" dirty="0">
-                <a:solidFill>
-                  <a:srgbClr val="90540F"/>
-                </a:solidFill>
-                <a:latin typeface="Calibri" pitchFamily="34" charset="0"/>
-                <a:ea typeface="Calibri" pitchFamily="34" charset="-122"/>
-                <a:cs typeface="Calibri" pitchFamily="34" charset="-120"/>
-              </a:rPr>
-              <a:t>TEXT-TO-SPEECH</a:t>
-            </a:r>
-            <a:endParaRPr lang="en-US" sz="1500" dirty="0"/>
-          </a:p>
-        </p:txBody>
-      </p:sp>
-      <p:sp>
-        <p:nvSpPr>
-          <p:cNvPr id="16" name="Text 14"/>
-          <p:cNvSpPr/>
-          <p:nvPr/>
-        </p:nvSpPr>
-        <p:spPr>
-          <a:xfrm>
-            <a:off x="6391656" y="2532888"/>
-            <a:ext cx="2240280" cy="640080"/>
-          </a:xfrm>
-          <a:prstGeom prst="rect">
-            <a:avLst/>
-          </a:prstGeom>
-          <a:noFill/>
-          <a:ln/>
-        </p:spPr>
-        <p:txBody>
-          <a:bodyPr wrap="square" lIns="0" tIns="0" rIns="0" bIns="0" rtlCol="0" anchor="ctr"/>
-          <a:lstStyle/>
-          <a:p>
-            <a:pPr algn="ctr" indent="0" marL="0">
-              <a:buNone/>
-            </a:pPr>
-            <a:r>
-              <a:rPr lang="en-US" sz="1250" dirty="0">
-                <a:solidFill>
-                  <a:srgbClr val="5A6473"/>
-                </a:solidFill>
-                <a:latin typeface="Calibri" pitchFamily="34" charset="0"/>
-                <a:ea typeface="Calibri" pitchFamily="34" charset="-122"/>
-                <a:cs typeface="Calibri" pitchFamily="34" charset="-120"/>
-              </a:rPr>
-              <a:t>script becomes</a:t>
-            </a:r>
-            <a:endParaRPr lang="en-US" sz="1250" dirty="0"/>
-          </a:p>
-          <a:p>
-            <a:pPr algn="ctr" indent="0" marL="0">
-              <a:buNone/>
-            </a:pPr>
-            <a:r>
-              <a:rPr lang="en-US" sz="1250" dirty="0">
-                <a:solidFill>
-                  <a:srgbClr val="5A6473"/>
-                </a:solidFill>
-                <a:latin typeface="Calibri" pitchFamily="34" charset="0"/>
-                <a:ea typeface="Calibri" pitchFamily="34" charset="-122"/>
-                <a:cs typeface="Calibri" pitchFamily="34" charset="-120"/>
-              </a:rPr>
-              <a:t>an mp3</a:t>
-            </a:r>
-            <a:endParaRPr lang="en-US" sz="1250" dirty="0"/>
-          </a:p>
-        </p:txBody>
-      </p:sp>
-      <p:sp>
-        <p:nvSpPr>
-          <p:cNvPr id="17" name="Text 15"/>
-          <p:cNvSpPr/>
-          <p:nvPr/>
-        </p:nvSpPr>
-        <p:spPr>
-          <a:xfrm>
-            <a:off x="6300216" y="3264408"/>
-            <a:ext cx="2423160" cy="292608"/>
-          </a:xfrm>
-          <a:prstGeom prst="rect">
-            <a:avLst/>
-          </a:prstGeom>
-          <a:noFill/>
-          <a:ln/>
-        </p:spPr>
-        <p:txBody>
-          <a:bodyPr wrap="square" lIns="0" tIns="0" rIns="0" bIns="0" rtlCol="0" anchor="ctr"/>
-          <a:lstStyle/>
-          <a:p>
-            <a:pPr algn="ctr" indent="0" marL="0">
-              <a:buNone/>
-            </a:pPr>
-            <a:r>
-              <a:rPr lang="en-US" sz="1050" dirty="0">
-                <a:solidFill>
-                  <a:srgbClr val="8A93A1"/>
-                </a:solidFill>
-                <a:latin typeface="Courier New" pitchFamily="34" charset="0"/>
-                <a:ea typeface="Courier New" pitchFamily="34" charset="-122"/>
-                <a:cs typeface="Courier New" pitchFamily="34" charset="-120"/>
-              </a:rPr>
-              <a:t>tts_generator</a:t>
-            </a:r>
-            <a:endParaRPr lang="en-US" sz="1050" dirty="0"/>
-          </a:p>
-        </p:txBody>
-      </p:sp>
-      <p:sp>
-        <p:nvSpPr>
-          <p:cNvPr id="18" name="Text 16"/>
-          <p:cNvSpPr/>
-          <p:nvPr/>
-        </p:nvSpPr>
-        <p:spPr>
-          <a:xfrm>
-            <a:off x="8705088" y="2583180"/>
-            <a:ext cx="448056" cy="457200"/>
-          </a:xfrm>
-          <a:prstGeom prst="rect">
-            <a:avLst/>
-          </a:prstGeom>
-          <a:noFill/>
-          <a:ln/>
-        </p:spPr>
-        <p:txBody>
-          <a:bodyPr wrap="square" lIns="0" tIns="0" rIns="0" bIns="0" rtlCol="0" anchor="ctr"/>
-          <a:lstStyle/>
-          <a:p>
-            <a:pPr algn="ctr" indent="0" marL="0">
-              <a:buNone/>
-            </a:pPr>
-            <a:r>
-              <a:rPr lang="en-US" sz="1600" b="1" dirty="0">
-                <a:solidFill>
-                  <a:srgbClr val="C0741A"/>
-                </a:solidFill>
-                <a:latin typeface="Calibri" pitchFamily="34" charset="0"/>
-                <a:ea typeface="Calibri" pitchFamily="34" charset="-122"/>
-                <a:cs typeface="Calibri" pitchFamily="34" charset="-120"/>
-              </a:rPr>
-              <a:t>▶</a:t>
-            </a:r>
-            <a:endParaRPr lang="en-US" sz="1600" dirty="0"/>
-          </a:p>
-        </p:txBody>
-      </p:sp>
-      <p:sp>
-        <p:nvSpPr>
-          <p:cNvPr id="19" name="Shape 17"/>
-          <p:cNvSpPr/>
-          <p:nvPr/>
-        </p:nvSpPr>
-        <p:spPr>
-          <a:xfrm>
-            <a:off x="9134856" y="1965960"/>
-            <a:ext cx="2423160" cy="1691640"/>
+            <a:srgbClr val="C0741A">
+              <a:alpha val="85000"/>
+            </a:srgbClr>
+          </a:solidFill>
+          <a:ln/>
+        </p:spPr>
+        <p:txBody>
+          <a:bodyPr/>
+          <a:lstStyle/>
+          <a:p>
+            <a:endParaRPr lang="en-GB"/>
+          </a:p>
+        </p:txBody>
+      </p:sp>
+      <p:sp>
+        <p:nvSpPr>
+          <p:cNvPr id="14" name="Shape 12"/>
+          <p:cNvSpPr/>
+          <p:nvPr/>
+        </p:nvSpPr>
+        <p:spPr>
+          <a:xfrm>
+            <a:off x="694944" y="5696712"/>
+            <a:ext cx="64008" cy="310896"/>
           </a:xfrm>
           <a:prstGeom prst="roundRect">
             <a:avLst>
-              <a:gd name="adj" fmla="val 5405"/>
+              <a:gd name="adj" fmla="val 42857"/>
             </a:avLst>
           </a:prstGeom>
           <a:solidFill>
-            <a:srgbClr val="C0741A"/>
-          </a:solidFill>
-          <a:ln w="12700">
-            <a:solidFill>
-              <a:srgbClr val="C0741A"/>
-            </a:solidFill>
-            <a:prstDash val="solid"/>
-          </a:ln>
-          <a:effectLst>
-            <a:outerShdw sx="100000" sy="100000" kx="0" ky="0" algn="bl" rotWithShape="0" blurRad="101600" dist="25400" dir="5400000">
-              <a:srgbClr val="9AA4B2">
-                <a:alpha val="30000"/>
-              </a:srgbClr>
-            </a:outerShdw>
-          </a:effectLst>
-        </p:spPr>
-      </p:sp>
-      <p:sp>
-        <p:nvSpPr>
-          <p:cNvPr id="20" name="Text 18"/>
-          <p:cNvSpPr/>
-          <p:nvPr/>
-        </p:nvSpPr>
-        <p:spPr>
-          <a:xfrm>
-            <a:off x="9134856" y="2130552"/>
-            <a:ext cx="2423160" cy="365760"/>
-          </a:xfrm>
-          <a:prstGeom prst="rect">
-            <a:avLst/>
-          </a:prstGeom>
-          <a:noFill/>
-          <a:ln/>
-        </p:spPr>
-        <p:txBody>
-          <a:bodyPr wrap="square" lIns="0" tIns="0" rIns="0" bIns="0" rtlCol="0" anchor="ctr"/>
-          <a:lstStyle/>
-          <a:p>
-            <a:pPr algn="ctr" indent="0" marL="0">
-              <a:buNone/>
-            </a:pPr>
-            <a:r>
-              <a:rPr lang="en-US" sz="1500" b="1" dirty="0">
-                <a:solidFill>
-                  <a:srgbClr val="FFFFFF"/>
-                </a:solidFill>
-                <a:latin typeface="Calibri" pitchFamily="34" charset="0"/>
-                <a:ea typeface="Calibri" pitchFamily="34" charset="-122"/>
-                <a:cs typeface="Calibri" pitchFamily="34" charset="-120"/>
-              </a:rPr>
-              <a:t>GRADIO APP</a:t>
-            </a:r>
-            <a:endParaRPr lang="en-US" sz="1500" dirty="0"/>
-          </a:p>
-        </p:txBody>
-      </p:sp>
-      <p:sp>
-        <p:nvSpPr>
-          <p:cNvPr id="21" name="Text 19"/>
-          <p:cNvSpPr/>
-          <p:nvPr/>
-        </p:nvSpPr>
-        <p:spPr>
-          <a:xfrm>
-            <a:off x="9226296" y="2532888"/>
-            <a:ext cx="2240280" cy="640080"/>
-          </a:xfrm>
-          <a:prstGeom prst="rect">
-            <a:avLst/>
-          </a:prstGeom>
-          <a:noFill/>
-          <a:ln/>
-        </p:spPr>
-        <p:txBody>
-          <a:bodyPr wrap="square" lIns="0" tIns="0" rIns="0" bIns="0" rtlCol="0" anchor="ctr"/>
-          <a:lstStyle/>
-          <a:p>
-            <a:pPr algn="ctr" indent="0" marL="0">
-              <a:buNone/>
-            </a:pPr>
-            <a:r>
-              <a:rPr lang="en-US" sz="1250" dirty="0">
-                <a:solidFill>
-                  <a:srgbClr val="FFFFFF"/>
-                </a:solidFill>
-                <a:latin typeface="Calibri" pitchFamily="34" charset="0"/>
-                <a:ea typeface="Calibri" pitchFamily="34" charset="-122"/>
-                <a:cs typeface="Calibri" pitchFamily="34" charset="-120"/>
-              </a:rPr>
-              <a:t>play &amp; read</a:t>
-            </a:r>
-            <a:endParaRPr lang="en-US" sz="1250" dirty="0"/>
-          </a:p>
-          <a:p>
-            <a:pPr algn="ctr" indent="0" marL="0">
-              <a:buNone/>
-            </a:pPr>
-            <a:r>
-              <a:rPr lang="en-US" sz="1250" dirty="0">
-                <a:solidFill>
-                  <a:srgbClr val="FFFFFF"/>
-                </a:solidFill>
-                <a:latin typeface="Calibri" pitchFamily="34" charset="0"/>
-                <a:ea typeface="Calibri" pitchFamily="34" charset="-122"/>
-                <a:cs typeface="Calibri" pitchFamily="34" charset="-120"/>
-              </a:rPr>
-              <a:t>the recap</a:t>
-            </a:r>
-            <a:endParaRPr lang="en-US" sz="1250" dirty="0"/>
-          </a:p>
-        </p:txBody>
-      </p:sp>
-      <p:sp>
-        <p:nvSpPr>
-          <p:cNvPr id="22" name="Text 20"/>
-          <p:cNvSpPr/>
-          <p:nvPr/>
-        </p:nvSpPr>
-        <p:spPr>
-          <a:xfrm>
-            <a:off x="9134856" y="3264408"/>
-            <a:ext cx="2423160" cy="292608"/>
-          </a:xfrm>
-          <a:prstGeom prst="rect">
-            <a:avLst/>
-          </a:prstGeom>
-          <a:noFill/>
-          <a:ln/>
-        </p:spPr>
-        <p:txBody>
-          <a:bodyPr wrap="square" lIns="0" tIns="0" rIns="0" bIns="0" rtlCol="0" anchor="ctr"/>
-          <a:lstStyle/>
-          <a:p>
-            <a:pPr algn="ctr" indent="0" marL="0">
-              <a:buNone/>
-            </a:pPr>
-            <a:r>
-              <a:rPr lang="en-US" sz="1050" dirty="0">
-                <a:solidFill>
-                  <a:srgbClr val="F5E4D2"/>
-                </a:solidFill>
-                <a:latin typeface="Courier New" pitchFamily="34" charset="0"/>
-                <a:ea typeface="Courier New" pitchFamily="34" charset="-122"/>
-                <a:cs typeface="Courier New" pitchFamily="34" charset="-120"/>
-              </a:rPr>
-              <a:t>main.py</a:t>
-            </a:r>
-            <a:endParaRPr lang="en-US" sz="1050" dirty="0"/>
-          </a:p>
-        </p:txBody>
-      </p:sp>
-      <p:sp>
-        <p:nvSpPr>
-          <p:cNvPr id="23" name="Text 21"/>
-          <p:cNvSpPr/>
-          <p:nvPr/>
-        </p:nvSpPr>
-        <p:spPr>
-          <a:xfrm>
-            <a:off x="548640" y="4069080"/>
-            <a:ext cx="9144000" cy="365760"/>
-          </a:xfrm>
-          <a:prstGeom prst="rect">
-            <a:avLst/>
-          </a:prstGeom>
-          <a:noFill/>
-          <a:ln/>
-        </p:spPr>
-        <p:txBody>
-          <a:bodyPr wrap="square" lIns="0" tIns="0" rIns="0" bIns="0" rtlCol="0" anchor="ctr"/>
-          <a:lstStyle/>
-          <a:p>
-            <a:pPr indent="0" marL="0">
-              <a:buNone/>
-            </a:pPr>
-            <a:r>
-              <a:rPr lang="en-US" sz="1400" b="1" spc="100" kern="0" dirty="0">
-                <a:solidFill>
-                  <a:srgbClr val="1B2230"/>
-                </a:solidFill>
-                <a:latin typeface="Calibri" pitchFamily="34" charset="0"/>
-                <a:ea typeface="Calibri" pitchFamily="34" charset="-122"/>
-                <a:cs typeface="Calibri" pitchFamily="34" charset="-120"/>
-              </a:rPr>
-              <a:t>Technical choices we made</a:t>
-            </a:r>
-            <a:endParaRPr lang="en-US" sz="1400" dirty="0"/>
-          </a:p>
-        </p:txBody>
-      </p:sp>
-      <p:sp>
-        <p:nvSpPr>
-          <p:cNvPr id="24" name="Shape 22"/>
-          <p:cNvSpPr/>
-          <p:nvPr/>
-        </p:nvSpPr>
-        <p:spPr>
-          <a:xfrm>
-            <a:off x="548640" y="4480560"/>
-            <a:ext cx="3514344" cy="1463040"/>
+            <a:srgbClr val="C0741A">
+              <a:alpha val="85000"/>
+            </a:srgbClr>
+          </a:solidFill>
+          <a:ln/>
+        </p:spPr>
+        <p:txBody>
+          <a:bodyPr/>
+          <a:lstStyle/>
+          <a:p>
+            <a:endParaRPr lang="en-GB"/>
+          </a:p>
+        </p:txBody>
+      </p:sp>
+      <p:sp>
+        <p:nvSpPr>
+          <p:cNvPr id="15" name="Shape 13"/>
+          <p:cNvSpPr/>
+          <p:nvPr/>
+        </p:nvSpPr>
+        <p:spPr>
+          <a:xfrm>
+            <a:off x="841248" y="5600700"/>
+            <a:ext cx="64008" cy="502920"/>
           </a:xfrm>
           <a:prstGeom prst="roundRect">
             <a:avLst>
-              <a:gd name="adj" fmla="val 6250"/>
+              <a:gd name="adj" fmla="val 42857"/>
             </a:avLst>
           </a:prstGeom>
           <a:solidFill>
-            <a:srgbClr val="EEF0F4"/>
-          </a:solidFill>
-          <a:ln/>
-        </p:spPr>
-      </p:sp>
-      <p:sp>
-        <p:nvSpPr>
-          <p:cNvPr id="25" name="Text 23"/>
-          <p:cNvSpPr/>
-          <p:nvPr/>
-        </p:nvSpPr>
-        <p:spPr>
-          <a:xfrm>
-            <a:off x="731520" y="4617720"/>
-            <a:ext cx="3148584" cy="365760"/>
-          </a:xfrm>
-          <a:prstGeom prst="rect">
-            <a:avLst/>
-          </a:prstGeom>
-          <a:noFill/>
-          <a:ln/>
-        </p:spPr>
-        <p:txBody>
-          <a:bodyPr wrap="square" lIns="0" tIns="0" rIns="0" bIns="0" rtlCol="0" anchor="ctr"/>
-          <a:lstStyle/>
-          <a:p>
-            <a:pPr indent="0" marL="0">
-              <a:buNone/>
-            </a:pPr>
-            <a:r>
-              <a:rPr lang="en-US" sz="1500" b="1" dirty="0">
-                <a:solidFill>
-                  <a:srgbClr val="90540F"/>
-                </a:solidFill>
-                <a:latin typeface="Calibri" pitchFamily="34" charset="0"/>
-                <a:ea typeface="Calibri" pitchFamily="34" charset="-122"/>
-                <a:cs typeface="Calibri" pitchFamily="34" charset="-120"/>
-              </a:rPr>
-              <a:t>Structured outputs</a:t>
-            </a:r>
-            <a:endParaRPr lang="en-US" sz="1500" dirty="0"/>
-          </a:p>
-        </p:txBody>
-      </p:sp>
-      <p:sp>
-        <p:nvSpPr>
-          <p:cNvPr id="26" name="Text 24"/>
-          <p:cNvSpPr/>
-          <p:nvPr/>
-        </p:nvSpPr>
-        <p:spPr>
-          <a:xfrm>
-            <a:off x="731520" y="5029200"/>
-            <a:ext cx="3148584" cy="822960"/>
-          </a:xfrm>
-          <a:prstGeom prst="rect">
-            <a:avLst/>
-          </a:prstGeom>
-          <a:noFill/>
-          <a:ln/>
-        </p:spPr>
-        <p:txBody>
-          <a:bodyPr wrap="square" lIns="0" tIns="0" rIns="0" bIns="0" rtlCol="0" anchor="t"/>
-          <a:lstStyle/>
-          <a:p>
-            <a:pPr indent="0" marL="0">
-              <a:buNone/>
-            </a:pPr>
-            <a:r>
-              <a:rPr lang="en-US" sz="1300" dirty="0">
-                <a:solidFill>
-                  <a:srgbClr val="5A6473"/>
-                </a:solidFill>
-                <a:latin typeface="Calibri" pitchFamily="34" charset="0"/>
-                <a:ea typeface="Calibri" pitchFamily="34" charset="-122"/>
-                <a:cs typeface="Calibri" pitchFamily="34" charset="-120"/>
-              </a:rPr>
-              <a:t>a Pydantic schema keeps the reply reliable — no broken formatting</a:t>
-            </a:r>
-            <a:endParaRPr lang="en-US" sz="1300" dirty="0"/>
-          </a:p>
-        </p:txBody>
-      </p:sp>
-      <p:sp>
-        <p:nvSpPr>
-          <p:cNvPr id="27" name="Shape 25"/>
-          <p:cNvSpPr/>
-          <p:nvPr/>
-        </p:nvSpPr>
-        <p:spPr>
-          <a:xfrm>
-            <a:off x="4337304" y="4480560"/>
-            <a:ext cx="3514344" cy="1463040"/>
+            <a:srgbClr val="C0741A">
+              <a:alpha val="85000"/>
+            </a:srgbClr>
+          </a:solidFill>
+          <a:ln/>
+        </p:spPr>
+        <p:txBody>
+          <a:bodyPr/>
+          <a:lstStyle/>
+          <a:p>
+            <a:endParaRPr lang="en-GB"/>
+          </a:p>
+        </p:txBody>
+      </p:sp>
+      <p:sp>
+        <p:nvSpPr>
+          <p:cNvPr id="16" name="Shape 14"/>
+          <p:cNvSpPr/>
+          <p:nvPr/>
+        </p:nvSpPr>
+        <p:spPr>
+          <a:xfrm>
+            <a:off x="987552" y="5724144"/>
+            <a:ext cx="64008" cy="256032"/>
           </a:xfrm>
           <a:prstGeom prst="roundRect">
             <a:avLst>
-              <a:gd name="adj" fmla="val 6250"/>
+              <a:gd name="adj" fmla="val 42857"/>
             </a:avLst>
           </a:prstGeom>
           <a:solidFill>
-            <a:srgbClr val="EEF0F4"/>
-          </a:solidFill>
-          <a:ln/>
-        </p:spPr>
-      </p:sp>
-      <p:sp>
-        <p:nvSpPr>
-          <p:cNvPr id="28" name="Text 26"/>
-          <p:cNvSpPr/>
-          <p:nvPr/>
-        </p:nvSpPr>
-        <p:spPr>
-          <a:xfrm>
-            <a:off x="4520184" y="4617720"/>
-            <a:ext cx="3148584" cy="365760"/>
-          </a:xfrm>
-          <a:prstGeom prst="rect">
-            <a:avLst/>
-          </a:prstGeom>
-          <a:noFill/>
-          <a:ln/>
-        </p:spPr>
-        <p:txBody>
-          <a:bodyPr wrap="square" lIns="0" tIns="0" rIns="0" bIns="0" rtlCol="0" anchor="ctr"/>
-          <a:lstStyle/>
-          <a:p>
-            <a:pPr indent="0" marL="0">
-              <a:buNone/>
-            </a:pPr>
-            <a:r>
-              <a:rPr lang="en-US" sz="1500" b="1" dirty="0">
-                <a:solidFill>
-                  <a:srgbClr val="90540F"/>
-                </a:solidFill>
-                <a:latin typeface="Calibri" pitchFamily="34" charset="0"/>
-                <a:ea typeface="Calibri" pitchFamily="34" charset="-122"/>
-                <a:cs typeface="Calibri" pitchFamily="34" charset="-120"/>
-              </a:rPr>
-              <a:t>Deliberate models</a:t>
-            </a:r>
-            <a:endParaRPr lang="en-US" sz="1500" dirty="0"/>
-          </a:p>
-        </p:txBody>
-      </p:sp>
-      <p:sp>
-        <p:nvSpPr>
-          <p:cNvPr id="29" name="Text 27"/>
-          <p:cNvSpPr/>
-          <p:nvPr/>
-        </p:nvSpPr>
-        <p:spPr>
-          <a:xfrm>
-            <a:off x="4520184" y="5029200"/>
-            <a:ext cx="3148584" cy="822960"/>
-          </a:xfrm>
-          <a:prstGeom prst="rect">
-            <a:avLst/>
-          </a:prstGeom>
-          <a:noFill/>
-          <a:ln/>
-        </p:spPr>
-        <p:txBody>
-          <a:bodyPr wrap="square" lIns="0" tIns="0" rIns="0" bIns="0" rtlCol="0" anchor="t"/>
-          <a:lstStyle/>
-          <a:p>
-            <a:pPr indent="0" marL="0">
-              <a:buNone/>
-            </a:pPr>
-            <a:r>
-              <a:rPr lang="en-US" sz="1300" dirty="0">
-                <a:solidFill>
-                  <a:srgbClr val="5A6473"/>
-                </a:solidFill>
-                <a:latin typeface="Calibri" pitchFamily="34" charset="0"/>
-                <a:ea typeface="Calibri" pitchFamily="34" charset="-122"/>
-                <a:cs typeface="Calibri" pitchFamily="34" charset="-120"/>
-              </a:rPr>
-              <a:t>gpt-4o-mini + tts-1  →  about 1 cent per recap</a:t>
-            </a:r>
-            <a:endParaRPr lang="en-US" sz="1300" dirty="0"/>
-          </a:p>
-        </p:txBody>
-      </p:sp>
-      <p:sp>
-        <p:nvSpPr>
-          <p:cNvPr id="30" name="Shape 28"/>
-          <p:cNvSpPr/>
-          <p:nvPr/>
-        </p:nvSpPr>
-        <p:spPr>
-          <a:xfrm>
-            <a:off x="8125968" y="4480560"/>
-            <a:ext cx="3514344" cy="1463040"/>
+            <a:srgbClr val="C0741A">
+              <a:alpha val="85000"/>
+            </a:srgbClr>
+          </a:solidFill>
+          <a:ln/>
+        </p:spPr>
+        <p:txBody>
+          <a:bodyPr/>
+          <a:lstStyle/>
+          <a:p>
+            <a:endParaRPr lang="en-GB"/>
+          </a:p>
+        </p:txBody>
+      </p:sp>
+      <p:sp>
+        <p:nvSpPr>
+          <p:cNvPr id="17" name="Shape 15"/>
+          <p:cNvSpPr/>
+          <p:nvPr/>
+        </p:nvSpPr>
+        <p:spPr>
+          <a:xfrm>
+            <a:off x="1133856" y="5532120"/>
+            <a:ext cx="64008" cy="640080"/>
           </a:xfrm>
           <a:prstGeom prst="roundRect">
             <a:avLst>
-              <a:gd name="adj" fmla="val 6250"/>
+              <a:gd name="adj" fmla="val 42857"/>
             </a:avLst>
           </a:prstGeom>
           <a:solidFill>
-            <a:srgbClr val="EEF0F4"/>
-          </a:solidFill>
-          <a:ln/>
-        </p:spPr>
-      </p:sp>
-      <p:sp>
-        <p:nvSpPr>
-          <p:cNvPr id="31" name="Text 29"/>
-          <p:cNvSpPr/>
-          <p:nvPr/>
-        </p:nvSpPr>
-        <p:spPr>
-          <a:xfrm>
-            <a:off x="8308848" y="4617720"/>
-            <a:ext cx="3148584" cy="365760"/>
-          </a:xfrm>
-          <a:prstGeom prst="rect">
-            <a:avLst/>
-          </a:prstGeom>
-          <a:noFill/>
-          <a:ln/>
-        </p:spPr>
-        <p:txBody>
-          <a:bodyPr wrap="square" lIns="0" tIns="0" rIns="0" bIns="0" rtlCol="0" anchor="ctr"/>
-          <a:lstStyle/>
-          <a:p>
-            <a:pPr indent="0" marL="0">
-              <a:buNone/>
-            </a:pPr>
-            <a:r>
-              <a:rPr lang="en-US" sz="1500" b="1" dirty="0">
-                <a:solidFill>
-                  <a:srgbClr val="90540F"/>
-                </a:solidFill>
-                <a:latin typeface="Calibri" pitchFamily="34" charset="0"/>
-                <a:ea typeface="Calibri" pitchFamily="34" charset="-122"/>
-                <a:cs typeface="Calibri" pitchFamily="34" charset="-120"/>
-              </a:rPr>
-              <a:t>Clean data structures</a:t>
-            </a:r>
-            <a:endParaRPr lang="en-US" sz="1500" dirty="0"/>
-          </a:p>
-        </p:txBody>
-      </p:sp>
-      <p:sp>
-        <p:nvSpPr>
-          <p:cNvPr id="32" name="Text 30"/>
-          <p:cNvSpPr/>
-          <p:nvPr/>
-        </p:nvSpPr>
-        <p:spPr>
-          <a:xfrm>
-            <a:off x="8308848" y="5029200"/>
-            <a:ext cx="3148584" cy="822960"/>
-          </a:xfrm>
-          <a:prstGeom prst="rect">
-            <a:avLst/>
-          </a:prstGeom>
-          <a:noFill/>
-          <a:ln/>
-        </p:spPr>
-        <p:txBody>
-          <a:bodyPr wrap="square" lIns="0" tIns="0" rIns="0" bIns="0" rtlCol="0" anchor="t"/>
-          <a:lstStyle/>
-          <a:p>
-            <a:pPr indent="0" marL="0">
-              <a:buNone/>
-            </a:pPr>
-            <a:r>
-              <a:rPr lang="en-US" sz="1300" dirty="0">
-                <a:solidFill>
-                  <a:srgbClr val="5A6473"/>
-                </a:solidFill>
-                <a:latin typeface="Calibri" pitchFamily="34" charset="0"/>
-                <a:ea typeface="Calibri" pitchFamily="34" charset="-122"/>
-                <a:cs typeface="Calibri" pitchFamily="34" charset="-120"/>
-              </a:rPr>
-              <a:t>a dataclass + Pydantic model flow between modules</a:t>
-            </a:r>
-            <a:endParaRPr lang="en-US" sz="1300" dirty="0"/>
+            <a:srgbClr val="C0741A">
+              <a:alpha val="85000"/>
+            </a:srgbClr>
+          </a:solidFill>
+          <a:ln/>
+        </p:spPr>
+        <p:txBody>
+          <a:bodyPr/>
+          <a:lstStyle/>
+          <a:p>
+            <a:endParaRPr lang="en-GB"/>
+          </a:p>
+        </p:txBody>
+      </p:sp>
+      <p:sp>
+        <p:nvSpPr>
+          <p:cNvPr id="18" name="Shape 16"/>
+          <p:cNvSpPr/>
+          <p:nvPr/>
+        </p:nvSpPr>
+        <p:spPr>
+          <a:xfrm>
+            <a:off x="1280160" y="5660136"/>
+            <a:ext cx="64008" cy="384048"/>
+          </a:xfrm>
+          <a:prstGeom prst="roundRect">
+            <a:avLst>
+              <a:gd name="adj" fmla="val 42857"/>
+            </a:avLst>
+          </a:prstGeom>
+          <a:solidFill>
+            <a:srgbClr val="C0741A">
+              <a:alpha val="85000"/>
+            </a:srgbClr>
+          </a:solidFill>
+          <a:ln/>
+        </p:spPr>
+        <p:txBody>
+          <a:bodyPr/>
+          <a:lstStyle/>
+          <a:p>
+            <a:endParaRPr lang="en-GB"/>
+          </a:p>
+        </p:txBody>
+      </p:sp>
+      <p:sp>
+        <p:nvSpPr>
+          <p:cNvPr id="19" name="Shape 17"/>
+          <p:cNvSpPr/>
+          <p:nvPr/>
+        </p:nvSpPr>
+        <p:spPr>
+          <a:xfrm>
+            <a:off x="1426464" y="5577840"/>
+            <a:ext cx="64008" cy="548640"/>
+          </a:xfrm>
+          <a:prstGeom prst="roundRect">
+            <a:avLst>
+              <a:gd name="adj" fmla="val 42857"/>
+            </a:avLst>
+          </a:prstGeom>
+          <a:solidFill>
+            <a:srgbClr val="C0741A">
+              <a:alpha val="85000"/>
+            </a:srgbClr>
+          </a:solidFill>
+          <a:ln/>
+        </p:spPr>
+        <p:txBody>
+          <a:bodyPr/>
+          <a:lstStyle/>
+          <a:p>
+            <a:endParaRPr lang="en-GB"/>
+          </a:p>
+        </p:txBody>
+      </p:sp>
+      <p:sp>
+        <p:nvSpPr>
+          <p:cNvPr id="20" name="Shape 18"/>
+          <p:cNvSpPr/>
+          <p:nvPr/>
+        </p:nvSpPr>
+        <p:spPr>
+          <a:xfrm>
+            <a:off x="1572768" y="5742432"/>
+            <a:ext cx="64008" cy="219456"/>
+          </a:xfrm>
+          <a:prstGeom prst="roundRect">
+            <a:avLst>
+              <a:gd name="adj" fmla="val 42857"/>
+            </a:avLst>
+          </a:prstGeom>
+          <a:solidFill>
+            <a:srgbClr val="C0741A">
+              <a:alpha val="85000"/>
+            </a:srgbClr>
+          </a:solidFill>
+          <a:ln/>
+        </p:spPr>
+        <p:txBody>
+          <a:bodyPr/>
+          <a:lstStyle/>
+          <a:p>
+            <a:endParaRPr lang="en-GB"/>
+          </a:p>
+        </p:txBody>
+      </p:sp>
+      <p:sp>
+        <p:nvSpPr>
+          <p:cNvPr id="21" name="Shape 19"/>
+          <p:cNvSpPr/>
+          <p:nvPr/>
+        </p:nvSpPr>
+        <p:spPr>
+          <a:xfrm>
+            <a:off x="1719072" y="5641848"/>
+            <a:ext cx="64008" cy="420624"/>
+          </a:xfrm>
+          <a:prstGeom prst="roundRect">
+            <a:avLst>
+              <a:gd name="adj" fmla="val 42857"/>
+            </a:avLst>
+          </a:prstGeom>
+          <a:solidFill>
+            <a:srgbClr val="C0741A">
+              <a:alpha val="85000"/>
+            </a:srgbClr>
+          </a:solidFill>
+          <a:ln/>
+        </p:spPr>
+        <p:txBody>
+          <a:bodyPr/>
+          <a:lstStyle/>
+          <a:p>
+            <a:endParaRPr lang="en-GB"/>
+          </a:p>
+        </p:txBody>
+      </p:sp>
+      <p:sp>
+        <p:nvSpPr>
+          <p:cNvPr id="22" name="Shape 20"/>
+          <p:cNvSpPr/>
+          <p:nvPr/>
+        </p:nvSpPr>
+        <p:spPr>
+          <a:xfrm>
+            <a:off x="1865376" y="5705856"/>
+            <a:ext cx="64008" cy="292608"/>
+          </a:xfrm>
+          <a:prstGeom prst="roundRect">
+            <a:avLst>
+              <a:gd name="adj" fmla="val 42857"/>
+            </a:avLst>
+          </a:prstGeom>
+          <a:solidFill>
+            <a:srgbClr val="C0741A">
+              <a:alpha val="85000"/>
+            </a:srgbClr>
+          </a:solidFill>
+          <a:ln/>
+        </p:spPr>
+        <p:txBody>
+          <a:bodyPr/>
+          <a:lstStyle/>
+          <a:p>
+            <a:endParaRPr lang="en-GB"/>
           </a:p>
         </p:txBody>
       </p:sp>
@@ -3553,12 +3470,13 @@
 
 <file path=ppt/slides/slide4.xml><?xml version="1.0" encoding="utf-8"?>
 <p:sld xmlns:a="http://schemas.openxmlformats.org/drawingml/2006/main" xmlns:r="http://schemas.openxmlformats.org/officeDocument/2006/relationships" xmlns:p="http://schemas.openxmlformats.org/presentationml/2006/main">
-  <p:cSld name="Slide 4">
+  <p:cSld name="Slide 3">
     <p:bg>
       <p:bgPr>
         <a:solidFill>
-          <a:srgbClr val="1B2230"/>
+          <a:srgbClr val="F7F8FA"/>
         </a:solidFill>
+        <a:effectLst/>
       </p:bgPr>
     </p:bg>
     <p:spTree>
@@ -3583,8 +3501,8 @@
         </p:nvSpPr>
         <p:spPr>
           <a:xfrm>
-            <a:off x="548640" y="1463040"/>
-            <a:ext cx="10972800" cy="1097280"/>
+            <a:off x="548640" y="502920"/>
+            <a:ext cx="8229600" cy="731520"/>
           </a:xfrm>
           <a:prstGeom prst="rect">
             <a:avLst/>
@@ -3596,54 +3514,34 @@
           <a:bodyPr wrap="square" lIns="0" tIns="0" rIns="0" bIns="0" rtlCol="0" anchor="ctr"/>
           <a:lstStyle/>
           <a:p>
-            <a:pPr indent="0" marL="0">
+            <a:pPr marL="0" indent="0">
               <a:buNone/>
             </a:pPr>
             <a:r>
-              <a:rPr lang="en-US" sz="6000" b="1" dirty="0">
-                <a:solidFill>
-                  <a:srgbClr val="C0741A"/>
+              <a:rPr lang="en-US" sz="3800" b="1" dirty="0">
+                <a:solidFill>
+                  <a:srgbClr val="1B2230"/>
                 </a:solidFill>
                 <a:latin typeface="Cambria" pitchFamily="34" charset="0"/>
                 <a:ea typeface="Cambria" pitchFamily="34" charset="-122"/>
                 <a:cs typeface="Cambria" pitchFamily="34" charset="-120"/>
               </a:rPr>
-              <a:t>LIVE DEMO</a:t>
-            </a:r>
-            <a:endParaRPr lang="en-US" sz="6000" dirty="0"/>
-          </a:p>
-        </p:txBody>
-      </p:sp>
-      <p:sp>
-        <p:nvSpPr>
-          <p:cNvPr id="3" name="Shape 1"/>
-          <p:cNvSpPr/>
-          <p:nvPr/>
-        </p:nvSpPr>
-        <p:spPr>
-          <a:xfrm>
-            <a:off x="548640" y="3200400"/>
-            <a:ext cx="548640" cy="548640"/>
-          </a:xfrm>
-          <a:prstGeom prst="ellipse">
-            <a:avLst/>
-          </a:prstGeom>
-          <a:solidFill>
-            <a:srgbClr val="C0741A"/>
-          </a:solidFill>
-          <a:ln/>
-        </p:spPr>
-      </p:sp>
-      <p:sp>
-        <p:nvSpPr>
-          <p:cNvPr id="4" name="Text 2"/>
-          <p:cNvSpPr/>
-          <p:nvPr/>
-        </p:nvSpPr>
-        <p:spPr>
-          <a:xfrm>
-            <a:off x="548640" y="3200400"/>
-            <a:ext cx="548640" cy="548640"/>
+              <a:t>How it works</a:t>
+            </a:r>
+            <a:endParaRPr lang="en-US" sz="3800" dirty="0"/>
+          </a:p>
+        </p:txBody>
+      </p:sp>
+      <p:sp>
+        <p:nvSpPr>
+          <p:cNvPr id="3" name="Text 1"/>
+          <p:cNvSpPr/>
+          <p:nvPr/>
+        </p:nvSpPr>
+        <p:spPr>
+          <a:xfrm>
+            <a:off x="548640" y="1234440"/>
+            <a:ext cx="9144000" cy="365760"/>
           </a:xfrm>
           <a:prstGeom prst="rect">
             <a:avLst/>
@@ -3655,21 +3553,62 @@
           <a:bodyPr wrap="square" lIns="0" tIns="0" rIns="0" bIns="0" rtlCol="0" anchor="ctr"/>
           <a:lstStyle/>
           <a:p>
-            <a:pPr algn="ctr" indent="0" marL="0">
+            <a:pPr marL="0" indent="0">
               <a:buNone/>
             </a:pPr>
             <a:r>
-              <a:rPr lang="en-US" sz="2200" b="1" dirty="0">
-                <a:solidFill>
-                  <a:srgbClr val="FFFFFF"/>
+              <a:rPr lang="en-US" sz="1600" dirty="0">
+                <a:solidFill>
+                  <a:srgbClr val="5A6473"/>
                 </a:solidFill>
                 <a:latin typeface="Calibri" pitchFamily="34" charset="0"/>
                 <a:ea typeface="Calibri" pitchFamily="34" charset="-122"/>
                 <a:cs typeface="Calibri" pitchFamily="34" charset="-120"/>
               </a:rPr>
-              <a:t>1</a:t>
-            </a:r>
-            <a:endParaRPr lang="en-US" sz="2200" dirty="0"/>
+              <a:t>One clean pipeline, four swappable modules.</a:t>
+            </a:r>
+            <a:endParaRPr lang="en-US" sz="1600" dirty="0"/>
+          </a:p>
+        </p:txBody>
+      </p:sp>
+      <p:sp>
+        <p:nvSpPr>
+          <p:cNvPr id="4" name="Shape 2"/>
+          <p:cNvSpPr/>
+          <p:nvPr/>
+        </p:nvSpPr>
+        <p:spPr>
+          <a:xfrm>
+            <a:off x="630936" y="1965960"/>
+            <a:ext cx="2423160" cy="1691640"/>
+          </a:xfrm>
+          <a:prstGeom prst="roundRect">
+            <a:avLst>
+              <a:gd name="adj" fmla="val 5405"/>
+            </a:avLst>
+          </a:prstGeom>
+          <a:solidFill>
+            <a:srgbClr val="FFFFFF"/>
+          </a:solidFill>
+          <a:ln w="12700">
+            <a:solidFill>
+              <a:srgbClr val="EEF0F4"/>
+            </a:solidFill>
+            <a:prstDash val="solid"/>
+          </a:ln>
+          <a:effectLst>
+            <a:outerShdw blurRad="101600" dist="25400" dir="5400000" algn="bl" rotWithShape="0">
+              <a:srgbClr val="9AA4B2">
+                <a:alpha val="30000"/>
+              </a:srgbClr>
+            </a:outerShdw>
+          </a:effectLst>
+        </p:spPr>
+        <p:txBody>
+          <a:bodyPr/>
+          <a:lstStyle/>
+          <a:p>
+            <a:endParaRPr lang="en-GB"/>
           </a:p>
         </p:txBody>
       </p:sp>
@@ -3681,8 +3620,8 @@
         </p:nvSpPr>
         <p:spPr>
           <a:xfrm>
-            <a:off x="1234440" y="3200400"/>
-            <a:ext cx="2743200" cy="548640"/>
+            <a:off x="630936" y="2130552"/>
+            <a:ext cx="2423160" cy="365760"/>
           </a:xfrm>
           <a:prstGeom prst="rect">
             <a:avLst/>
@@ -3694,54 +3633,34 @@
           <a:bodyPr wrap="square" lIns="0" tIns="0" rIns="0" bIns="0" rtlCol="0" anchor="ctr"/>
           <a:lstStyle/>
           <a:p>
-            <a:pPr indent="0" marL="0">
+            <a:pPr marL="0" indent="0" algn="ctr">
               <a:buNone/>
             </a:pPr>
             <a:r>
-              <a:rPr lang="en-US" sz="1800" dirty="0">
-                <a:solidFill>
-                  <a:srgbClr val="FFFFFF"/>
+              <a:rPr lang="en-US" sz="1500" b="1" dirty="0">
+                <a:solidFill>
+                  <a:srgbClr val="90540F"/>
                 </a:solidFill>
                 <a:latin typeface="Calibri" pitchFamily="34" charset="0"/>
                 <a:ea typeface="Calibri" pitchFamily="34" charset="-122"/>
                 <a:cs typeface="Calibri" pitchFamily="34" charset="-120"/>
               </a:rPr>
-              <a:t>Pick a saved lesson</a:t>
-            </a:r>
-            <a:endParaRPr lang="en-US" sz="1800" dirty="0"/>
-          </a:p>
-        </p:txBody>
-      </p:sp>
-      <p:sp>
-        <p:nvSpPr>
-          <p:cNvPr id="6" name="Shape 4"/>
-          <p:cNvSpPr/>
-          <p:nvPr/>
-        </p:nvSpPr>
-        <p:spPr>
-          <a:xfrm>
-            <a:off x="4206240" y="3200400"/>
-            <a:ext cx="548640" cy="548640"/>
-          </a:xfrm>
-          <a:prstGeom prst="ellipse">
-            <a:avLst/>
-          </a:prstGeom>
-          <a:solidFill>
-            <a:srgbClr val="C0741A"/>
-          </a:solidFill>
-          <a:ln/>
-        </p:spPr>
-      </p:sp>
-      <p:sp>
-        <p:nvSpPr>
-          <p:cNvPr id="7" name="Text 5"/>
-          <p:cNvSpPr/>
-          <p:nvPr/>
-        </p:nvSpPr>
-        <p:spPr>
-          <a:xfrm>
-            <a:off x="4206240" y="3200400"/>
-            <a:ext cx="548640" cy="548640"/>
+              <a:t>INPUT</a:t>
+            </a:r>
+            <a:endParaRPr lang="en-US" sz="1500" dirty="0"/>
+          </a:p>
+        </p:txBody>
+      </p:sp>
+      <p:sp>
+        <p:nvSpPr>
+          <p:cNvPr id="6" name="Text 4"/>
+          <p:cNvSpPr/>
+          <p:nvPr/>
+        </p:nvSpPr>
+        <p:spPr>
+          <a:xfrm>
+            <a:off x="722376" y="2532888"/>
+            <a:ext cx="2240280" cy="640080"/>
           </a:xfrm>
           <a:prstGeom prst="rect">
             <a:avLst/>
@@ -3753,93 +3672,51 @@
           <a:bodyPr wrap="square" lIns="0" tIns="0" rIns="0" bIns="0" rtlCol="0" anchor="ctr"/>
           <a:lstStyle/>
           <a:p>
-            <a:pPr algn="ctr" indent="0" marL="0">
+            <a:pPr marL="0" indent="0" algn="ctr">
               <a:buNone/>
             </a:pPr>
             <a:r>
-              <a:rPr lang="en-US" sz="2200" b="1" dirty="0">
-                <a:solidFill>
-                  <a:srgbClr val="FFFFFF"/>
+              <a:rPr lang="en-US" sz="1250" dirty="0">
+                <a:solidFill>
+                  <a:srgbClr val="5A6473"/>
                 </a:solidFill>
                 <a:latin typeface="Calibri" pitchFamily="34" charset="0"/>
                 <a:ea typeface="Calibri" pitchFamily="34" charset="-122"/>
                 <a:cs typeface="Calibri" pitchFamily="34" charset="-120"/>
               </a:rPr>
-              <a:t>2</a:t>
-            </a:r>
-            <a:endParaRPr lang="en-US" sz="2200" dirty="0"/>
-          </a:p>
-        </p:txBody>
-      </p:sp>
-      <p:sp>
-        <p:nvSpPr>
-          <p:cNvPr id="8" name="Text 6"/>
-          <p:cNvSpPr/>
-          <p:nvPr/>
-        </p:nvSpPr>
-        <p:spPr>
-          <a:xfrm>
-            <a:off x="4892040" y="3200400"/>
-            <a:ext cx="2743200" cy="548640"/>
-          </a:xfrm>
-          <a:prstGeom prst="rect">
-            <a:avLst/>
-          </a:prstGeom>
-          <a:noFill/>
-          <a:ln/>
-        </p:spPr>
-        <p:txBody>
-          <a:bodyPr wrap="square" lIns="0" tIns="0" rIns="0" bIns="0" rtlCol="0" anchor="ctr"/>
-          <a:lstStyle/>
-          <a:p>
-            <a:pPr indent="0" marL="0">
+              <a:t>saved lesson,</a:t>
+            </a:r>
+            <a:endParaRPr lang="en-US" sz="1250" dirty="0"/>
+          </a:p>
+          <a:p>
+            <a:pPr marL="0" indent="0" algn="ctr">
               <a:buNone/>
             </a:pPr>
             <a:r>
-              <a:rPr lang="en-US" sz="1800" dirty="0">
-                <a:solidFill>
-                  <a:srgbClr val="FFFFFF"/>
+              <a:rPr lang="en-US" sz="1250" dirty="0">
+                <a:solidFill>
+                  <a:srgbClr val="5A6473"/>
                 </a:solidFill>
                 <a:latin typeface="Calibri" pitchFamily="34" charset="0"/>
                 <a:ea typeface="Calibri" pitchFamily="34" charset="-122"/>
                 <a:cs typeface="Calibri" pitchFamily="34" charset="-120"/>
               </a:rPr>
-              <a:t>Hit Generate</a:t>
-            </a:r>
-            <a:endParaRPr lang="en-US" sz="1800" dirty="0"/>
-          </a:p>
-        </p:txBody>
-      </p:sp>
-      <p:sp>
-        <p:nvSpPr>
-          <p:cNvPr id="9" name="Shape 7"/>
-          <p:cNvSpPr/>
-          <p:nvPr/>
-        </p:nvSpPr>
-        <p:spPr>
-          <a:xfrm>
-            <a:off x="7863840" y="3200400"/>
-            <a:ext cx="548640" cy="548640"/>
-          </a:xfrm>
-          <a:prstGeom prst="ellipse">
-            <a:avLst/>
-          </a:prstGeom>
-          <a:solidFill>
-            <a:srgbClr val="C0741A"/>
-          </a:solidFill>
-          <a:ln/>
-        </p:spPr>
-      </p:sp>
-      <p:sp>
-        <p:nvSpPr>
-          <p:cNvPr id="10" name="Text 8"/>
-          <p:cNvSpPr/>
-          <p:nvPr/>
-        </p:nvSpPr>
-        <p:spPr>
-          <a:xfrm>
-            <a:off x="7863840" y="3200400"/>
-            <a:ext cx="548640" cy="548640"/>
+              <a:t>URL, or paste</a:t>
+            </a:r>
+            <a:endParaRPr lang="en-US" sz="1250" dirty="0"/>
+          </a:p>
+        </p:txBody>
+      </p:sp>
+      <p:sp>
+        <p:nvSpPr>
+          <p:cNvPr id="7" name="Text 5"/>
+          <p:cNvSpPr/>
+          <p:nvPr/>
+        </p:nvSpPr>
+        <p:spPr>
+          <a:xfrm>
+            <a:off x="630936" y="3264408"/>
+            <a:ext cx="2423160" cy="292608"/>
           </a:xfrm>
           <a:prstGeom prst="rect">
             <a:avLst/>
@@ -3851,34 +3728,114 @@
           <a:bodyPr wrap="square" lIns="0" tIns="0" rIns="0" bIns="0" rtlCol="0" anchor="ctr"/>
           <a:lstStyle/>
           <a:p>
-            <a:pPr algn="ctr" indent="0" marL="0">
+            <a:pPr marL="0" indent="0" algn="ctr">
               <a:buNone/>
             </a:pPr>
             <a:r>
-              <a:rPr lang="en-US" sz="2200" b="1" dirty="0">
-                <a:solidFill>
-                  <a:srgbClr val="FFFFFF"/>
+              <a:rPr lang="en-US" sz="1050" dirty="0">
+                <a:solidFill>
+                  <a:srgbClr val="8A93A1"/>
+                </a:solidFill>
+                <a:latin typeface="Courier New" pitchFamily="34" charset="0"/>
+                <a:ea typeface="Courier New" pitchFamily="34" charset="-122"/>
+                <a:cs typeface="Courier New" pitchFamily="34" charset="-120"/>
+              </a:rPr>
+              <a:t>data_processor</a:t>
+            </a:r>
+            <a:endParaRPr lang="en-US" sz="1050" dirty="0"/>
+          </a:p>
+        </p:txBody>
+      </p:sp>
+      <p:sp>
+        <p:nvSpPr>
+          <p:cNvPr id="8" name="Text 6"/>
+          <p:cNvSpPr/>
+          <p:nvPr/>
+        </p:nvSpPr>
+        <p:spPr>
+          <a:xfrm>
+            <a:off x="3035808" y="2583180"/>
+            <a:ext cx="448056" cy="457200"/>
+          </a:xfrm>
+          <a:prstGeom prst="rect">
+            <a:avLst/>
+          </a:prstGeom>
+          <a:noFill/>
+          <a:ln/>
+        </p:spPr>
+        <p:txBody>
+          <a:bodyPr wrap="square" lIns="0" tIns="0" rIns="0" bIns="0" rtlCol="0" anchor="ctr"/>
+          <a:lstStyle/>
+          <a:p>
+            <a:pPr marL="0" indent="0" algn="ctr">
+              <a:buNone/>
+            </a:pPr>
+            <a:r>
+              <a:rPr lang="en-US" sz="1600" b="1" dirty="0">
+                <a:solidFill>
+                  <a:srgbClr val="C0741A"/>
                 </a:solidFill>
                 <a:latin typeface="Calibri" pitchFamily="34" charset="0"/>
                 <a:ea typeface="Calibri" pitchFamily="34" charset="-122"/>
                 <a:cs typeface="Calibri" pitchFamily="34" charset="-120"/>
               </a:rPr>
-              <a:t>3</a:t>
-            </a:r>
-            <a:endParaRPr lang="en-US" sz="2200" dirty="0"/>
-          </a:p>
-        </p:txBody>
-      </p:sp>
-      <p:sp>
-        <p:nvSpPr>
-          <p:cNvPr id="11" name="Text 9"/>
-          <p:cNvSpPr/>
-          <p:nvPr/>
-        </p:nvSpPr>
-        <p:spPr>
-          <a:xfrm>
-            <a:off x="8549640" y="3200400"/>
-            <a:ext cx="2743200" cy="548640"/>
+              <a:t>▶</a:t>
+            </a:r>
+            <a:endParaRPr lang="en-US" sz="1600" dirty="0"/>
+          </a:p>
+        </p:txBody>
+      </p:sp>
+      <p:sp>
+        <p:nvSpPr>
+          <p:cNvPr id="9" name="Shape 7"/>
+          <p:cNvSpPr/>
+          <p:nvPr/>
+        </p:nvSpPr>
+        <p:spPr>
+          <a:xfrm>
+            <a:off x="3465576" y="1965960"/>
+            <a:ext cx="2423160" cy="1691640"/>
+          </a:xfrm>
+          <a:prstGeom prst="roundRect">
+            <a:avLst>
+              <a:gd name="adj" fmla="val 5405"/>
+            </a:avLst>
+          </a:prstGeom>
+          <a:solidFill>
+            <a:srgbClr val="FFFFFF"/>
+          </a:solidFill>
+          <a:ln w="12700">
+            <a:solidFill>
+              <a:srgbClr val="EEF0F4"/>
+            </a:solidFill>
+            <a:prstDash val="solid"/>
+          </a:ln>
+          <a:effectLst>
+            <a:outerShdw blurRad="101600" dist="25400" dir="5400000" algn="bl" rotWithShape="0">
+              <a:srgbClr val="9AA4B2">
+                <a:alpha val="30000"/>
+              </a:srgbClr>
+            </a:outerShdw>
+          </a:effectLst>
+        </p:spPr>
+        <p:txBody>
+          <a:bodyPr/>
+          <a:lstStyle/>
+          <a:p>
+            <a:endParaRPr lang="en-GB"/>
+          </a:p>
+        </p:txBody>
+      </p:sp>
+      <p:sp>
+        <p:nvSpPr>
+          <p:cNvPr id="10" name="Text 8"/>
+          <p:cNvSpPr/>
+          <p:nvPr/>
+        </p:nvSpPr>
+        <p:spPr>
+          <a:xfrm>
+            <a:off x="3465576" y="2130552"/>
+            <a:ext cx="2423160" cy="365760"/>
           </a:xfrm>
           <a:prstGeom prst="rect">
             <a:avLst/>
@@ -3890,34 +3847,34 @@
           <a:bodyPr wrap="square" lIns="0" tIns="0" rIns="0" bIns="0" rtlCol="0" anchor="ctr"/>
           <a:lstStyle/>
           <a:p>
-            <a:pPr indent="0" marL="0">
+            <a:pPr marL="0" indent="0" algn="ctr">
               <a:buNone/>
             </a:pPr>
             <a:r>
-              <a:rPr lang="en-US" sz="1800" dirty="0">
-                <a:solidFill>
-                  <a:srgbClr val="FFFFFF"/>
+              <a:rPr lang="en-US" sz="1500" b="1" dirty="0">
+                <a:solidFill>
+                  <a:srgbClr val="90540F"/>
                 </a:solidFill>
                 <a:latin typeface="Calibri" pitchFamily="34" charset="0"/>
                 <a:ea typeface="Calibri" pitchFamily="34" charset="-122"/>
                 <a:cs typeface="Calibri" pitchFamily="34" charset="-120"/>
               </a:rPr>
-              <a:t>Play the recap</a:t>
-            </a:r>
-            <a:endParaRPr lang="en-US" sz="1800" dirty="0"/>
-          </a:p>
-        </p:txBody>
-      </p:sp>
-      <p:sp>
-        <p:nvSpPr>
-          <p:cNvPr id="12" name="Text 10"/>
-          <p:cNvSpPr/>
-          <p:nvPr/>
-        </p:nvSpPr>
-        <p:spPr>
-          <a:xfrm>
-            <a:off x="548640" y="4297680"/>
-            <a:ext cx="10058400" cy="457200"/>
+              <a:t>LLM</a:t>
+            </a:r>
+            <a:endParaRPr lang="en-US" sz="1500" dirty="0"/>
+          </a:p>
+        </p:txBody>
+      </p:sp>
+      <p:sp>
+        <p:nvSpPr>
+          <p:cNvPr id="11" name="Text 9"/>
+          <p:cNvSpPr/>
+          <p:nvPr/>
+        </p:nvSpPr>
+        <p:spPr>
+          <a:xfrm>
+            <a:off x="3557016" y="2532888"/>
+            <a:ext cx="2240280" cy="640080"/>
           </a:xfrm>
           <a:prstGeom prst="rect">
             <a:avLst/>
@@ -3929,19 +3886,114 @@
           <a:bodyPr wrap="square" lIns="0" tIns="0" rIns="0" bIns="0" rtlCol="0" anchor="ctr"/>
           <a:lstStyle/>
           <a:p>
-            <a:pPr indent="0" marL="0">
+            <a:pPr marL="0" indent="0" algn="ctr">
               <a:buNone/>
             </a:pPr>
             <a:r>
-              <a:rPr lang="en-US" sz="1600" i="1" dirty="0">
-                <a:solidFill>
-                  <a:srgbClr val="CADCFC"/>
+              <a:rPr lang="en-US" sz="1250" dirty="0">
+                <a:solidFill>
+                  <a:srgbClr val="5A6473"/>
                 </a:solidFill>
                 <a:latin typeface="Calibri" pitchFamily="34" charset="0"/>
                 <a:ea typeface="Calibri" pitchFamily="34" charset="-122"/>
                 <a:cs typeface="Calibri" pitchFamily="34" charset="-120"/>
               </a:rPr>
-              <a:t>Watch the episode title, key points, and audio appear — then it plays.</a:t>
+              <a:t>structured recap:</a:t>
+            </a:r>
+            <a:endParaRPr lang="en-US" sz="1250" dirty="0"/>
+          </a:p>
+          <a:p>
+            <a:pPr marL="0" indent="0" algn="ctr">
+              <a:buNone/>
+            </a:pPr>
+            <a:r>
+              <a:rPr lang="en-US" sz="1250" dirty="0">
+                <a:solidFill>
+                  <a:srgbClr val="5A6473"/>
+                </a:solidFill>
+                <a:latin typeface="Calibri" pitchFamily="34" charset="0"/>
+                <a:ea typeface="Calibri" pitchFamily="34" charset="-122"/>
+                <a:cs typeface="Calibri" pitchFamily="34" charset="-120"/>
+              </a:rPr>
+              <a:t>title · points · script</a:t>
+            </a:r>
+            <a:endParaRPr lang="en-US" sz="1250" dirty="0"/>
+          </a:p>
+        </p:txBody>
+      </p:sp>
+      <p:sp>
+        <p:nvSpPr>
+          <p:cNvPr id="12" name="Text 10"/>
+          <p:cNvSpPr/>
+          <p:nvPr/>
+        </p:nvSpPr>
+        <p:spPr>
+          <a:xfrm>
+            <a:off x="3465576" y="3264408"/>
+            <a:ext cx="2423160" cy="292608"/>
+          </a:xfrm>
+          <a:prstGeom prst="rect">
+            <a:avLst/>
+          </a:prstGeom>
+          <a:noFill/>
+          <a:ln/>
+        </p:spPr>
+        <p:txBody>
+          <a:bodyPr wrap="square" lIns="0" tIns="0" rIns="0" bIns="0" rtlCol="0" anchor="ctr"/>
+          <a:lstStyle/>
+          <a:p>
+            <a:pPr marL="0" indent="0" algn="ctr">
+              <a:buNone/>
+            </a:pPr>
+            <a:r>
+              <a:rPr lang="en-US" sz="1050" dirty="0">
+                <a:solidFill>
+                  <a:srgbClr val="8A93A1"/>
+                </a:solidFill>
+                <a:latin typeface="Courier New" pitchFamily="34" charset="0"/>
+                <a:ea typeface="Courier New" pitchFamily="34" charset="-122"/>
+                <a:cs typeface="Courier New" pitchFamily="34" charset="-120"/>
+              </a:rPr>
+              <a:t>llm_processor</a:t>
+            </a:r>
+            <a:endParaRPr lang="en-US" sz="1050" dirty="0"/>
+          </a:p>
+        </p:txBody>
+      </p:sp>
+      <p:sp>
+        <p:nvSpPr>
+          <p:cNvPr id="13" name="Text 11"/>
+          <p:cNvSpPr/>
+          <p:nvPr/>
+        </p:nvSpPr>
+        <p:spPr>
+          <a:xfrm>
+            <a:off x="5870448" y="2583180"/>
+            <a:ext cx="448056" cy="457200"/>
+          </a:xfrm>
+          <a:prstGeom prst="rect">
+            <a:avLst/>
+          </a:prstGeom>
+          <a:noFill/>
+          <a:ln/>
+        </p:spPr>
+        <p:txBody>
+          <a:bodyPr wrap="square" lIns="0" tIns="0" rIns="0" bIns="0" rtlCol="0" anchor="ctr"/>
+          <a:lstStyle/>
+          <a:p>
+            <a:pPr marL="0" indent="0" algn="ctr">
+              <a:buNone/>
+            </a:pPr>
+            <a:r>
+              <a:rPr lang="en-US" sz="1600" b="1" dirty="0">
+                <a:solidFill>
+                  <a:srgbClr val="C0741A"/>
+                </a:solidFill>
+                <a:latin typeface="Calibri" pitchFamily="34" charset="0"/>
+                <a:ea typeface="Calibri" pitchFamily="34" charset="-122"/>
+                <a:cs typeface="Calibri" pitchFamily="34" charset="-120"/>
+              </a:rPr>
+              <a:t>▶</a:t>
             </a:r>
             <a:endParaRPr lang="en-US" sz="1600" dirty="0"/>
           </a:p>
@@ -3949,243 +4001,752 @@
       </p:sp>
       <p:sp>
         <p:nvSpPr>
-          <p:cNvPr id="13" name="Shape 11"/>
-          <p:cNvSpPr/>
-          <p:nvPr/>
-        </p:nvSpPr>
-        <p:spPr>
-          <a:xfrm>
-            <a:off x="548640" y="5769864"/>
-            <a:ext cx="64008" cy="164592"/>
+          <p:cNvPr id="14" name="Shape 12"/>
+          <p:cNvSpPr/>
+          <p:nvPr/>
+        </p:nvSpPr>
+        <p:spPr>
+          <a:xfrm>
+            <a:off x="6300216" y="1965960"/>
+            <a:ext cx="2423160" cy="1691640"/>
           </a:xfrm>
           <a:prstGeom prst="roundRect">
             <a:avLst>
-              <a:gd name="adj" fmla="val 42857"/>
+              <a:gd name="adj" fmla="val 5405"/>
             </a:avLst>
           </a:prstGeom>
           <a:solidFill>
-            <a:srgbClr val="C0741A">
-              <a:alpha val="85000"/>
-            </a:srgbClr>
-          </a:solidFill>
-          <a:ln/>
-        </p:spPr>
-      </p:sp>
-      <p:sp>
-        <p:nvSpPr>
-          <p:cNvPr id="14" name="Shape 12"/>
-          <p:cNvSpPr/>
-          <p:nvPr/>
-        </p:nvSpPr>
-        <p:spPr>
-          <a:xfrm>
-            <a:off x="694944" y="5696712"/>
-            <a:ext cx="64008" cy="310896"/>
+            <a:srgbClr val="FFFFFF"/>
+          </a:solidFill>
+          <a:ln w="12700">
+            <a:solidFill>
+              <a:srgbClr val="EEF0F4"/>
+            </a:solidFill>
+            <a:prstDash val="solid"/>
+          </a:ln>
+          <a:effectLst>
+            <a:outerShdw blurRad="101600" dist="25400" dir="5400000" algn="bl" rotWithShape="0">
+              <a:srgbClr val="9AA4B2">
+                <a:alpha val="30000"/>
+              </a:srgbClr>
+            </a:outerShdw>
+          </a:effectLst>
+        </p:spPr>
+        <p:txBody>
+          <a:bodyPr/>
+          <a:lstStyle/>
+          <a:p>
+            <a:endParaRPr lang="en-GB"/>
+          </a:p>
+        </p:txBody>
+      </p:sp>
+      <p:sp>
+        <p:nvSpPr>
+          <p:cNvPr id="15" name="Text 13"/>
+          <p:cNvSpPr/>
+          <p:nvPr/>
+        </p:nvSpPr>
+        <p:spPr>
+          <a:xfrm>
+            <a:off x="6300216" y="2130552"/>
+            <a:ext cx="2423160" cy="365760"/>
+          </a:xfrm>
+          <a:prstGeom prst="rect">
+            <a:avLst/>
+          </a:prstGeom>
+          <a:noFill/>
+          <a:ln/>
+        </p:spPr>
+        <p:txBody>
+          <a:bodyPr wrap="square" lIns="0" tIns="0" rIns="0" bIns="0" rtlCol="0" anchor="ctr"/>
+          <a:lstStyle/>
+          <a:p>
+            <a:pPr marL="0" indent="0" algn="ctr">
+              <a:buNone/>
+            </a:pPr>
+            <a:r>
+              <a:rPr lang="en-US" sz="1500" b="1" dirty="0">
+                <a:solidFill>
+                  <a:srgbClr val="90540F"/>
+                </a:solidFill>
+                <a:latin typeface="Calibri" pitchFamily="34" charset="0"/>
+                <a:ea typeface="Calibri" pitchFamily="34" charset="-122"/>
+                <a:cs typeface="Calibri" pitchFamily="34" charset="-120"/>
+              </a:rPr>
+              <a:t>TEXT-TO-SPEECH</a:t>
+            </a:r>
+            <a:endParaRPr lang="en-US" sz="1500" dirty="0"/>
+          </a:p>
+        </p:txBody>
+      </p:sp>
+      <p:sp>
+        <p:nvSpPr>
+          <p:cNvPr id="16" name="Text 14"/>
+          <p:cNvSpPr/>
+          <p:nvPr/>
+        </p:nvSpPr>
+        <p:spPr>
+          <a:xfrm>
+            <a:off x="6391656" y="2532888"/>
+            <a:ext cx="2240280" cy="640080"/>
+          </a:xfrm>
+          <a:prstGeom prst="rect">
+            <a:avLst/>
+          </a:prstGeom>
+          <a:noFill/>
+          <a:ln/>
+        </p:spPr>
+        <p:txBody>
+          <a:bodyPr wrap="square" lIns="0" tIns="0" rIns="0" bIns="0" rtlCol="0" anchor="ctr"/>
+          <a:lstStyle/>
+          <a:p>
+            <a:pPr marL="0" indent="0" algn="ctr">
+              <a:buNone/>
+            </a:pPr>
+            <a:r>
+              <a:rPr lang="en-US" sz="1250" dirty="0">
+                <a:solidFill>
+                  <a:srgbClr val="5A6473"/>
+                </a:solidFill>
+                <a:latin typeface="Calibri" pitchFamily="34" charset="0"/>
+                <a:ea typeface="Calibri" pitchFamily="34" charset="-122"/>
+                <a:cs typeface="Calibri" pitchFamily="34" charset="-120"/>
+              </a:rPr>
+              <a:t>script becomes</a:t>
+            </a:r>
+            <a:endParaRPr lang="en-US" sz="1250" dirty="0"/>
+          </a:p>
+          <a:p>
+            <a:pPr marL="0" indent="0" algn="ctr">
+              <a:buNone/>
+            </a:pPr>
+            <a:r>
+              <a:rPr lang="en-US" sz="1250" dirty="0">
+                <a:solidFill>
+                  <a:srgbClr val="5A6473"/>
+                </a:solidFill>
+                <a:latin typeface="Calibri" pitchFamily="34" charset="0"/>
+                <a:ea typeface="Calibri" pitchFamily="34" charset="-122"/>
+                <a:cs typeface="Calibri" pitchFamily="34" charset="-120"/>
+              </a:rPr>
+              <a:t>an mp3</a:t>
+            </a:r>
+            <a:endParaRPr lang="en-US" sz="1250" dirty="0"/>
+          </a:p>
+        </p:txBody>
+      </p:sp>
+      <p:sp>
+        <p:nvSpPr>
+          <p:cNvPr id="17" name="Text 15"/>
+          <p:cNvSpPr/>
+          <p:nvPr/>
+        </p:nvSpPr>
+        <p:spPr>
+          <a:xfrm>
+            <a:off x="6300216" y="3264408"/>
+            <a:ext cx="2423160" cy="292608"/>
+          </a:xfrm>
+          <a:prstGeom prst="rect">
+            <a:avLst/>
+          </a:prstGeom>
+          <a:noFill/>
+          <a:ln/>
+        </p:spPr>
+        <p:txBody>
+          <a:bodyPr wrap="square" lIns="0" tIns="0" rIns="0" bIns="0" rtlCol="0" anchor="ctr"/>
+          <a:lstStyle/>
+          <a:p>
+            <a:pPr marL="0" indent="0" algn="ctr">
+              <a:buNone/>
+            </a:pPr>
+            <a:r>
+              <a:rPr lang="en-US" sz="1050" dirty="0">
+                <a:solidFill>
+                  <a:srgbClr val="8A93A1"/>
+                </a:solidFill>
+                <a:latin typeface="Courier New" pitchFamily="34" charset="0"/>
+                <a:ea typeface="Courier New" pitchFamily="34" charset="-122"/>
+                <a:cs typeface="Courier New" pitchFamily="34" charset="-120"/>
+              </a:rPr>
+              <a:t>tts_generator</a:t>
+            </a:r>
+            <a:endParaRPr lang="en-US" sz="1050" dirty="0"/>
+          </a:p>
+        </p:txBody>
+      </p:sp>
+      <p:sp>
+        <p:nvSpPr>
+          <p:cNvPr id="18" name="Text 16"/>
+          <p:cNvSpPr/>
+          <p:nvPr/>
+        </p:nvSpPr>
+        <p:spPr>
+          <a:xfrm>
+            <a:off x="8705088" y="2583180"/>
+            <a:ext cx="448056" cy="457200"/>
+          </a:xfrm>
+          <a:prstGeom prst="rect">
+            <a:avLst/>
+          </a:prstGeom>
+          <a:noFill/>
+          <a:ln/>
+        </p:spPr>
+        <p:txBody>
+          <a:bodyPr wrap="square" lIns="0" tIns="0" rIns="0" bIns="0" rtlCol="0" anchor="ctr"/>
+          <a:lstStyle/>
+          <a:p>
+            <a:pPr marL="0" indent="0" algn="ctr">
+              <a:buNone/>
+            </a:pPr>
+            <a:r>
+              <a:rPr lang="en-US" sz="1600" b="1" dirty="0">
+                <a:solidFill>
+                  <a:srgbClr val="C0741A"/>
+                </a:solidFill>
+                <a:latin typeface="Calibri" pitchFamily="34" charset="0"/>
+                <a:ea typeface="Calibri" pitchFamily="34" charset="-122"/>
+                <a:cs typeface="Calibri" pitchFamily="34" charset="-120"/>
+              </a:rPr>
+              <a:t>▶</a:t>
+            </a:r>
+            <a:endParaRPr lang="en-US" sz="1600" dirty="0"/>
+          </a:p>
+        </p:txBody>
+      </p:sp>
+      <p:sp>
+        <p:nvSpPr>
+          <p:cNvPr id="19" name="Shape 17"/>
+          <p:cNvSpPr/>
+          <p:nvPr/>
+        </p:nvSpPr>
+        <p:spPr>
+          <a:xfrm>
+            <a:off x="9134856" y="1965960"/>
+            <a:ext cx="2423160" cy="1691640"/>
           </a:xfrm>
           <a:prstGeom prst="roundRect">
             <a:avLst>
-              <a:gd name="adj" fmla="val 42857"/>
+              <a:gd name="adj" fmla="val 5405"/>
             </a:avLst>
           </a:prstGeom>
           <a:solidFill>
-            <a:srgbClr val="C0741A">
-              <a:alpha val="85000"/>
-            </a:srgbClr>
-          </a:solidFill>
-          <a:ln/>
-        </p:spPr>
-      </p:sp>
-      <p:sp>
-        <p:nvSpPr>
-          <p:cNvPr id="15" name="Shape 13"/>
-          <p:cNvSpPr/>
-          <p:nvPr/>
-        </p:nvSpPr>
-        <p:spPr>
-          <a:xfrm>
-            <a:off x="841248" y="5600700"/>
-            <a:ext cx="64008" cy="502920"/>
+            <a:srgbClr val="C0741A"/>
+          </a:solidFill>
+          <a:ln w="12700">
+            <a:solidFill>
+              <a:srgbClr val="C0741A"/>
+            </a:solidFill>
+            <a:prstDash val="solid"/>
+          </a:ln>
+          <a:effectLst>
+            <a:outerShdw blurRad="101600" dist="25400" dir="5400000" algn="bl" rotWithShape="0">
+              <a:srgbClr val="9AA4B2">
+                <a:alpha val="30000"/>
+              </a:srgbClr>
+            </a:outerShdw>
+          </a:effectLst>
+        </p:spPr>
+        <p:txBody>
+          <a:bodyPr/>
+          <a:lstStyle/>
+          <a:p>
+            <a:endParaRPr lang="en-GB"/>
+          </a:p>
+        </p:txBody>
+      </p:sp>
+      <p:sp>
+        <p:nvSpPr>
+          <p:cNvPr id="20" name="Text 18"/>
+          <p:cNvSpPr/>
+          <p:nvPr/>
+        </p:nvSpPr>
+        <p:spPr>
+          <a:xfrm>
+            <a:off x="9134856" y="2130552"/>
+            <a:ext cx="2423160" cy="365760"/>
+          </a:xfrm>
+          <a:prstGeom prst="rect">
+            <a:avLst/>
+          </a:prstGeom>
+          <a:noFill/>
+          <a:ln/>
+        </p:spPr>
+        <p:txBody>
+          <a:bodyPr wrap="square" lIns="0" tIns="0" rIns="0" bIns="0" rtlCol="0" anchor="ctr"/>
+          <a:lstStyle/>
+          <a:p>
+            <a:pPr marL="0" indent="0" algn="ctr">
+              <a:buNone/>
+            </a:pPr>
+            <a:r>
+              <a:rPr lang="en-US" sz="1500" b="1" dirty="0">
+                <a:solidFill>
+                  <a:srgbClr val="FFFFFF"/>
+                </a:solidFill>
+                <a:latin typeface="Calibri" pitchFamily="34" charset="0"/>
+                <a:ea typeface="Calibri" pitchFamily="34" charset="-122"/>
+                <a:cs typeface="Calibri" pitchFamily="34" charset="-120"/>
+              </a:rPr>
+              <a:t>GRADIO APP</a:t>
+            </a:r>
+            <a:endParaRPr lang="en-US" sz="1500" dirty="0"/>
+          </a:p>
+        </p:txBody>
+      </p:sp>
+      <p:sp>
+        <p:nvSpPr>
+          <p:cNvPr id="21" name="Text 19"/>
+          <p:cNvSpPr/>
+          <p:nvPr/>
+        </p:nvSpPr>
+        <p:spPr>
+          <a:xfrm>
+            <a:off x="9226296" y="2532888"/>
+            <a:ext cx="2240280" cy="640080"/>
+          </a:xfrm>
+          <a:prstGeom prst="rect">
+            <a:avLst/>
+          </a:prstGeom>
+          <a:noFill/>
+          <a:ln/>
+        </p:spPr>
+        <p:txBody>
+          <a:bodyPr wrap="square" lIns="0" tIns="0" rIns="0" bIns="0" rtlCol="0" anchor="ctr"/>
+          <a:lstStyle/>
+          <a:p>
+            <a:pPr marL="0" indent="0" algn="ctr">
+              <a:buNone/>
+            </a:pPr>
+            <a:r>
+              <a:rPr lang="en-US" sz="1250" dirty="0">
+                <a:solidFill>
+                  <a:srgbClr val="FFFFFF"/>
+                </a:solidFill>
+                <a:latin typeface="Calibri" pitchFamily="34" charset="0"/>
+                <a:ea typeface="Calibri" pitchFamily="34" charset="-122"/>
+                <a:cs typeface="Calibri" pitchFamily="34" charset="-120"/>
+              </a:rPr>
+              <a:t>play &amp; read</a:t>
+            </a:r>
+            <a:endParaRPr lang="en-US" sz="1250" dirty="0"/>
+          </a:p>
+          <a:p>
+            <a:pPr marL="0" indent="0" algn="ctr">
+              <a:buNone/>
+            </a:pPr>
+            <a:r>
+              <a:rPr lang="en-US" sz="1250" dirty="0">
+                <a:solidFill>
+                  <a:srgbClr val="FFFFFF"/>
+                </a:solidFill>
+                <a:latin typeface="Calibri" pitchFamily="34" charset="0"/>
+                <a:ea typeface="Calibri" pitchFamily="34" charset="-122"/>
+                <a:cs typeface="Calibri" pitchFamily="34" charset="-120"/>
+              </a:rPr>
+              <a:t>the recap</a:t>
+            </a:r>
+            <a:endParaRPr lang="en-US" sz="1250" dirty="0"/>
+          </a:p>
+        </p:txBody>
+      </p:sp>
+      <p:sp>
+        <p:nvSpPr>
+          <p:cNvPr id="22" name="Text 20"/>
+          <p:cNvSpPr/>
+          <p:nvPr/>
+        </p:nvSpPr>
+        <p:spPr>
+          <a:xfrm>
+            <a:off x="9134856" y="3264408"/>
+            <a:ext cx="2423160" cy="292608"/>
+          </a:xfrm>
+          <a:prstGeom prst="rect">
+            <a:avLst/>
+          </a:prstGeom>
+          <a:noFill/>
+          <a:ln/>
+        </p:spPr>
+        <p:txBody>
+          <a:bodyPr wrap="square" lIns="0" tIns="0" rIns="0" bIns="0" rtlCol="0" anchor="ctr"/>
+          <a:lstStyle/>
+          <a:p>
+            <a:pPr marL="0" indent="0" algn="ctr">
+              <a:buNone/>
+            </a:pPr>
+            <a:r>
+              <a:rPr lang="en-US" sz="1050" dirty="0">
+                <a:solidFill>
+                  <a:srgbClr val="F5E4D2"/>
+                </a:solidFill>
+                <a:latin typeface="Courier New" pitchFamily="34" charset="0"/>
+                <a:ea typeface="Courier New" pitchFamily="34" charset="-122"/>
+                <a:cs typeface="Courier New" pitchFamily="34" charset="-120"/>
+              </a:rPr>
+              <a:t>main.py</a:t>
+            </a:r>
+            <a:endParaRPr lang="en-US" sz="1050" dirty="0"/>
+          </a:p>
+        </p:txBody>
+      </p:sp>
+      <p:sp>
+        <p:nvSpPr>
+          <p:cNvPr id="23" name="Text 21"/>
+          <p:cNvSpPr/>
+          <p:nvPr/>
+        </p:nvSpPr>
+        <p:spPr>
+          <a:xfrm>
+            <a:off x="548640" y="4069080"/>
+            <a:ext cx="9144000" cy="365760"/>
+          </a:xfrm>
+          <a:prstGeom prst="rect">
+            <a:avLst/>
+          </a:prstGeom>
+          <a:noFill/>
+          <a:ln/>
+        </p:spPr>
+        <p:txBody>
+          <a:bodyPr wrap="square" lIns="0" tIns="0" rIns="0" bIns="0" rtlCol="0" anchor="ctr"/>
+          <a:lstStyle/>
+          <a:p>
+            <a:pPr marL="0" indent="0">
+              <a:buNone/>
+            </a:pPr>
+            <a:r>
+              <a:rPr lang="en-US" sz="1400" b="1" kern="0" spc="100" dirty="0">
+                <a:solidFill>
+                  <a:srgbClr val="1B2230"/>
+                </a:solidFill>
+                <a:latin typeface="Calibri" pitchFamily="34" charset="0"/>
+                <a:ea typeface="Calibri" pitchFamily="34" charset="-122"/>
+                <a:cs typeface="Calibri" pitchFamily="34" charset="-120"/>
+              </a:rPr>
+              <a:t>Technical choices we made</a:t>
+            </a:r>
+            <a:endParaRPr lang="en-US" sz="1400" dirty="0"/>
+          </a:p>
+        </p:txBody>
+      </p:sp>
+      <p:sp>
+        <p:nvSpPr>
+          <p:cNvPr id="24" name="Shape 22"/>
+          <p:cNvSpPr/>
+          <p:nvPr/>
+        </p:nvSpPr>
+        <p:spPr>
+          <a:xfrm>
+            <a:off x="548640" y="4480560"/>
+            <a:ext cx="3514344" cy="1463040"/>
           </a:xfrm>
           <a:prstGeom prst="roundRect">
             <a:avLst>
-              <a:gd name="adj" fmla="val 42857"/>
+              <a:gd name="adj" fmla="val 6250"/>
             </a:avLst>
           </a:prstGeom>
           <a:solidFill>
-            <a:srgbClr val="C0741A">
-              <a:alpha val="85000"/>
-            </a:srgbClr>
-          </a:solidFill>
-          <a:ln/>
-        </p:spPr>
-      </p:sp>
-      <p:sp>
-        <p:nvSpPr>
-          <p:cNvPr id="16" name="Shape 14"/>
-          <p:cNvSpPr/>
-          <p:nvPr/>
-        </p:nvSpPr>
-        <p:spPr>
-          <a:xfrm>
-            <a:off x="987552" y="5724144"/>
-            <a:ext cx="64008" cy="256032"/>
+            <a:srgbClr val="EEF0F4"/>
+          </a:solidFill>
+          <a:ln/>
+        </p:spPr>
+        <p:txBody>
+          <a:bodyPr/>
+          <a:lstStyle/>
+          <a:p>
+            <a:endParaRPr lang="en-GB"/>
+          </a:p>
+        </p:txBody>
+      </p:sp>
+      <p:sp>
+        <p:nvSpPr>
+          <p:cNvPr id="25" name="Text 23"/>
+          <p:cNvSpPr/>
+          <p:nvPr/>
+        </p:nvSpPr>
+        <p:spPr>
+          <a:xfrm>
+            <a:off x="731520" y="4617720"/>
+            <a:ext cx="3148584" cy="365760"/>
+          </a:xfrm>
+          <a:prstGeom prst="rect">
+            <a:avLst/>
+          </a:prstGeom>
+          <a:noFill/>
+          <a:ln/>
+        </p:spPr>
+        <p:txBody>
+          <a:bodyPr wrap="square" lIns="0" tIns="0" rIns="0" bIns="0" rtlCol="0" anchor="ctr"/>
+          <a:lstStyle/>
+          <a:p>
+            <a:pPr marL="0" indent="0">
+              <a:buNone/>
+            </a:pPr>
+            <a:r>
+              <a:rPr lang="en-US" sz="1500" b="1" dirty="0">
+                <a:solidFill>
+                  <a:srgbClr val="90540F"/>
+                </a:solidFill>
+                <a:latin typeface="Calibri" pitchFamily="34" charset="0"/>
+                <a:ea typeface="Calibri" pitchFamily="34" charset="-122"/>
+                <a:cs typeface="Calibri" pitchFamily="34" charset="-120"/>
+              </a:rPr>
+              <a:t>Structured outputs</a:t>
+            </a:r>
+            <a:endParaRPr lang="en-US" sz="1500" dirty="0"/>
+          </a:p>
+        </p:txBody>
+      </p:sp>
+      <p:sp>
+        <p:nvSpPr>
+          <p:cNvPr id="26" name="Text 24"/>
+          <p:cNvSpPr/>
+          <p:nvPr/>
+        </p:nvSpPr>
+        <p:spPr>
+          <a:xfrm>
+            <a:off x="731520" y="5029200"/>
+            <a:ext cx="3148584" cy="822960"/>
+          </a:xfrm>
+          <a:prstGeom prst="rect">
+            <a:avLst/>
+          </a:prstGeom>
+          <a:noFill/>
+          <a:ln/>
+        </p:spPr>
+        <p:txBody>
+          <a:bodyPr wrap="square" lIns="0" tIns="0" rIns="0" bIns="0" rtlCol="0" anchor="t"/>
+          <a:lstStyle/>
+          <a:p>
+            <a:pPr marL="0" indent="0">
+              <a:buNone/>
+            </a:pPr>
+            <a:r>
+              <a:rPr lang="en-US" sz="1300" dirty="0">
+                <a:solidFill>
+                  <a:srgbClr val="5A6473"/>
+                </a:solidFill>
+                <a:latin typeface="Calibri" pitchFamily="34" charset="0"/>
+                <a:ea typeface="Calibri" pitchFamily="34" charset="-122"/>
+                <a:cs typeface="Calibri" pitchFamily="34" charset="-120"/>
+              </a:rPr>
+              <a:t>a Pydantic schema keeps the reply reliable — no broken formatting</a:t>
+            </a:r>
+            <a:endParaRPr lang="en-US" sz="1300" dirty="0"/>
+          </a:p>
+        </p:txBody>
+      </p:sp>
+      <p:sp>
+        <p:nvSpPr>
+          <p:cNvPr id="27" name="Shape 25"/>
+          <p:cNvSpPr/>
+          <p:nvPr/>
+        </p:nvSpPr>
+        <p:spPr>
+          <a:xfrm>
+            <a:off x="4337304" y="4480560"/>
+            <a:ext cx="3514344" cy="1463040"/>
           </a:xfrm>
           <a:prstGeom prst="roundRect">
             <a:avLst>
-              <a:gd name="adj" fmla="val 42857"/>
+              <a:gd name="adj" fmla="val 6250"/>
             </a:avLst>
           </a:prstGeom>
           <a:solidFill>
-            <a:srgbClr val="C0741A">
-              <a:alpha val="85000"/>
-            </a:srgbClr>
-          </a:solidFill>
-          <a:ln/>
-        </p:spPr>
-      </p:sp>
-      <p:sp>
-        <p:nvSpPr>
-          <p:cNvPr id="17" name="Shape 15"/>
-          <p:cNvSpPr/>
-          <p:nvPr/>
-        </p:nvSpPr>
-        <p:spPr>
-          <a:xfrm>
-            <a:off x="1133856" y="5532120"/>
-            <a:ext cx="64008" cy="640080"/>
+            <a:srgbClr val="EEF0F4"/>
+          </a:solidFill>
+          <a:ln/>
+        </p:spPr>
+        <p:txBody>
+          <a:bodyPr/>
+          <a:lstStyle/>
+          <a:p>
+            <a:endParaRPr lang="en-GB"/>
+          </a:p>
+        </p:txBody>
+      </p:sp>
+      <p:sp>
+        <p:nvSpPr>
+          <p:cNvPr id="28" name="Text 26"/>
+          <p:cNvSpPr/>
+          <p:nvPr/>
+        </p:nvSpPr>
+        <p:spPr>
+          <a:xfrm>
+            <a:off x="4520184" y="4617720"/>
+            <a:ext cx="3148584" cy="365760"/>
+          </a:xfrm>
+          <a:prstGeom prst="rect">
+            <a:avLst/>
+          </a:prstGeom>
+          <a:noFill/>
+          <a:ln/>
+        </p:spPr>
+        <p:txBody>
+          <a:bodyPr wrap="square" lIns="0" tIns="0" rIns="0" bIns="0" rtlCol="0" anchor="ctr"/>
+          <a:lstStyle/>
+          <a:p>
+            <a:pPr marL="0" indent="0">
+              <a:buNone/>
+            </a:pPr>
+            <a:r>
+              <a:rPr lang="en-US" sz="1500" b="1" dirty="0">
+                <a:solidFill>
+                  <a:srgbClr val="90540F"/>
+                </a:solidFill>
+                <a:latin typeface="Calibri" pitchFamily="34" charset="0"/>
+                <a:ea typeface="Calibri" pitchFamily="34" charset="-122"/>
+                <a:cs typeface="Calibri" pitchFamily="34" charset="-120"/>
+              </a:rPr>
+              <a:t>Deliberate models</a:t>
+            </a:r>
+            <a:endParaRPr lang="en-US" sz="1500" dirty="0"/>
+          </a:p>
+        </p:txBody>
+      </p:sp>
+      <p:sp>
+        <p:nvSpPr>
+          <p:cNvPr id="29" name="Text 27"/>
+          <p:cNvSpPr/>
+          <p:nvPr/>
+        </p:nvSpPr>
+        <p:spPr>
+          <a:xfrm>
+            <a:off x="4520184" y="5029200"/>
+            <a:ext cx="3148584" cy="822960"/>
+          </a:xfrm>
+          <a:prstGeom prst="rect">
+            <a:avLst/>
+          </a:prstGeom>
+          <a:noFill/>
+          <a:ln/>
+        </p:spPr>
+        <p:txBody>
+          <a:bodyPr wrap="square" lIns="0" tIns="0" rIns="0" bIns="0" rtlCol="0" anchor="t"/>
+          <a:lstStyle/>
+          <a:p>
+            <a:pPr marL="0" indent="0">
+              <a:buNone/>
+            </a:pPr>
+            <a:r>
+              <a:rPr lang="en-US" sz="1300" dirty="0">
+                <a:solidFill>
+                  <a:srgbClr val="5A6473"/>
+                </a:solidFill>
+                <a:latin typeface="Calibri" pitchFamily="34" charset="0"/>
+                <a:ea typeface="Calibri" pitchFamily="34" charset="-122"/>
+                <a:cs typeface="Calibri" pitchFamily="34" charset="-120"/>
+              </a:rPr>
+              <a:t>gpt-4o-mini + tts-1  →  about 1 cent per recap</a:t>
+            </a:r>
+            <a:endParaRPr lang="en-US" sz="1300" dirty="0"/>
+          </a:p>
+        </p:txBody>
+      </p:sp>
+      <p:sp>
+        <p:nvSpPr>
+          <p:cNvPr id="30" name="Shape 28"/>
+          <p:cNvSpPr/>
+          <p:nvPr/>
+        </p:nvSpPr>
+        <p:spPr>
+          <a:xfrm>
+            <a:off x="8125968" y="4480560"/>
+            <a:ext cx="3514344" cy="1463040"/>
           </a:xfrm>
           <a:prstGeom prst="roundRect">
             <a:avLst>
-              <a:gd name="adj" fmla="val 42857"/>
+              <a:gd name="adj" fmla="val 6250"/>
             </a:avLst>
           </a:prstGeom>
           <a:solidFill>
-            <a:srgbClr val="C0741A">
-              <a:alpha val="85000"/>
-            </a:srgbClr>
-          </a:solidFill>
-          <a:ln/>
-        </p:spPr>
-      </p:sp>
-      <p:sp>
-        <p:nvSpPr>
-          <p:cNvPr id="18" name="Shape 16"/>
-          <p:cNvSpPr/>
-          <p:nvPr/>
-        </p:nvSpPr>
-        <p:spPr>
-          <a:xfrm>
-            <a:off x="1280160" y="5660136"/>
-            <a:ext cx="64008" cy="384048"/>
-          </a:xfrm>
-          <a:prstGeom prst="roundRect">
-            <a:avLst>
-              <a:gd name="adj" fmla="val 42857"/>
-            </a:avLst>
-          </a:prstGeom>
-          <a:solidFill>
-            <a:srgbClr val="C0741A">
-              <a:alpha val="85000"/>
-            </a:srgbClr>
-          </a:solidFill>
-          <a:ln/>
-        </p:spPr>
-      </p:sp>
-      <p:sp>
-        <p:nvSpPr>
-          <p:cNvPr id="19" name="Shape 17"/>
-          <p:cNvSpPr/>
-          <p:nvPr/>
-        </p:nvSpPr>
-        <p:spPr>
-          <a:xfrm>
-            <a:off x="1426464" y="5577840"/>
-            <a:ext cx="64008" cy="548640"/>
-          </a:xfrm>
-          <a:prstGeom prst="roundRect">
-            <a:avLst>
-              <a:gd name="adj" fmla="val 42857"/>
-            </a:avLst>
-          </a:prstGeom>
-          <a:solidFill>
-            <a:srgbClr val="C0741A">
-              <a:alpha val="85000"/>
-            </a:srgbClr>
-          </a:solidFill>
-          <a:ln/>
-        </p:spPr>
-      </p:sp>
-      <p:sp>
-        <p:nvSpPr>
-          <p:cNvPr id="20" name="Shape 18"/>
-          <p:cNvSpPr/>
-          <p:nvPr/>
-        </p:nvSpPr>
-        <p:spPr>
-          <a:xfrm>
-            <a:off x="1572768" y="5742432"/>
-            <a:ext cx="64008" cy="219456"/>
-          </a:xfrm>
-          <a:prstGeom prst="roundRect">
-            <a:avLst>
-              <a:gd name="adj" fmla="val 42857"/>
-            </a:avLst>
-          </a:prstGeom>
-          <a:solidFill>
-            <a:srgbClr val="C0741A">
-              <a:alpha val="85000"/>
-            </a:srgbClr>
-          </a:solidFill>
-          <a:ln/>
-        </p:spPr>
-      </p:sp>
-      <p:sp>
-        <p:nvSpPr>
-          <p:cNvPr id="21" name="Shape 19"/>
-          <p:cNvSpPr/>
-          <p:nvPr/>
-        </p:nvSpPr>
-        <p:spPr>
-          <a:xfrm>
-            <a:off x="1719072" y="5641848"/>
-            <a:ext cx="64008" cy="420624"/>
-          </a:xfrm>
-          <a:prstGeom prst="roundRect">
-            <a:avLst>
-              <a:gd name="adj" fmla="val 42857"/>
-            </a:avLst>
-          </a:prstGeom>
-          <a:solidFill>
-            <a:srgbClr val="C0741A">
-              <a:alpha val="85000"/>
-            </a:srgbClr>
-          </a:solidFill>
-          <a:ln/>
-        </p:spPr>
-      </p:sp>
-      <p:sp>
-        <p:nvSpPr>
-          <p:cNvPr id="22" name="Shape 20"/>
-          <p:cNvSpPr/>
-          <p:nvPr/>
-        </p:nvSpPr>
-        <p:spPr>
-          <a:xfrm>
-            <a:off x="1865376" y="5705856"/>
-            <a:ext cx="64008" cy="292608"/>
-          </a:xfrm>
-          <a:prstGeom prst="roundRect">
-            <a:avLst>
-              <a:gd name="adj" fmla="val 42857"/>
-            </a:avLst>
-          </a:prstGeom>
-          <a:solidFill>
-            <a:srgbClr val="C0741A">
-              <a:alpha val="85000"/>
-            </a:srgbClr>
-          </a:solidFill>
-          <a:ln/>
-        </p:spPr>
+            <a:srgbClr val="EEF0F4"/>
+          </a:solidFill>
+          <a:ln/>
+        </p:spPr>
+        <p:txBody>
+          <a:bodyPr/>
+          <a:lstStyle/>
+          <a:p>
+            <a:endParaRPr lang="en-GB"/>
+          </a:p>
+        </p:txBody>
+      </p:sp>
+      <p:sp>
+        <p:nvSpPr>
+          <p:cNvPr id="31" name="Text 29"/>
+          <p:cNvSpPr/>
+          <p:nvPr/>
+        </p:nvSpPr>
+        <p:spPr>
+          <a:xfrm>
+            <a:off x="8308848" y="4617720"/>
+            <a:ext cx="3148584" cy="365760"/>
+          </a:xfrm>
+          <a:prstGeom prst="rect">
+            <a:avLst/>
+          </a:prstGeom>
+          <a:noFill/>
+          <a:ln/>
+        </p:spPr>
+        <p:txBody>
+          <a:bodyPr wrap="square" lIns="0" tIns="0" rIns="0" bIns="0" rtlCol="0" anchor="ctr"/>
+          <a:lstStyle/>
+          <a:p>
+            <a:pPr marL="0" indent="0">
+              <a:buNone/>
+            </a:pPr>
+            <a:r>
+              <a:rPr lang="en-US" sz="1500" b="1" dirty="0">
+                <a:solidFill>
+                  <a:srgbClr val="90540F"/>
+                </a:solidFill>
+                <a:latin typeface="Calibri" pitchFamily="34" charset="0"/>
+                <a:ea typeface="Calibri" pitchFamily="34" charset="-122"/>
+                <a:cs typeface="Calibri" pitchFamily="34" charset="-120"/>
+              </a:rPr>
+              <a:t>Clean data structures</a:t>
+            </a:r>
+            <a:endParaRPr lang="en-US" sz="1500" dirty="0"/>
+          </a:p>
+        </p:txBody>
+      </p:sp>
+      <p:sp>
+        <p:nvSpPr>
+          <p:cNvPr id="32" name="Text 30"/>
+          <p:cNvSpPr/>
+          <p:nvPr/>
+        </p:nvSpPr>
+        <p:spPr>
+          <a:xfrm>
+            <a:off x="8308848" y="5029200"/>
+            <a:ext cx="3148584" cy="822960"/>
+          </a:xfrm>
+          <a:prstGeom prst="rect">
+            <a:avLst/>
+          </a:prstGeom>
+          <a:noFill/>
+          <a:ln/>
+        </p:spPr>
+        <p:txBody>
+          <a:bodyPr wrap="square" lIns="0" tIns="0" rIns="0" bIns="0" rtlCol="0" anchor="t"/>
+          <a:lstStyle/>
+          <a:p>
+            <a:pPr marL="0" indent="0">
+              <a:buNone/>
+            </a:pPr>
+            <a:r>
+              <a:rPr lang="en-US" sz="1300" dirty="0">
+                <a:solidFill>
+                  <a:srgbClr val="5A6473"/>
+                </a:solidFill>
+                <a:latin typeface="Calibri" pitchFamily="34" charset="0"/>
+                <a:ea typeface="Calibri" pitchFamily="34" charset="-122"/>
+                <a:cs typeface="Calibri" pitchFamily="34" charset="-120"/>
+              </a:rPr>
+              <a:t>a dataclass + Pydantic model flow between modules</a:t>
+            </a:r>
+            <a:endParaRPr lang="en-US" sz="1300" dirty="0"/>
+          </a:p>
+        </p:txBody>
       </p:sp>
     </p:spTree>
   </p:cSld>
@@ -4203,6 +4764,7 @@
         <a:solidFill>
           <a:srgbClr val="F7F8FA"/>
         </a:solidFill>
+        <a:effectLst/>
       </p:bgPr>
     </p:bg>
     <p:spTree>
@@ -4240,7 +4802,7 @@
           <a:bodyPr wrap="square" lIns="0" tIns="0" rIns="0" bIns="0" rtlCol="0" anchor="ctr"/>
           <a:lstStyle/>
           <a:p>
-            <a:pPr indent="0" marL="0">
+            <a:pPr marL="0" indent="0">
               <a:buNone/>
             </a:pPr>
             <a:r>
@@ -4284,13 +4846,20 @@
             <a:prstDash val="solid"/>
           </a:ln>
           <a:effectLst>
-            <a:outerShdw sx="100000" sy="100000" kx="0" ky="0" algn="bl" rotWithShape="0" blurRad="101600" dist="25400" dir="5400000">
+            <a:outerShdw blurRad="101600" dist="25400" dir="5400000" algn="bl" rotWithShape="0">
               <a:srgbClr val="9AA4B2">
                 <a:alpha val="30000"/>
               </a:srgbClr>
             </a:outerShdw>
           </a:effectLst>
         </p:spPr>
+        <p:txBody>
+          <a:bodyPr/>
+          <a:lstStyle/>
+          <a:p>
+            <a:endParaRPr lang="en-GB"/>
+          </a:p>
+        </p:txBody>
       </p:sp>
       <p:sp>
         <p:nvSpPr>
@@ -4313,11 +4882,11 @@
           <a:bodyPr wrap="square" lIns="0" tIns="0" rIns="0" bIns="0" rtlCol="0" anchor="ctr"/>
           <a:lstStyle/>
           <a:p>
-            <a:pPr indent="0" marL="0">
+            <a:pPr marL="0" indent="0">
               <a:buNone/>
             </a:pPr>
             <a:r>
-              <a:rPr lang="en-US" sz="1400" b="1" spc="150" kern="0" dirty="0">
+              <a:rPr lang="en-US" sz="1400" b="1" kern="0" spc="150" dirty="0">
                 <a:solidFill>
                   <a:srgbClr val="90540F"/>
                 </a:solidFill>
@@ -4395,7 +4964,7 @@
                 <a:ea typeface="Calibri" pitchFamily="34" charset="-122"/>
                 <a:cs typeface="Calibri" pitchFamily="34" charset="-120"/>
               </a:rPr>
-              <a:t>Flexible inputs: pick a lesson, fetch a URL, or upload a file.</a:t>
+              <a:t>Flexible inputs: pick a lesson, fetch a URL, or paste text.</a:t>
             </a:r>
             <a:endParaRPr lang="en-US" sz="1550" dirty="0"/>
           </a:p>
@@ -4416,7 +4985,7 @@
                 <a:ea typeface="Calibri" pitchFamily="34" charset="-122"/>
                 <a:cs typeface="Calibri" pitchFamily="34" charset="-120"/>
               </a:rPr>
-              <a:t>Modular design — separate data, LLM, speech, and UI — made it easy to grow.</a:t>
+              <a:t>Modular design — separate data, LLM, speech, and UI — made it easy to scale.</a:t>
             </a:r>
             <a:endParaRPr lang="en-US" sz="1550" dirty="0"/>
           </a:p>
@@ -4443,6 +5012,13 @@
           </a:solidFill>
           <a:ln/>
         </p:spPr>
+        <p:txBody>
+          <a:bodyPr/>
+          <a:lstStyle/>
+          <a:p>
+            <a:endParaRPr lang="en-GB"/>
+          </a:p>
+        </p:txBody>
       </p:sp>
       <p:sp>
         <p:nvSpPr>
@@ -4465,11 +5041,11 @@
           <a:bodyPr wrap="square" lIns="0" tIns="0" rIns="0" bIns="0" rtlCol="0" anchor="ctr"/>
           <a:lstStyle/>
           <a:p>
-            <a:pPr indent="0" marL="0">
+            <a:pPr marL="0" indent="0">
               <a:buNone/>
             </a:pPr>
             <a:r>
-              <a:rPr lang="en-US" sz="1400" b="1" spc="150" kern="0" dirty="0">
+              <a:rPr lang="en-US" sz="1400" b="1" kern="0" spc="150" dirty="0">
                 <a:solidFill>
                   <a:srgbClr val="C0741A"/>
                 </a:solidFill>
@@ -4523,7 +5099,7 @@
                 <a:ea typeface="Calibri" pitchFamily="34" charset="-122"/>
                 <a:cs typeface="Calibri" pitchFamily="34" charset="-120"/>
               </a:rPr>
-              <a:t>Download button for episodes</a:t>
+              <a:t>Monologue / Dialogue options for listeners</a:t>
             </a:r>
             <a:endParaRPr lang="en-US" sz="1550" dirty="0"/>
           </a:p>
@@ -4547,9 +5123,8 @@
                 <a:ea typeface="Calibri" pitchFamily="34" charset="-122"/>
                 <a:cs typeface="Calibri" pitchFamily="34" charset="-120"/>
               </a:rPr>
-              <a:t>PDF input</a:t>
-            </a:r>
-            <a:endParaRPr lang="en-US" sz="1550" dirty="0"/>
+              <a:t>Intro / outro </a:t>
+            </a:r>
           </a:p>
           <a:p>
             <a:pPr marL="190500" indent="-190500">
@@ -4571,7 +5146,7 @@
                 <a:ea typeface="Calibri" pitchFamily="34" charset="-122"/>
                 <a:cs typeface="Calibri" pitchFamily="34" charset="-120"/>
               </a:rPr>
-              <a:t>Intro / outro and choose-the-length</a:t>
+              <a:t>Choose-the-length of podcast (1m /3m)</a:t>
             </a:r>
             <a:endParaRPr lang="en-US" sz="1550" dirty="0"/>
           </a:p>
@@ -4614,6 +5189,7 @@
         <a:solidFill>
           <a:srgbClr val="1B2230"/>
         </a:solidFill>
+        <a:effectLst/>
       </p:bgPr>
     </p:bg>
     <p:spTree>
@@ -4653,6 +5229,13 @@
           </a:solidFill>
           <a:ln/>
         </p:spPr>
+        <p:txBody>
+          <a:bodyPr/>
+          <a:lstStyle/>
+          <a:p>
+            <a:endParaRPr lang="en-GB"/>
+          </a:p>
+        </p:txBody>
       </p:sp>
       <p:sp>
         <p:nvSpPr>
@@ -4677,6 +5260,13 @@
           </a:solidFill>
           <a:ln/>
         </p:spPr>
+        <p:txBody>
+          <a:bodyPr/>
+          <a:lstStyle/>
+          <a:p>
+            <a:endParaRPr lang="en-GB"/>
+          </a:p>
+        </p:txBody>
       </p:sp>
       <p:sp>
         <p:nvSpPr>
@@ -4701,6 +5291,13 @@
           </a:solidFill>
           <a:ln/>
         </p:spPr>
+        <p:txBody>
+          <a:bodyPr/>
+          <a:lstStyle/>
+          <a:p>
+            <a:endParaRPr lang="en-GB"/>
+          </a:p>
+        </p:txBody>
       </p:sp>
       <p:sp>
         <p:nvSpPr>
@@ -4725,6 +5322,13 @@
           </a:solidFill>
           <a:ln/>
         </p:spPr>
+        <p:txBody>
+          <a:bodyPr/>
+          <a:lstStyle/>
+          <a:p>
+            <a:endParaRPr lang="en-GB"/>
+          </a:p>
+        </p:txBody>
       </p:sp>
       <p:sp>
         <p:nvSpPr>
@@ -4749,6 +5353,13 @@
           </a:solidFill>
           <a:ln/>
         </p:spPr>
+        <p:txBody>
+          <a:bodyPr/>
+          <a:lstStyle/>
+          <a:p>
+            <a:endParaRPr lang="en-GB"/>
+          </a:p>
+        </p:txBody>
       </p:sp>
       <p:sp>
         <p:nvSpPr>
@@ -4773,6 +5384,13 @@
           </a:solidFill>
           <a:ln/>
         </p:spPr>
+        <p:txBody>
+          <a:bodyPr/>
+          <a:lstStyle/>
+          <a:p>
+            <a:endParaRPr lang="en-GB"/>
+          </a:p>
+        </p:txBody>
       </p:sp>
       <p:sp>
         <p:nvSpPr>
@@ -4797,6 +5415,13 @@
           </a:solidFill>
           <a:ln/>
         </p:spPr>
+        <p:txBody>
+          <a:bodyPr/>
+          <a:lstStyle/>
+          <a:p>
+            <a:endParaRPr lang="en-GB"/>
+          </a:p>
+        </p:txBody>
       </p:sp>
       <p:sp>
         <p:nvSpPr>
@@ -4821,6 +5446,13 @@
           </a:solidFill>
           <a:ln/>
         </p:spPr>
+        <p:txBody>
+          <a:bodyPr/>
+          <a:lstStyle/>
+          <a:p>
+            <a:endParaRPr lang="en-GB"/>
+          </a:p>
+        </p:txBody>
       </p:sp>
       <p:sp>
         <p:nvSpPr>
@@ -4845,6 +5477,13 @@
           </a:solidFill>
           <a:ln/>
         </p:spPr>
+        <p:txBody>
+          <a:bodyPr/>
+          <a:lstStyle/>
+          <a:p>
+            <a:endParaRPr lang="en-GB"/>
+          </a:p>
+        </p:txBody>
       </p:sp>
       <p:sp>
         <p:nvSpPr>
@@ -4869,6 +5508,13 @@
           </a:solidFill>
           <a:ln/>
         </p:spPr>
+        <p:txBody>
+          <a:bodyPr/>
+          <a:lstStyle/>
+          <a:p>
+            <a:endParaRPr lang="en-GB"/>
+          </a:p>
+        </p:txBody>
       </p:sp>
       <p:sp>
         <p:nvSpPr>
@@ -4891,7 +5537,7 @@
           <a:bodyPr wrap="square" lIns="0" tIns="0" rIns="0" bIns="0" rtlCol="0" anchor="ctr"/>
           <a:lstStyle/>
           <a:p>
-            <a:pPr indent="0" marL="0">
+            <a:pPr marL="0" indent="0">
               <a:buNone/>
             </a:pPr>
             <a:r>
@@ -4930,7 +5576,7 @@
           <a:bodyPr wrap="square" lIns="0" tIns="0" rIns="0" bIns="0" rtlCol="0" anchor="ctr"/>
           <a:lstStyle/>
           <a:p>
-            <a:pPr indent="0" marL="0">
+            <a:pPr marL="0" indent="0">
               <a:buNone/>
             </a:pPr>
             <a:r>
@@ -4969,7 +5615,7 @@
           <a:bodyPr wrap="square" lIns="0" tIns="0" rIns="0" bIns="0" rtlCol="0" anchor="ctr"/>
           <a:lstStyle/>
           <a:p>
-            <a:pPr indent="0" marL="0">
+            <a:pPr marL="0" indent="0">
               <a:buNone/>
             </a:pPr>
             <a:r>
@@ -5010,6 +5656,13 @@
           </a:solidFill>
           <a:ln/>
         </p:spPr>
+        <p:txBody>
+          <a:bodyPr/>
+          <a:lstStyle/>
+          <a:p>
+            <a:endParaRPr lang="en-GB"/>
+          </a:p>
+        </p:txBody>
       </p:sp>
       <p:sp>
         <p:nvSpPr>
@@ -5034,6 +5687,13 @@
           </a:solidFill>
           <a:ln/>
         </p:spPr>
+        <p:txBody>
+          <a:bodyPr/>
+          <a:lstStyle/>
+          <a:p>
+            <a:endParaRPr lang="en-GB"/>
+          </a:p>
+        </p:txBody>
       </p:sp>
       <p:sp>
         <p:nvSpPr>
@@ -5058,6 +5718,13 @@
           </a:solidFill>
           <a:ln/>
         </p:spPr>
+        <p:txBody>
+          <a:bodyPr/>
+          <a:lstStyle/>
+          <a:p>
+            <a:endParaRPr lang="en-GB"/>
+          </a:p>
+        </p:txBody>
       </p:sp>
       <p:sp>
         <p:nvSpPr>
@@ -5082,6 +5749,13 @@
           </a:solidFill>
           <a:ln/>
         </p:spPr>
+        <p:txBody>
+          <a:bodyPr/>
+          <a:lstStyle/>
+          <a:p>
+            <a:endParaRPr lang="en-GB"/>
+          </a:p>
+        </p:txBody>
       </p:sp>
       <p:sp>
         <p:nvSpPr>
@@ -5106,6 +5780,13 @@
           </a:solidFill>
           <a:ln/>
         </p:spPr>
+        <p:txBody>
+          <a:bodyPr/>
+          <a:lstStyle/>
+          <a:p>
+            <a:endParaRPr lang="en-GB"/>
+          </a:p>
+        </p:txBody>
       </p:sp>
       <p:sp>
         <p:nvSpPr>
@@ -5130,6 +5811,13 @@
           </a:solidFill>
           <a:ln/>
         </p:spPr>
+        <p:txBody>
+          <a:bodyPr/>
+          <a:lstStyle/>
+          <a:p>
+            <a:endParaRPr lang="en-GB"/>
+          </a:p>
+        </p:txBody>
       </p:sp>
       <p:sp>
         <p:nvSpPr>
@@ -5154,6 +5842,13 @@
           </a:solidFill>
           <a:ln/>
         </p:spPr>
+        <p:txBody>
+          <a:bodyPr/>
+          <a:lstStyle/>
+          <a:p>
+            <a:endParaRPr lang="en-GB"/>
+          </a:p>
+        </p:txBody>
       </p:sp>
       <p:sp>
         <p:nvSpPr>
@@ -5178,6 +5873,13 @@
           </a:solidFill>
           <a:ln/>
         </p:spPr>
+        <p:txBody>
+          <a:bodyPr/>
+          <a:lstStyle/>
+          <a:p>
+            <a:endParaRPr lang="en-GB"/>
+          </a:p>
+        </p:txBody>
       </p:sp>
       <p:sp>
         <p:nvSpPr>
@@ -5202,6 +5904,13 @@
           </a:solidFill>
           <a:ln/>
         </p:spPr>
+        <p:txBody>
+          <a:bodyPr/>
+          <a:lstStyle/>
+          <a:p>
+            <a:endParaRPr lang="en-GB"/>
+          </a:p>
+        </p:txBody>
       </p:sp>
       <p:sp>
         <p:nvSpPr>
@@ -5226,6 +5935,13 @@
           </a:solidFill>
           <a:ln/>
         </p:spPr>
+        <p:txBody>
+          <a:bodyPr/>
+          <a:lstStyle/>
+          <a:p>
+            <a:endParaRPr lang="en-GB"/>
+          </a:p>
+        </p:txBody>
       </p:sp>
     </p:spTree>
   </p:cSld>
@@ -5528,4 +6244,319 @@
     </a:ext>
   </a:extLst>
 </a:theme>
+</file>
+
+<file path=ppt/theme/theme2.xml><?xml version="1.0" encoding="utf-8"?>
+<a:theme xmlns:a="http://schemas.openxmlformats.org/drawingml/2006/main" name="Office Theme">
+  <a:themeElements>
+    <a:clrScheme name="Office">
+      <a:dk1>
+        <a:sysClr val="windowText" lastClr="000000"/>
+      </a:dk1>
+      <a:lt1>
+        <a:sysClr val="window" lastClr="FFFFFF"/>
+      </a:lt1>
+      <a:dk2>
+        <a:srgbClr val="0E2841"/>
+      </a:dk2>
+      <a:lt2>
+        <a:srgbClr val="E8E8E8"/>
+      </a:lt2>
+      <a:accent1>
+        <a:srgbClr val="156082"/>
+      </a:accent1>
+      <a:accent2>
+        <a:srgbClr val="E97132"/>
+      </a:accent2>
+      <a:accent3>
+        <a:srgbClr val="196B24"/>
+      </a:accent3>
+      <a:accent4>
+        <a:srgbClr val="0F9ED5"/>
+      </a:accent4>
+      <a:accent5>
+        <a:srgbClr val="A02B93"/>
+      </a:accent5>
+      <a:accent6>
+        <a:srgbClr val="4EA72E"/>
+      </a:accent6>
+      <a:hlink>
+        <a:srgbClr val="467886"/>
+      </a:hlink>
+      <a:folHlink>
+        <a:srgbClr val="96607D"/>
+      </a:folHlink>
+    </a:clrScheme>
+    <a:fontScheme name="Office">
+      <a:majorFont>
+        <a:latin typeface="Aptos Display" panose="02110004020202020204"/>
+        <a:ea typeface=""/>
+        <a:cs typeface=""/>
+        <a:font script="Jpan" typeface="游ゴシック Light"/>
+        <a:font script="Hang" typeface="맑은 고딕"/>
+        <a:font script="Hans" typeface="等线 Light"/>
+        <a:font script="Hant" typeface="新細明體"/>
+        <a:font script="Arab" typeface="Times New Roman"/>
+        <a:font script="Hebr" typeface="Times New Roman"/>
+        <a:font script="Thai" typeface="Angsana New"/>
+        <a:font script="Ethi" typeface="Nyala"/>
+        <a:font script="Beng" typeface="Vrinda"/>
+        <a:font script="Gujr" typeface="Shruti"/>
+        <a:font script="Khmr" typeface="MoolBoran"/>
+        <a:font script="Knda" typeface="Tunga"/>
+        <a:font script="Guru" typeface="Raavi"/>
+        <a:font script="Cans" typeface="Euphemia"/>
+        <a:font script="Cher" typeface="Plantagenet Cherokee"/>
+        <a:font script="Yiii" typeface="Microsoft Yi Baiti"/>
+        <a:font script="Tibt" typeface="Microsoft Himalaya"/>
+        <a:font script="Thaa" typeface="MV Boli"/>
+        <a:font script="Deva" typeface="Mangal"/>
+        <a:font script="Telu" typeface="Gautami"/>
+        <a:font script="Taml" typeface="Latha"/>
+        <a:font script="Syrc" typeface="Estrangelo Edessa"/>
+        <a:font script="Orya" typeface="Kalinga"/>
+        <a:font script="Mlym" typeface="Kartika"/>
+        <a:font script="Laoo" typeface="DokChampa"/>
+        <a:font script="Sinh" typeface="Iskoola Pota"/>
+        <a:font script="Mong" typeface="Mongolian Baiti"/>
+        <a:font script="Viet" typeface="Times New Roman"/>
+        <a:font script="Uigh" typeface="Microsoft Uighur"/>
+        <a:font script="Geor" typeface="Sylfaen"/>
+        <a:font script="Armn" typeface="Arial"/>
+        <a:font script="Bugi" typeface="Leelawadee UI"/>
+        <a:font script="Bopo" typeface="Microsoft JhengHei"/>
+        <a:font script="Java" typeface="Javanese Text"/>
+        <a:font script="Lisu" typeface="Segoe UI"/>
+        <a:font script="Mymr" typeface="Myanmar Text"/>
+        <a:font script="Nkoo" typeface="Ebrima"/>
+        <a:font script="Olck" typeface="Nirmala UI"/>
+        <a:font script="Osma" typeface="Ebrima"/>
+        <a:font script="Phag" typeface="Phagspa"/>
+        <a:font script="Syrn" typeface="Estrangelo Edessa"/>
+        <a:font script="Syrj" typeface="Estrangelo Edessa"/>
+        <a:font script="Syre" typeface="Estrangelo Edessa"/>
+        <a:font script="Sora" typeface="Nirmala UI"/>
+        <a:font script="Tale" typeface="Microsoft Tai Le"/>
+        <a:font script="Talu" typeface="Microsoft New Tai Lue"/>
+        <a:font script="Tfng" typeface="Ebrima"/>
+      </a:majorFont>
+      <a:minorFont>
+        <a:latin typeface="Aptos" panose="02110004020202020204"/>
+        <a:ea typeface=""/>
+        <a:cs typeface=""/>
+        <a:font script="Jpan" typeface="游ゴシック"/>
+        <a:font script="Hang" typeface="맑은 고딕"/>
+        <a:font script="Hans" typeface="等线"/>
+        <a:font script="Hant" typeface="新細明體"/>
+        <a:font script="Arab" typeface="Arial"/>
+        <a:font script="Hebr" typeface="Arial"/>
+        <a:font script="Thai" typeface="Cordia New"/>
+        <a:font script="Ethi" typeface="Nyala"/>
+        <a:font script="Beng" typeface="Vrinda"/>
+        <a:font script="Gujr" typeface="Shruti"/>
+        <a:font script="Khmr" typeface="DaunPenh"/>
+        <a:font script="Knda" typeface="Tunga"/>
+        <a:font script="Guru" typeface="Raavi"/>
+        <a:font script="Cans" typeface="Euphemia"/>
+        <a:font script="Cher" typeface="Plantagenet Cherokee"/>
+        <a:font script="Yiii" typeface="Microsoft Yi Baiti"/>
+        <a:font script="Tibt" typeface="Microsoft Himalaya"/>
+        <a:font script="Thaa" typeface="MV Boli"/>
+        <a:font script="Deva" typeface="Mangal"/>
+        <a:font script="Telu" typeface="Gautami"/>
+        <a:font script="Taml" typeface="Latha"/>
+        <a:font script="Syrc" typeface="Estrangelo Edessa"/>
+        <a:font script="Orya" typeface="Kalinga"/>
+        <a:font script="Mlym" typeface="Kartika"/>
+        <a:font script="Laoo" typeface="DokChampa"/>
+        <a:font script="Sinh" typeface="Iskoola Pota"/>
+        <a:font script="Mong" typeface="Mongolian Baiti"/>
+        <a:font script="Viet" typeface="Arial"/>
+        <a:font script="Uigh" typeface="Microsoft Uighur"/>
+        <a:font script="Geor" typeface="Sylfaen"/>
+        <a:font script="Armn" typeface="Arial"/>
+        <a:font script="Bugi" typeface="Leelawadee UI"/>
+        <a:font script="Bopo" typeface="Microsoft JhengHei"/>
+        <a:font script="Java" typeface="Javanese Text"/>
+        <a:font script="Lisu" typeface="Segoe UI"/>
+        <a:font script="Mymr" typeface="Myanmar Text"/>
+        <a:font script="Nkoo" typeface="Ebrima"/>
+        <a:font script="Olck" typeface="Nirmala UI"/>
+        <a:font script="Osma" typeface="Ebrima"/>
+        <a:font script="Phag" typeface="Phagspa"/>
+        <a:font script="Syrn" typeface="Estrangelo Edessa"/>
+        <a:font script="Syrj" typeface="Estrangelo Edessa"/>
+        <a:font script="Syre" typeface="Estrangelo Edessa"/>
+        <a:font script="Sora" typeface="Nirmala UI"/>
+        <a:font script="Tale" typeface="Microsoft Tai Le"/>
+        <a:font script="Talu" typeface="Microsoft New Tai Lue"/>
+        <a:font script="Tfng" typeface="Ebrima"/>
+      </a:minorFont>
+    </a:fontScheme>
+    <a:fmtScheme name="Office">
+      <a:fillStyleLst>
+        <a:solidFill>
+          <a:schemeClr val="phClr"/>
+        </a:solidFill>
+        <a:gradFill rotWithShape="1">
+          <a:gsLst>
+            <a:gs pos="0">
+              <a:schemeClr val="phClr">
+                <a:lumMod val="110000"/>
+                <a:satMod val="105000"/>
+                <a:tint val="67000"/>
+              </a:schemeClr>
+            </a:gs>
+            <a:gs pos="50000">
+              <a:schemeClr val="phClr">
+                <a:lumMod val="105000"/>
+                <a:satMod val="103000"/>
+                <a:tint val="73000"/>
+              </a:schemeClr>
+            </a:gs>
+            <a:gs pos="100000">
+              <a:schemeClr val="phClr">
+                <a:lumMod val="105000"/>
+                <a:satMod val="109000"/>
+                <a:tint val="81000"/>
+              </a:schemeClr>
+            </a:gs>
+          </a:gsLst>
+          <a:lin ang="5400000" scaled="0"/>
+        </a:gradFill>
+        <a:gradFill rotWithShape="1">
+          <a:gsLst>
+            <a:gs pos="0">
+              <a:schemeClr val="phClr">
+                <a:satMod val="103000"/>
+                <a:lumMod val="102000"/>
+                <a:tint val="94000"/>
+              </a:schemeClr>
+            </a:gs>
+            <a:gs pos="50000">
+              <a:schemeClr val="phClr">
+                <a:satMod val="110000"/>
+                <a:lumMod val="100000"/>
+                <a:shade val="100000"/>
+              </a:schemeClr>
+            </a:gs>
+            <a:gs pos="100000">
+              <a:schemeClr val="phClr">
+                <a:lumMod val="99000"/>
+                <a:satMod val="120000"/>
+                <a:shade val="78000"/>
+              </a:schemeClr>
+            </a:gs>
+          </a:gsLst>
+          <a:lin ang="5400000" scaled="0"/>
+        </a:gradFill>
+      </a:fillStyleLst>
+      <a:lnStyleLst>
+        <a:ln w="12700" cap="flat" cmpd="sng" algn="ctr">
+          <a:solidFill>
+            <a:schemeClr val="phClr"/>
+          </a:solidFill>
+          <a:prstDash val="solid"/>
+          <a:miter lim="800000"/>
+        </a:ln>
+        <a:ln w="19050" cap="flat" cmpd="sng" algn="ctr">
+          <a:solidFill>
+            <a:schemeClr val="phClr"/>
+          </a:solidFill>
+          <a:prstDash val="solid"/>
+          <a:miter lim="800000"/>
+        </a:ln>
+        <a:ln w="25400" cap="flat" cmpd="sng" algn="ctr">
+          <a:solidFill>
+            <a:schemeClr val="phClr"/>
+          </a:solidFill>
+          <a:prstDash val="solid"/>
+          <a:miter lim="800000"/>
+        </a:ln>
+      </a:lnStyleLst>
+      <a:effectStyleLst>
+        <a:effectStyle>
+          <a:effectLst/>
+        </a:effectStyle>
+        <a:effectStyle>
+          <a:effectLst/>
+        </a:effectStyle>
+        <a:effectStyle>
+          <a:effectLst>
+            <a:outerShdw blurRad="57150" dist="19050" dir="5400000" algn="ctr" rotWithShape="0">
+              <a:srgbClr val="000000">
+                <a:alpha val="63000"/>
+              </a:srgbClr>
+            </a:outerShdw>
+          </a:effectLst>
+        </a:effectStyle>
+      </a:effectStyleLst>
+      <a:bgFillStyleLst>
+        <a:solidFill>
+          <a:schemeClr val="phClr"/>
+        </a:solidFill>
+        <a:solidFill>
+          <a:schemeClr val="phClr">
+            <a:tint val="95000"/>
+            <a:satMod val="170000"/>
+          </a:schemeClr>
+        </a:solidFill>
+        <a:gradFill rotWithShape="1">
+          <a:gsLst>
+            <a:gs pos="0">
+              <a:schemeClr val="phClr">
+                <a:tint val="93000"/>
+                <a:satMod val="150000"/>
+                <a:shade val="98000"/>
+                <a:lumMod val="102000"/>
+              </a:schemeClr>
+            </a:gs>
+            <a:gs pos="50000">
+              <a:schemeClr val="phClr">
+                <a:tint val="98000"/>
+                <a:satMod val="130000"/>
+                <a:shade val="90000"/>
+                <a:lumMod val="103000"/>
+              </a:schemeClr>
+            </a:gs>
+            <a:gs pos="100000">
+              <a:schemeClr val="phClr">
+                <a:shade val="63000"/>
+                <a:satMod val="120000"/>
+              </a:schemeClr>
+            </a:gs>
+          </a:gsLst>
+          <a:lin ang="5400000" scaled="0"/>
+        </a:gradFill>
+      </a:bgFillStyleLst>
+    </a:fmtScheme>
+  </a:themeElements>
+  <a:objectDefaults>
+    <a:lnDef>
+      <a:spPr/>
+      <a:bodyPr/>
+      <a:lstStyle/>
+      <a:style>
+        <a:lnRef idx="2">
+          <a:schemeClr val="accent1"/>
+        </a:lnRef>
+        <a:fillRef idx="0">
+          <a:schemeClr val="accent1"/>
+        </a:fillRef>
+        <a:effectRef idx="1">
+          <a:schemeClr val="accent1"/>
+        </a:effectRef>
+        <a:fontRef idx="minor">
+          <a:schemeClr val="tx1"/>
+        </a:fontRef>
+      </a:style>
+    </a:lnDef>
+  </a:objectDefaults>
+  <a:extraClrSchemeLst/>
+  <a:extLst>
+    <a:ext uri="{05A4C25C-085E-4340-85A3-A5531E510DB2}">
+      <thm15:themeFamily xmlns:thm15="http://schemas.microsoft.com/office/thememl/2012/main" name="Office Theme" id="{2E142A2C-CD16-42D6-873A-C26D2A0506FA}" vid="{1BDDFF52-6CD6-40A5-AB3C-68EB2F1E4D0A}"/>
+    </a:ext>
+  </a:extLst>
+</a:theme>
 </file>
--- a/Podcast-Studio-Presentation.pptx
+++ b/Podcast-Studio-Presentation.pptx
@@ -5148,13 +5148,15 @@
               </a:rPr>
               <a:t>Choose-the-length of podcast (1m /3m)</a:t>
             </a:r>
-            <a:endParaRPr lang="en-US" sz="1550" dirty="0"/>
           </a:p>
           <a:p>
             <a:pPr marL="190500" indent="-190500">
               <a:lnSpc>
                 <a:spcPct val="105000"/>
               </a:lnSpc>
+              <a:spcAft>
+                <a:spcPts val="1200"/>
+              </a:spcAft>
               <a:buSzPct val="100000"/>
               <a:buChar char="•"/>
             </a:pPr>
@@ -5164,10 +5166,9 @@
                   <a:srgbClr val="FFFFFF"/>
                 </a:solidFill>
                 <a:latin typeface="Calibri" pitchFamily="34" charset="0"/>
-                <a:ea typeface="Calibri" pitchFamily="34" charset="-122"/>
                 <a:cs typeface="Calibri" pitchFamily="34" charset="-120"/>
               </a:rPr>
-              <a:t>Deploy online so anyone can use it</a:t>
+              <a:t>Deploy as public utility</a:t>
             </a:r>
             <a:endParaRPr lang="en-US" sz="1550" dirty="0"/>
           </a:p>

--- a/Podcast-Studio-Presentation.pptx
+++ b/Podcast-Studio-Presentation.pptx
@@ -1044,7 +1044,7 @@
               <a:t>"Next up: a </a:t>
             </a:r>
             <a:r>
-              <a:rPr lang="en-GB" sz="1200" b="1" i="0" kern="1200" dirty="0">
+              <a:rPr lang="en-GB" sz="1200" b="1" i="0" kern="1200" dirty="0" err="1">
                 <a:solidFill>
                   <a:schemeClr val="tx1"/>
                 </a:solidFill>
@@ -1053,7 +1053,19 @@
                 <a:ea typeface="+mn-ea"/>
                 <a:cs typeface="+mn-cs"/>
               </a:rPr>
-              <a:t>download button</a:t>
+              <a:t>Monolgue</a:t>
+            </a:r>
+            <a:r>
+              <a:rPr lang="en-GB" sz="1200" b="1" i="0" kern="1200" dirty="0">
+                <a:solidFill>
+                  <a:schemeClr val="tx1"/>
+                </a:solidFill>
+                <a:effectLst/>
+                <a:latin typeface="+mn-lt"/>
+                <a:ea typeface="+mn-ea"/>
+                <a:cs typeface="+mn-cs"/>
+              </a:rPr>
+              <a:t>/dialogue options for listeners</a:t>
             </a:r>
             <a:r>
               <a:rPr lang="en-GB" sz="1200" b="0" i="0" kern="1200" dirty="0">
@@ -2012,7 +2024,7 @@
                 <a:ea typeface="Cambria" pitchFamily="34" charset="-122"/>
                 <a:cs typeface="Cambria" pitchFamily="34" charset="-120"/>
               </a:rPr>
-              <a:t>Daily Lesson Recapper</a:t>
+              <a:t>Content Recapper</a:t>
             </a:r>
             <a:endParaRPr lang="en-US" sz="2800" dirty="0"/>
           </a:p>
@@ -5148,15 +5160,13 @@
               </a:rPr>
               <a:t>Choose-the-length of podcast (1m /3m)</a:t>
             </a:r>
+            <a:endParaRPr lang="en-US" sz="1550" dirty="0"/>
           </a:p>
           <a:p>
             <a:pPr marL="190500" indent="-190500">
               <a:lnSpc>
                 <a:spcPct val="105000"/>
               </a:lnSpc>
-              <a:spcAft>
-                <a:spcPts val="1200"/>
-              </a:spcAft>
               <a:buSzPct val="100000"/>
               <a:buChar char="•"/>
             </a:pPr>
@@ -5166,6 +5176,7 @@
                   <a:srgbClr val="FFFFFF"/>
                 </a:solidFill>
                 <a:latin typeface="Calibri" pitchFamily="34" charset="0"/>
+                <a:ea typeface="Calibri" pitchFamily="34" charset="-122"/>
                 <a:cs typeface="Calibri" pitchFamily="34" charset="-120"/>
               </a:rPr>
               <a:t>Deploy as public utility</a:t>

--- a/Podcast-Studio-Presentation.pptx
+++ b/Podcast-Studio-Presentation.pptx
@@ -463,6 +463,745 @@
             <a:r>
               <a:rPr lang="en-US" dirty="0"/>
               <a:t>SPEAKER 2 — Live demo (~3.5 min). Keep to pick-a-saved-lesson. If Wi-Fi/API stalls, play a pre-generated mp3 from output/ and keep talking.</a:t>
+            </a:r>
+          </a:p>
+          <a:p>
+            <a:endParaRPr lang="en-US" dirty="0"/>
+          </a:p>
+          <a:p>
+            <a:r>
+              <a:rPr lang="en-US" sz="1200" b="1" i="0" kern="1200" dirty="0">
+                <a:solidFill>
+                  <a:schemeClr val="tx1"/>
+                </a:solidFill>
+                <a:effectLst/>
+                <a:latin typeface="+mn-lt"/>
+                <a:ea typeface="+mn-ea"/>
+                <a:cs typeface="+mn-cs"/>
+              </a:rPr>
+              <a:t>Before you start:</a:t>
+            </a:r>
+            <a:r>
+              <a:rPr lang="en-US" sz="1200" b="0" i="0" kern="1200" dirty="0">
+                <a:solidFill>
+                  <a:schemeClr val="tx1"/>
+                </a:solidFill>
+                <a:effectLst/>
+                <a:latin typeface="+mn-lt"/>
+                <a:ea typeface="+mn-ea"/>
+                <a:cs typeface="+mn-cs"/>
+              </a:rPr>
+              <a:t> app already open at </a:t>
+            </a:r>
+            <a:r>
+              <a:rPr lang="en-US" sz="1020" b="0" i="0" kern="1200" dirty="0">
+                <a:solidFill>
+                  <a:schemeClr val="tx1"/>
+                </a:solidFill>
+                <a:effectLst/>
+                <a:latin typeface="+mn-lt"/>
+                <a:ea typeface="+mn-ea"/>
+                <a:cs typeface="+mn-cs"/>
+              </a:rPr>
+              <a:t>http://localhost:7860</a:t>
+            </a:r>
+            <a:r>
+              <a:rPr lang="en-US" sz="1200" b="0" i="0" kern="1200" dirty="0">
+                <a:solidFill>
+                  <a:schemeClr val="tx1"/>
+                </a:solidFill>
+                <a:effectLst/>
+                <a:latin typeface="+mn-lt"/>
+                <a:ea typeface="+mn-ea"/>
+                <a:cs typeface="+mn-cs"/>
+              </a:rPr>
+              <a:t>, Wi-Fi checked, a backup </a:t>
+            </a:r>
+            <a:r>
+              <a:rPr lang="en-US" sz="1020" b="0" i="0" kern="1200" dirty="0">
+                <a:solidFill>
+                  <a:schemeClr val="tx1"/>
+                </a:solidFill>
+                <a:effectLst/>
+                <a:latin typeface="+mn-lt"/>
+                <a:ea typeface="+mn-ea"/>
+                <a:cs typeface="+mn-cs"/>
+              </a:rPr>
+              <a:t>.mp3</a:t>
+            </a:r>
+            <a:r>
+              <a:rPr lang="en-US" sz="1200" b="0" i="0" kern="1200" dirty="0">
+                <a:solidFill>
+                  <a:schemeClr val="tx1"/>
+                </a:solidFill>
+                <a:effectLst/>
+                <a:latin typeface="+mn-lt"/>
+                <a:ea typeface="+mn-ea"/>
+                <a:cs typeface="+mn-cs"/>
+              </a:rPr>
+              <a:t> ready.</a:t>
+            </a:r>
+          </a:p>
+          <a:p>
+            <a:endParaRPr lang="en-US" sz="1200" b="1" i="0" kern="1200" dirty="0">
+              <a:solidFill>
+                <a:schemeClr val="tx1"/>
+              </a:solidFill>
+              <a:effectLst/>
+              <a:latin typeface="+mn-lt"/>
+              <a:ea typeface="+mn-ea"/>
+              <a:cs typeface="+mn-cs"/>
+            </a:endParaRPr>
+          </a:p>
+          <a:p>
+            <a:r>
+              <a:rPr lang="en-US" sz="1200" b="0" i="0" kern="1200" dirty="0">
+                <a:solidFill>
+                  <a:schemeClr val="tx1"/>
+                </a:solidFill>
+                <a:effectLst/>
+                <a:latin typeface="+mn-lt"/>
+                <a:ea typeface="+mn-ea"/>
+                <a:cs typeface="+mn-cs"/>
+              </a:rPr>
+              <a:t>“This is the Content Recapper app. On the left I </a:t>
+            </a:r>
+            <a:r>
+              <a:rPr lang="en-US" sz="1200" b="1" i="0" kern="1200" dirty="0">
+                <a:solidFill>
+                  <a:schemeClr val="tx1"/>
+                </a:solidFill>
+                <a:effectLst/>
+                <a:latin typeface="+mn-lt"/>
+                <a:ea typeface="+mn-ea"/>
+                <a:cs typeface="+mn-cs"/>
+              </a:rPr>
+              <a:t>pick a saved lesson</a:t>
+            </a:r>
+            <a:r>
+              <a:rPr lang="en-US" sz="1200" b="0" i="0" kern="1200" dirty="0">
+                <a:solidFill>
+                  <a:schemeClr val="tx1"/>
+                </a:solidFill>
+                <a:effectLst/>
+                <a:latin typeface="+mn-lt"/>
+                <a:ea typeface="+mn-ea"/>
+                <a:cs typeface="+mn-cs"/>
+              </a:rPr>
+              <a:t>, provide a public non-password-gated </a:t>
+            </a:r>
+            <a:r>
+              <a:rPr lang="en-US" sz="1200" b="0" i="0" kern="1200" dirty="0" err="1">
+                <a:solidFill>
+                  <a:schemeClr val="tx1"/>
+                </a:solidFill>
+                <a:effectLst/>
+                <a:latin typeface="+mn-lt"/>
+                <a:ea typeface="+mn-ea"/>
+                <a:cs typeface="+mn-cs"/>
+              </a:rPr>
+              <a:t>url</a:t>
+            </a:r>
+            <a:r>
+              <a:rPr lang="en-US" sz="1200" b="0" i="0" kern="1200" dirty="0">
+                <a:solidFill>
+                  <a:schemeClr val="tx1"/>
+                </a:solidFill>
+                <a:effectLst/>
+                <a:latin typeface="+mn-lt"/>
+                <a:ea typeface="+mn-ea"/>
+                <a:cs typeface="+mn-cs"/>
+              </a:rPr>
+              <a:t> or upload a compatible input file format”</a:t>
+            </a:r>
+          </a:p>
+          <a:p>
+            <a:endParaRPr lang="en-US" sz="1200" b="0" i="0" kern="1200" dirty="0">
+              <a:solidFill>
+                <a:schemeClr val="tx1"/>
+              </a:solidFill>
+              <a:effectLst/>
+              <a:latin typeface="+mn-lt"/>
+              <a:ea typeface="+mn-ea"/>
+              <a:cs typeface="+mn-cs"/>
+            </a:endParaRPr>
+          </a:p>
+          <a:p>
+            <a:r>
+              <a:rPr lang="en-US" sz="1200" b="0" i="0" kern="1200" dirty="0">
+                <a:solidFill>
+                  <a:schemeClr val="tx1"/>
+                </a:solidFill>
+                <a:effectLst/>
+                <a:latin typeface="+mn-lt"/>
+                <a:ea typeface="+mn-ea"/>
+                <a:cs typeface="+mn-cs"/>
+              </a:rPr>
+              <a:t>Click </a:t>
+            </a:r>
+            <a:r>
+              <a:rPr lang="en-US" sz="1200" b="1" i="0" kern="1200" dirty="0">
+                <a:solidFill>
+                  <a:schemeClr val="tx1"/>
+                </a:solidFill>
+                <a:effectLst/>
+                <a:latin typeface="+mn-lt"/>
+                <a:ea typeface="+mn-ea"/>
+                <a:cs typeface="+mn-cs"/>
+              </a:rPr>
+              <a:t>Generate recap podcast</a:t>
+            </a:r>
+            <a:r>
+              <a:rPr lang="en-US" sz="1200" b="0" i="0" kern="1200" dirty="0">
+                <a:solidFill>
+                  <a:schemeClr val="tx1"/>
+                </a:solidFill>
+                <a:effectLst/>
+                <a:latin typeface="+mn-lt"/>
+                <a:ea typeface="+mn-ea"/>
+                <a:cs typeface="+mn-cs"/>
+              </a:rPr>
+              <a:t>.</a:t>
+            </a:r>
+          </a:p>
+          <a:p>
+            <a:endParaRPr lang="en-US" sz="1200" b="0" i="0" kern="1200" dirty="0">
+              <a:solidFill>
+                <a:schemeClr val="tx1"/>
+              </a:solidFill>
+              <a:effectLst/>
+              <a:latin typeface="+mn-lt"/>
+              <a:ea typeface="+mn-ea"/>
+              <a:cs typeface="+mn-cs"/>
+            </a:endParaRPr>
+          </a:p>
+          <a:p>
+            <a:r>
+              <a:rPr lang="en-US" sz="1200" b="0" i="0" kern="1200" dirty="0">
+                <a:solidFill>
+                  <a:schemeClr val="tx1"/>
+                </a:solidFill>
+                <a:effectLst/>
+                <a:latin typeface="+mn-lt"/>
+                <a:ea typeface="+mn-ea"/>
+                <a:cs typeface="+mn-cs"/>
+              </a:rPr>
+              <a:t>As it runs, narrate </a:t>
+            </a:r>
+            <a:r>
+              <a:rPr lang="en-US" sz="1200" b="1" i="0" kern="1200" dirty="0">
+                <a:solidFill>
+                  <a:schemeClr val="tx1"/>
+                </a:solidFill>
+                <a:effectLst/>
+                <a:latin typeface="+mn-lt"/>
+                <a:ea typeface="+mn-ea"/>
+                <a:cs typeface="+mn-cs"/>
+              </a:rPr>
+              <a:t>one or two technical choices</a:t>
+            </a:r>
+            <a:r>
+              <a:rPr lang="en-US" sz="1200" b="0" i="0" kern="1200" dirty="0">
+                <a:solidFill>
+                  <a:schemeClr val="tx1"/>
+                </a:solidFill>
+                <a:effectLst/>
+                <a:latin typeface="+mn-lt"/>
+                <a:ea typeface="+mn-ea"/>
+                <a:cs typeface="+mn-cs"/>
+              </a:rPr>
+              <a:t> </a:t>
+            </a:r>
+            <a:r>
+              <a:rPr lang="en-US" sz="1200" b="0" i="1" kern="1200" dirty="0">
+                <a:solidFill>
+                  <a:schemeClr val="tx1"/>
+                </a:solidFill>
+                <a:effectLst/>
+                <a:latin typeface="+mn-lt"/>
+                <a:ea typeface="+mn-ea"/>
+                <a:cs typeface="+mn-cs"/>
+              </a:rPr>
+              <a:t>(this is graded)</a:t>
+            </a:r>
+            <a:r>
+              <a:rPr lang="en-US" sz="1200" b="0" i="0" kern="1200" dirty="0">
+                <a:solidFill>
+                  <a:schemeClr val="tx1"/>
+                </a:solidFill>
+                <a:effectLst/>
+                <a:latin typeface="+mn-lt"/>
+                <a:ea typeface="+mn-ea"/>
+                <a:cs typeface="+mn-cs"/>
+              </a:rPr>
+              <a:t>:</a:t>
+            </a:r>
+          </a:p>
+          <a:p>
+            <a:pPr lvl="1"/>
+            <a:r>
+              <a:rPr lang="en-US" sz="1200" b="0" i="0" kern="1200" dirty="0">
+                <a:solidFill>
+                  <a:schemeClr val="tx1"/>
+                </a:solidFill>
+                <a:effectLst/>
+                <a:latin typeface="+mn-lt"/>
+                <a:ea typeface="+mn-ea"/>
+                <a:cs typeface="+mn-cs"/>
+              </a:rPr>
+              <a:t>"The lesson text goes to an </a:t>
+            </a:r>
+            <a:r>
+              <a:rPr lang="en-US" sz="1200" b="1" i="0" kern="1200" dirty="0">
+                <a:solidFill>
+                  <a:schemeClr val="tx1"/>
+                </a:solidFill>
+                <a:effectLst/>
+                <a:latin typeface="+mn-lt"/>
+                <a:ea typeface="+mn-ea"/>
+                <a:cs typeface="+mn-cs"/>
+              </a:rPr>
+              <a:t>LLM that returns a structured result</a:t>
+            </a:r>
+            <a:r>
+              <a:rPr lang="en-US" sz="1200" b="0" i="0" kern="1200" dirty="0">
+                <a:solidFill>
+                  <a:schemeClr val="tx1"/>
+                </a:solidFill>
+                <a:effectLst/>
+                <a:latin typeface="+mn-lt"/>
+                <a:ea typeface="+mn-ea"/>
+                <a:cs typeface="+mn-cs"/>
+              </a:rPr>
+              <a:t> — title, key points, and a spoken script — using a </a:t>
+            </a:r>
+            <a:r>
+              <a:rPr lang="en-US" sz="1200" b="1" i="0" kern="1200" dirty="0">
+                <a:solidFill>
+                  <a:schemeClr val="tx1"/>
+                </a:solidFill>
+                <a:effectLst/>
+                <a:latin typeface="+mn-lt"/>
+                <a:ea typeface="+mn-ea"/>
+                <a:cs typeface="+mn-cs"/>
+              </a:rPr>
+              <a:t>schema</a:t>
+            </a:r>
+            <a:r>
+              <a:rPr lang="en-US" sz="1200" b="0" i="0" kern="1200" dirty="0">
+                <a:solidFill>
+                  <a:schemeClr val="tx1"/>
+                </a:solidFill>
+                <a:effectLst/>
+                <a:latin typeface="+mn-lt"/>
+                <a:ea typeface="+mn-ea"/>
+                <a:cs typeface="+mn-cs"/>
+              </a:rPr>
+              <a:t>, so the output is always the right shape and can't drift into broken formatting."</a:t>
+            </a:r>
+          </a:p>
+          <a:p>
+            <a:pPr lvl="1"/>
+            <a:r>
+              <a:rPr lang="en-US" sz="1200" b="0" i="0" kern="1200" dirty="0">
+                <a:solidFill>
+                  <a:schemeClr val="tx1"/>
+                </a:solidFill>
+                <a:effectLst/>
+                <a:latin typeface="+mn-lt"/>
+                <a:ea typeface="+mn-ea"/>
+                <a:cs typeface="+mn-cs"/>
+              </a:rPr>
+              <a:t>"Then </a:t>
+            </a:r>
+            <a:r>
+              <a:rPr lang="en-US" sz="1200" b="1" i="0" kern="1200" dirty="0">
+                <a:solidFill>
+                  <a:schemeClr val="tx1"/>
+                </a:solidFill>
+                <a:effectLst/>
+                <a:latin typeface="+mn-lt"/>
+                <a:ea typeface="+mn-ea"/>
+                <a:cs typeface="+mn-cs"/>
+              </a:rPr>
+              <a:t>OpenAI text-to-speech</a:t>
+            </a:r>
+            <a:r>
+              <a:rPr lang="en-US" sz="1200" b="0" i="0" kern="1200" dirty="0">
+                <a:solidFill>
+                  <a:schemeClr val="tx1"/>
+                </a:solidFill>
+                <a:effectLst/>
+                <a:latin typeface="+mn-lt"/>
+                <a:ea typeface="+mn-ea"/>
+                <a:cs typeface="+mn-cs"/>
+              </a:rPr>
+              <a:t> reads that script back as audio."</a:t>
+            </a:r>
+          </a:p>
+          <a:p>
+            <a:endParaRPr lang="en-US" sz="1200" b="0" i="0" kern="1200" dirty="0">
+              <a:solidFill>
+                <a:schemeClr val="tx1"/>
+              </a:solidFill>
+              <a:effectLst/>
+              <a:latin typeface="+mn-lt"/>
+              <a:ea typeface="+mn-ea"/>
+              <a:cs typeface="+mn-cs"/>
+            </a:endParaRPr>
+          </a:p>
+          <a:p>
+            <a:r>
+              <a:rPr lang="en-US" sz="1200" b="0" i="0" kern="1200" dirty="0">
+                <a:solidFill>
+                  <a:schemeClr val="tx1"/>
+                </a:solidFill>
+                <a:effectLst/>
+                <a:latin typeface="+mn-lt"/>
+                <a:ea typeface="+mn-ea"/>
+                <a:cs typeface="+mn-cs"/>
+              </a:rPr>
+              <a:t>Show the three outputs: </a:t>
+            </a:r>
+            <a:r>
+              <a:rPr lang="en-US" sz="1200" b="1" i="0" kern="1200" dirty="0">
+                <a:solidFill>
+                  <a:schemeClr val="tx1"/>
+                </a:solidFill>
+                <a:effectLst/>
+                <a:latin typeface="+mn-lt"/>
+                <a:ea typeface="+mn-ea"/>
+                <a:cs typeface="+mn-cs"/>
+              </a:rPr>
+              <a:t>Episode title → Key points → Recap script</a:t>
+            </a:r>
+            <a:r>
+              <a:rPr lang="en-US" sz="1200" b="0" i="0" kern="1200" dirty="0">
+                <a:solidFill>
+                  <a:schemeClr val="tx1"/>
+                </a:solidFill>
+                <a:effectLst/>
+                <a:latin typeface="+mn-lt"/>
+                <a:ea typeface="+mn-ea"/>
+                <a:cs typeface="+mn-cs"/>
+              </a:rPr>
+              <a:t>.</a:t>
+            </a:r>
+          </a:p>
+          <a:p>
+            <a:endParaRPr lang="en-US" sz="1200" b="1" i="0" kern="1200" dirty="0">
+              <a:solidFill>
+                <a:schemeClr val="tx1"/>
+              </a:solidFill>
+              <a:effectLst/>
+              <a:latin typeface="+mn-lt"/>
+              <a:ea typeface="+mn-ea"/>
+              <a:cs typeface="+mn-cs"/>
+            </a:endParaRPr>
+          </a:p>
+          <a:p>
+            <a:r>
+              <a:rPr lang="en-US" sz="1200" b="1" i="0" kern="1200" dirty="0">
+                <a:solidFill>
+                  <a:schemeClr val="tx1"/>
+                </a:solidFill>
+                <a:effectLst/>
+                <a:latin typeface="+mn-lt"/>
+                <a:ea typeface="+mn-ea"/>
+                <a:cs typeface="+mn-cs"/>
+              </a:rPr>
+              <a:t>Play the audio.</a:t>
+            </a:r>
+            <a:r>
+              <a:rPr lang="en-US" sz="1200" b="0" i="0" kern="1200" dirty="0">
+                <a:solidFill>
+                  <a:schemeClr val="tx1"/>
+                </a:solidFill>
+                <a:effectLst/>
+                <a:latin typeface="+mn-lt"/>
+                <a:ea typeface="+mn-ea"/>
+                <a:cs typeface="+mn-cs"/>
+              </a:rPr>
+              <a:t> Let a few seconds of it actually play — that's the wow moment.</a:t>
+            </a:r>
+          </a:p>
+          <a:p>
+            <a:endParaRPr lang="en-US" sz="1200" b="0" i="0" kern="1200" dirty="0">
+              <a:solidFill>
+                <a:schemeClr val="tx1"/>
+              </a:solidFill>
+              <a:effectLst/>
+              <a:latin typeface="+mn-lt"/>
+              <a:ea typeface="+mn-ea"/>
+              <a:cs typeface="+mn-cs"/>
+            </a:endParaRPr>
+          </a:p>
+          <a:p>
+            <a:r>
+              <a:rPr lang="en-US" sz="1200" b="0" i="0" kern="1200" dirty="0">
+                <a:solidFill>
+                  <a:schemeClr val="tx1"/>
+                </a:solidFill>
+                <a:effectLst/>
+                <a:latin typeface="+mn-lt"/>
+                <a:ea typeface="+mn-ea"/>
+                <a:cs typeface="+mn-cs"/>
+              </a:rPr>
+              <a:t>Quick flexibility mention (~10s, keep it verbal — stay on the reliable saved-lesson path, no live fetch): </a:t>
+            </a:r>
+          </a:p>
+          <a:p>
+            <a:endParaRPr lang="en-US" sz="1200" b="0" i="0" kern="1200" dirty="0">
+              <a:solidFill>
+                <a:schemeClr val="tx1"/>
+              </a:solidFill>
+              <a:effectLst/>
+              <a:latin typeface="+mn-lt"/>
+              <a:ea typeface="+mn-ea"/>
+              <a:cs typeface="+mn-cs"/>
+            </a:endParaRPr>
+          </a:p>
+          <a:p>
+            <a:r>
+              <a:rPr lang="en-US" sz="1200" b="0" i="0" kern="1200" dirty="0">
+                <a:solidFill>
+                  <a:schemeClr val="tx1"/>
+                </a:solidFill>
+                <a:effectLst/>
+                <a:latin typeface="+mn-lt"/>
+                <a:ea typeface="+mn-ea"/>
+                <a:cs typeface="+mn-cs"/>
+              </a:rPr>
+              <a:t>"It also takes a </a:t>
+            </a:r>
+            <a:r>
+              <a:rPr lang="en-US" sz="1200" b="1" i="0" kern="1200" dirty="0">
+                <a:solidFill>
+                  <a:schemeClr val="tx1"/>
+                </a:solidFill>
+                <a:effectLst/>
+                <a:latin typeface="+mn-lt"/>
+                <a:ea typeface="+mn-ea"/>
+                <a:cs typeface="+mn-cs"/>
+              </a:rPr>
+              <a:t>public URL</a:t>
+            </a:r>
+            <a:r>
+              <a:rPr lang="en-US" sz="1200" b="0" i="0" kern="1200" dirty="0">
+                <a:solidFill>
+                  <a:schemeClr val="tx1"/>
+                </a:solidFill>
+                <a:effectLst/>
+                <a:latin typeface="+mn-lt"/>
+                <a:ea typeface="+mn-ea"/>
+                <a:cs typeface="+mn-cs"/>
+              </a:rPr>
+              <a:t> or an </a:t>
+            </a:r>
+            <a:r>
+              <a:rPr lang="en-US" sz="1200" b="1" i="0" kern="1200" dirty="0">
+                <a:solidFill>
+                  <a:schemeClr val="tx1"/>
+                </a:solidFill>
+                <a:effectLst/>
+                <a:latin typeface="+mn-lt"/>
+                <a:ea typeface="+mn-ea"/>
+                <a:cs typeface="+mn-cs"/>
+              </a:rPr>
+              <a:t>uploaded file</a:t>
+            </a:r>
+            <a:r>
+              <a:rPr lang="en-US" sz="1200" b="0" i="0" kern="1200" dirty="0">
+                <a:solidFill>
+                  <a:schemeClr val="tx1"/>
+                </a:solidFill>
+                <a:effectLst/>
+                <a:latin typeface="+mn-lt"/>
+                <a:ea typeface="+mn-ea"/>
+                <a:cs typeface="+mn-cs"/>
+              </a:rPr>
+              <a:t> (.txt, .md, .pdf), so it works for lessons, articles, or your own notes too."</a:t>
+            </a:r>
+          </a:p>
+          <a:p>
+            <a:endParaRPr lang="en-US" sz="1200" b="0" i="0" kern="1200" dirty="0">
+              <a:solidFill>
+                <a:schemeClr val="tx1"/>
+              </a:solidFill>
+              <a:effectLst/>
+              <a:latin typeface="+mn-lt"/>
+              <a:ea typeface="+mn-ea"/>
+              <a:cs typeface="+mn-cs"/>
+            </a:endParaRPr>
+          </a:p>
+          <a:p>
+            <a:r>
+              <a:rPr lang="en-US" sz="1200" b="0" i="0" kern="1200" dirty="0">
+                <a:solidFill>
+                  <a:schemeClr val="tx1"/>
+                </a:solidFill>
+                <a:effectLst/>
+                <a:latin typeface="+mn-lt"/>
+                <a:ea typeface="+mn-ea"/>
+                <a:cs typeface="+mn-cs"/>
+              </a:rPr>
+              <a:t>Hand off: </a:t>
+            </a:r>
+            <a:r>
+              <a:rPr lang="en-US" sz="1200" b="0" i="1" kern="1200" dirty="0">
+                <a:solidFill>
+                  <a:schemeClr val="tx1"/>
+                </a:solidFill>
+                <a:effectLst/>
+                <a:latin typeface="+mn-lt"/>
+                <a:ea typeface="+mn-ea"/>
+                <a:cs typeface="+mn-cs"/>
+              </a:rPr>
+              <a:t>"Anand will cover what we learned and where we'd take it."</a:t>
+            </a:r>
+            <a:endParaRPr lang="en-US" sz="1200" b="0" i="0" kern="1200" dirty="0">
+              <a:solidFill>
+                <a:schemeClr val="tx1"/>
+              </a:solidFill>
+              <a:effectLst/>
+              <a:latin typeface="+mn-lt"/>
+              <a:ea typeface="+mn-ea"/>
+              <a:cs typeface="+mn-cs"/>
+            </a:endParaRPr>
+          </a:p>
+          <a:p>
+            <a:endParaRPr lang="en-US" sz="1200" b="1" i="0" kern="1200" dirty="0">
+              <a:solidFill>
+                <a:schemeClr val="tx1"/>
+              </a:solidFill>
+              <a:effectLst/>
+              <a:latin typeface="+mn-lt"/>
+              <a:ea typeface="+mn-ea"/>
+              <a:cs typeface="+mn-cs"/>
+            </a:endParaRPr>
+          </a:p>
+          <a:p>
+            <a:r>
+              <a:rPr lang="en-US" sz="1200" b="1" i="0" kern="1200" dirty="0">
+                <a:solidFill>
+                  <a:schemeClr val="tx1"/>
+                </a:solidFill>
+                <a:effectLst/>
+                <a:latin typeface="+mn-lt"/>
+                <a:ea typeface="+mn-ea"/>
+                <a:cs typeface="+mn-cs"/>
+              </a:rPr>
+              <a:t>If the live run stalls (Wi-Fi/API):</a:t>
+            </a:r>
+            <a:r>
+              <a:rPr lang="en-US" sz="1200" b="0" i="0" kern="1200" dirty="0">
+                <a:solidFill>
+                  <a:schemeClr val="tx1"/>
+                </a:solidFill>
+                <a:effectLst/>
+                <a:latin typeface="+mn-lt"/>
+                <a:ea typeface="+mn-ea"/>
+                <a:cs typeface="+mn-cs"/>
+              </a:rPr>
+              <a:t> immediately </a:t>
+            </a:r>
+            <a:r>
+              <a:rPr lang="en-US" sz="1200" b="1" i="0" kern="1200" dirty="0">
+                <a:solidFill>
+                  <a:schemeClr val="tx1"/>
+                </a:solidFill>
+                <a:effectLst/>
+                <a:latin typeface="+mn-lt"/>
+                <a:ea typeface="+mn-ea"/>
+                <a:cs typeface="+mn-cs"/>
+              </a:rPr>
+              <a:t>play a pre-generated </a:t>
+            </a:r>
+            <a:r>
+              <a:rPr lang="en-US" sz="1020" b="1" i="0" kern="1200" dirty="0">
+                <a:solidFill>
+                  <a:schemeClr val="tx1"/>
+                </a:solidFill>
+                <a:effectLst/>
+                <a:latin typeface="+mn-lt"/>
+                <a:ea typeface="+mn-ea"/>
+                <a:cs typeface="+mn-cs"/>
+              </a:rPr>
+              <a:t>.mp3</a:t>
+            </a:r>
+            <a:r>
+              <a:rPr lang="en-US" sz="1200" b="1" i="0" kern="1200" dirty="0">
+                <a:solidFill>
+                  <a:schemeClr val="tx1"/>
+                </a:solidFill>
+                <a:effectLst/>
+                <a:latin typeface="+mn-lt"/>
+                <a:ea typeface="+mn-ea"/>
+                <a:cs typeface="+mn-cs"/>
+              </a:rPr>
+              <a:t> from </a:t>
+            </a:r>
+            <a:r>
+              <a:rPr lang="en-US" sz="1020" b="1" i="0" kern="1200" dirty="0">
+                <a:solidFill>
+                  <a:schemeClr val="tx1"/>
+                </a:solidFill>
+                <a:effectLst/>
+                <a:latin typeface="+mn-lt"/>
+                <a:ea typeface="+mn-ea"/>
+                <a:cs typeface="+mn-cs"/>
+              </a:rPr>
+              <a:t>output/</a:t>
+            </a:r>
+            <a:r>
+              <a:rPr lang="en-US" sz="1200" b="0" i="0" kern="1200" dirty="0">
+                <a:solidFill>
+                  <a:schemeClr val="tx1"/>
+                </a:solidFill>
+                <a:effectLst/>
+                <a:latin typeface="+mn-lt"/>
+                <a:ea typeface="+mn-ea"/>
+                <a:cs typeface="+mn-cs"/>
+              </a:rPr>
+              <a:t> and keep narrating. Never stare at a spinner.</a:t>
+            </a:r>
+          </a:p>
+          <a:p>
+            <a:r>
+              <a:rPr lang="en-US" sz="1200" b="0" i="0" kern="1200" dirty="0">
+                <a:solidFill>
+                  <a:schemeClr val="tx1"/>
+                </a:solidFill>
+                <a:effectLst/>
+                <a:latin typeface="+mn-lt"/>
+                <a:ea typeface="+mn-ea"/>
+                <a:cs typeface="+mn-cs"/>
+              </a:rPr>
+              <a:t>Note: keep the demo on </a:t>
+            </a:r>
+            <a:r>
+              <a:rPr lang="en-US" sz="1200" b="1" i="0" kern="1200" dirty="0">
+                <a:solidFill>
+                  <a:schemeClr val="tx1"/>
+                </a:solidFill>
+                <a:effectLst/>
+                <a:latin typeface="+mn-lt"/>
+                <a:ea typeface="+mn-ea"/>
+                <a:cs typeface="+mn-cs"/>
+              </a:rPr>
+              <a:t>pick-a-saved-lesson</a:t>
+            </a:r>
+            <a:r>
+              <a:rPr lang="en-US" sz="1200" b="0" i="0" kern="1200" dirty="0">
+                <a:solidFill>
+                  <a:schemeClr val="tx1"/>
+                </a:solidFill>
+                <a:effectLst/>
+                <a:latin typeface="+mn-lt"/>
+                <a:ea typeface="+mn-ea"/>
+                <a:cs typeface="+mn-cs"/>
+              </a:rPr>
+              <a:t> — it's fast and reliable. We're not featuring the login-only-pages caveat; no need to raise it.</a:t>
             </a:r>
           </a:p>
         </p:txBody>

--- a/Podcast-Studio-Presentation.pptx
+++ b/Podcast-Studio-Presentation.pptx
@@ -288,7 +288,25 @@
           <a:p>
             <a:r>
               <a:rPr lang="en-US" dirty="0"/>
-              <a:t>Title. SPEAKER 1 opens: name the team and what we built in one line.</a:t>
+              <a:t>Adam — Introduction (~45s). Open, name the team, one line on what it is — then straight into the problem.</a:t>
+            </a:r>
+          </a:p>
+          <a:p>
+            <a:r>
+              <a:rPr lang="en-US" dirty="0"/>
+              <a:t>“Hi, we’re Adam, Ugo, and Anand. We built Podcast Studio — a Content Recapper.”</a:t>
+            </a:r>
+          </a:p>
+          <a:p>
+            <a:r>
+              <a:rPr lang="en-US" dirty="0"/>
+              <a:t>What it is, in one line: “You give it a lesson — pick a saved one, a public URL, or upload a file — and it turns it into a short spoken recap podcast.”</a:t>
+            </a:r>
+          </a:p>
+          <a:p>
+            <a:r>
+              <a:rPr lang="en-US" dirty="0"/>
+              <a:t>Keep it to two sentences; the problem slide is where the story lands.</a:t>
             </a:r>
           </a:p>
         </p:txBody>
@@ -375,7 +393,37 @@
           <a:p>
             <a:r>
               <a:rPr lang="en-US" dirty="0"/>
-              <a:t>SPEAKER 1 — Problem. Anchor it in a real audience; hand off to SPEAKER 2 for the live demo.</a:t>
+              <a:t>Adam — Problem (~1:15). Anchor it in a real audience, then hand to Ugo.</a:t>
+            </a:r>
+          </a:p>
+          <a:p>
+            <a:r>
+              <a:rPr lang="en-US" dirty="0"/>
+              <a:t>“As students, we get hours of dense material every day and very little time to review it.”</a:t>
+            </a:r>
+          </a:p>
+          <a:p>
+            <a:r>
+              <a:rPr lang="en-US" dirty="0"/>
+              <a:t>“Reading notes back is slow. Listening isn’t — you can do it on the commute, at the gym, cooking.”</a:t>
+            </a:r>
+          </a:p>
+          <a:p>
+            <a:r>
+              <a:rPr lang="en-US" dirty="0"/>
+              <a:t>“So our audience is learners who want a ~1-minute audio recap to review on the go. It’s also an accessibility win for anyone who learns better by ear.”</a:t>
+            </a:r>
+          </a:p>
+          <a:p>
+            <a:r>
+              <a:rPr lang="en-US" dirty="0"/>
+              <a:t>“Think NotebookLM, but focused on your own lessons.”</a:t>
+            </a:r>
+          </a:p>
+          <a:p>
+            <a:r>
+              <a:rPr lang="en-US" dirty="0"/>
+              <a:t>Hand off: “Ugo will show it live.”</a:t>
             </a:r>
           </a:p>
         </p:txBody>

--- a/Podcast-Studio-Presentation.pptx
+++ b/Podcast-Studio-Presentation.pptx
@@ -2012,7 +2012,49 @@
           <a:p>
             <a:r>
               <a:rPr lang="en-US" dirty="0"/>
-              <a:t>All three field Q&amp;A. SPEAKER 1: audience/use. SPEAKER 2: demo/product/cost. SPEAKER 3: technical.</a:t>
+              <a:t>All three field Q&amp;A (~3 min) — split domains so nobody freezes. Closing line first:</a:t>
+            </a:r>
+          </a:p>
+          <a:p>
+            <a:r>
+              <a:rPr lang="en-US" dirty="0"/>
+              <a:t>“That’s the build — happy to take questions.”</a:t>
+            </a:r>
+          </a:p>
+          <a:p>
+            <a:r>
+              <a:rPr lang="en-US" dirty="0"/>
+              <a:t>Adam — “Who would actually use this?”: students reviewing on the go; accessibility; onboarding/training recaps.</a:t>
+            </a:r>
+          </a:p>
+          <a:p>
+            <a:r>
+              <a:rPr lang="en-US" dirty="0"/>
+              <a:t>Adam — “Could your team run it?”: yes — README + TEAM_GUIDE + double-click launchers, Mac &amp; Windows.</a:t>
+            </a:r>
+          </a:p>
+          <a:p>
+            <a:r>
+              <a:rPr lang="en-US" dirty="0"/>
+              <a:t>Ugo — demo/product (“can it do X?”): show or describe; scope is one lesson → one recap, extensible.</a:t>
+            </a:r>
+          </a:p>
+          <a:p>
+            <a:r>
+              <a:rPr lang="en-US" dirty="0"/>
+              <a:t>Ugo — cost: about 1 cent per recap (one LLM call + one TTS call).</a:t>
+            </a:r>
+          </a:p>
+          <a:p>
+            <a:r>
+              <a:rPr lang="en-US" dirty="0"/>
+              <a:t>Anand — “How do you stop it making things up?”: structured output + the prompt grounds it in the provided text.</a:t>
+            </a:r>
+          </a:p>
+          <a:p>
+            <a:r>
+              <a:rPr lang="en-US" dirty="0"/>
+              <a:t>Anand — “Why OpenAI for both?”: one key and bill, strong integration, TTS returns mp3 (no extra tools).</a:t>
             </a:r>
           </a:p>
         </p:txBody>
